--- a/BitacorasFirmadasPractica/ExposicionFinal/Resultado/PracticaProfesional_PresentacionFinal_KevinCampos.pptx
+++ b/BitacorasFirmadasPractica/ExposicionFinal/Resultado/PracticaProfesional_PresentacionFinal_KevinCampos.pptx
@@ -5,29 +5,29 @@
     <p:sldMasterId id="2147483648" r:id="rId1"/>
   </p:sldMasterIdLst>
   <p:sldIdLst>
-    <p:sldId id="256" r:id="rId7"/>
-    <p:sldId id="257" r:id="rId8"/>
-    <p:sldId id="258" r:id="rId9"/>
-    <p:sldId id="259" r:id="rId10"/>
-    <p:sldId id="260" r:id="rId11"/>
-    <p:sldId id="261" r:id="rId12"/>
-    <p:sldId id="262" r:id="rId13"/>
-    <p:sldId id="263" r:id="rId14"/>
-    <p:sldId id="264" r:id="rId15"/>
-    <p:sldId id="265" r:id="rId16"/>
-    <p:sldId id="266" r:id="rId17"/>
-    <p:sldId id="267" r:id="rId18"/>
-    <p:sldId id="268" r:id="rId19"/>
-    <p:sldId id="269" r:id="rId20"/>
-    <p:sldId id="270" r:id="rId21"/>
-    <p:sldId id="271" r:id="rId22"/>
-    <p:sldId id="272" r:id="rId23"/>
-    <p:sldId id="273" r:id="rId24"/>
-    <p:sldId id="274" r:id="rId25"/>
-    <p:sldId id="275" r:id="rId26"/>
-    <p:sldId id="276" r:id="rId27"/>
+    <p:sldId id="256" r:id="rId2"/>
+    <p:sldId id="257" r:id="rId3"/>
+    <p:sldId id="258" r:id="rId4"/>
+    <p:sldId id="259" r:id="rId5"/>
+    <p:sldId id="260" r:id="rId6"/>
+    <p:sldId id="261" r:id="rId7"/>
+    <p:sldId id="262" r:id="rId8"/>
+    <p:sldId id="263" r:id="rId9"/>
+    <p:sldId id="264" r:id="rId10"/>
+    <p:sldId id="265" r:id="rId11"/>
+    <p:sldId id="266" r:id="rId12"/>
+    <p:sldId id="267" r:id="rId13"/>
+    <p:sldId id="268" r:id="rId14"/>
+    <p:sldId id="269" r:id="rId15"/>
+    <p:sldId id="270" r:id="rId16"/>
+    <p:sldId id="271" r:id="rId17"/>
+    <p:sldId id="272" r:id="rId18"/>
+    <p:sldId id="273" r:id="rId19"/>
+    <p:sldId id="274" r:id="rId20"/>
+    <p:sldId id="275" r:id="rId21"/>
+    <p:sldId id="276" r:id="rId22"/>
   </p:sldIdLst>
-  <p:sldSz cx="12191969" cy="6858000" type="screen4x3"/>
+  <p:sldSz cx="12192000" cy="6858000"/>
   <p:notesSz cx="6858000" cy="9144000"/>
   <p:defaultTextStyle>
     <a:defPPr>
@@ -124,6 +124,22 @@
       </a:defRPr>
     </a:lvl9pPr>
   </p:defaultTextStyle>
+  <p:extLst>
+    <p:ext uri="{EFAFB233-063F-42B5-8137-9DF3F51BA10A}">
+      <p15:sldGuideLst xmlns:p15="http://schemas.microsoft.com/office/powerpoint/2012/main">
+        <p15:guide id="1" orient="horz" pos="2160">
+          <p15:clr>
+            <a:srgbClr val="A4A3A4"/>
+          </p15:clr>
+        </p15:guide>
+        <p15:guide id="2" pos="2880">
+          <p15:clr>
+            <a:srgbClr val="A4A3A4"/>
+          </p15:clr>
+        </p15:guide>
+      </p15:sldGuideLst>
+    </p:ext>
+  </p:extLst>
 </p:presentation>
 </file>
 
@@ -165,10 +181,9 @@
           <a:lstStyle/>
           <a:p>
             <a:r>
-              <a:rPr lang="en-US" smtClean="0"/>
+              <a:rPr lang="en-US"/>
               <a:t>Click to edit Master title style</a:t>
             </a:r>
-            <a:endParaRPr lang="en-US"/>
           </a:p>
         </p:txBody>
       </p:sp>
@@ -284,10 +299,9 @@
           </a:lstStyle>
           <a:p>
             <a:r>
-              <a:rPr lang="en-US" smtClean="0"/>
+              <a:rPr lang="en-US"/>
               <a:t>Click to edit Master subtitle style</a:t>
             </a:r>
-            <a:endParaRPr lang="en-US"/>
           </a:p>
         </p:txBody>
       </p:sp>
@@ -308,7 +322,7 @@
           <a:p>
             <a:fld id="{5BCAD085-E8A6-8845-BD4E-CB4CCA059FC4}" type="datetimeFigureOut">
               <a:rPr lang="en-US" smtClean="0"/>
-              <a:t>1/27/13</a:t>
+              <a:t>8/25/2026</a:t>
             </a:fld>
             <a:endParaRPr lang="en-US"/>
           </a:p>
@@ -350,7 +364,7 @@
           <a:p>
             <a:fld id="{C1FF6DA9-008F-8B48-92A6-B652298478BF}" type="slidenum">
               <a:rPr lang="en-US" smtClean="0"/>
-              <a:t>‹#›</a:t>
+              <a:t>‹Nº›</a:t>
             </a:fld>
             <a:endParaRPr lang="en-US"/>
           </a:p>
@@ -402,10 +416,9 @@
           <a:lstStyle/>
           <a:p>
             <a:r>
-              <a:rPr lang="en-US" smtClean="0"/>
+              <a:rPr lang="en-US"/>
               <a:t>Click to edit Master title style</a:t>
             </a:r>
-            <a:endParaRPr lang="en-US"/>
           </a:p>
         </p:txBody>
       </p:sp>
@@ -426,38 +439,37 @@
           <a:p>
             <a:pPr lvl="0"/>
             <a:r>
-              <a:rPr lang="en-US" smtClean="0"/>
+              <a:rPr lang="en-US"/>
               <a:t>Click to edit Master text styles</a:t>
             </a:r>
           </a:p>
           <a:p>
             <a:pPr lvl="1"/>
             <a:r>
-              <a:rPr lang="en-US" smtClean="0"/>
+              <a:rPr lang="en-US"/>
               <a:t>Second level</a:t>
             </a:r>
           </a:p>
           <a:p>
             <a:pPr lvl="2"/>
             <a:r>
-              <a:rPr lang="en-US" smtClean="0"/>
+              <a:rPr lang="en-US"/>
               <a:t>Third level</a:t>
             </a:r>
           </a:p>
           <a:p>
             <a:pPr lvl="3"/>
             <a:r>
-              <a:rPr lang="en-US" smtClean="0"/>
+              <a:rPr lang="en-US"/>
               <a:t>Fourth level</a:t>
             </a:r>
           </a:p>
           <a:p>
             <a:pPr lvl="4"/>
             <a:r>
-              <a:rPr lang="en-US" smtClean="0"/>
+              <a:rPr lang="en-US"/>
               <a:t>Fifth level</a:t>
             </a:r>
-            <a:endParaRPr lang="en-US"/>
           </a:p>
         </p:txBody>
       </p:sp>
@@ -478,7 +490,7 @@
           <a:p>
             <a:fld id="{5BCAD085-E8A6-8845-BD4E-CB4CCA059FC4}" type="datetimeFigureOut">
               <a:rPr lang="en-US" smtClean="0"/>
-              <a:t>1/27/13</a:t>
+              <a:t>8/25/2026</a:t>
             </a:fld>
             <a:endParaRPr lang="en-US"/>
           </a:p>
@@ -520,7 +532,7 @@
           <a:p>
             <a:fld id="{C1FF6DA9-008F-8B48-92A6-B652298478BF}" type="slidenum">
               <a:rPr lang="en-US" smtClean="0"/>
-              <a:t>‹#›</a:t>
+              <a:t>‹Nº›</a:t>
             </a:fld>
             <a:endParaRPr lang="en-US"/>
           </a:p>
@@ -577,10 +589,9 @@
           <a:lstStyle/>
           <a:p>
             <a:r>
-              <a:rPr lang="en-US" smtClean="0"/>
+              <a:rPr lang="en-US"/>
               <a:t>Click to edit Master title style</a:t>
             </a:r>
-            <a:endParaRPr lang="en-US"/>
           </a:p>
         </p:txBody>
       </p:sp>
@@ -606,38 +617,37 @@
           <a:p>
             <a:pPr lvl="0"/>
             <a:r>
-              <a:rPr lang="en-US" smtClean="0"/>
+              <a:rPr lang="en-US"/>
               <a:t>Click to edit Master text styles</a:t>
             </a:r>
           </a:p>
           <a:p>
             <a:pPr lvl="1"/>
             <a:r>
-              <a:rPr lang="en-US" smtClean="0"/>
+              <a:rPr lang="en-US"/>
               <a:t>Second level</a:t>
             </a:r>
           </a:p>
           <a:p>
             <a:pPr lvl="2"/>
             <a:r>
-              <a:rPr lang="en-US" smtClean="0"/>
+              <a:rPr lang="en-US"/>
               <a:t>Third level</a:t>
             </a:r>
           </a:p>
           <a:p>
             <a:pPr lvl="3"/>
             <a:r>
-              <a:rPr lang="en-US" smtClean="0"/>
+              <a:rPr lang="en-US"/>
               <a:t>Fourth level</a:t>
             </a:r>
           </a:p>
           <a:p>
             <a:pPr lvl="4"/>
             <a:r>
-              <a:rPr lang="en-US" smtClean="0"/>
+              <a:rPr lang="en-US"/>
               <a:t>Fifth level</a:t>
             </a:r>
-            <a:endParaRPr lang="en-US"/>
           </a:p>
         </p:txBody>
       </p:sp>
@@ -658,7 +668,7 @@
           <a:p>
             <a:fld id="{5BCAD085-E8A6-8845-BD4E-CB4CCA059FC4}" type="datetimeFigureOut">
               <a:rPr lang="en-US" smtClean="0"/>
-              <a:t>1/27/13</a:t>
+              <a:t>8/25/2026</a:t>
             </a:fld>
             <a:endParaRPr lang="en-US"/>
           </a:p>
@@ -700,7 +710,7 @@
           <a:p>
             <a:fld id="{C1FF6DA9-008F-8B48-92A6-B652298478BF}" type="slidenum">
               <a:rPr lang="en-US" smtClean="0"/>
-              <a:t>‹#›</a:t>
+              <a:t>‹Nº›</a:t>
             </a:fld>
             <a:endParaRPr lang="en-US"/>
           </a:p>
@@ -752,10 +762,9 @@
           <a:lstStyle/>
           <a:p>
             <a:r>
-              <a:rPr lang="en-US" smtClean="0"/>
+              <a:rPr lang="en-US"/>
               <a:t>Click to edit Master title style</a:t>
             </a:r>
-            <a:endParaRPr lang="en-US"/>
           </a:p>
         </p:txBody>
       </p:sp>
@@ -776,38 +785,37 @@
           <a:p>
             <a:pPr lvl="0"/>
             <a:r>
-              <a:rPr lang="en-US" smtClean="0"/>
+              <a:rPr lang="en-US"/>
               <a:t>Click to edit Master text styles</a:t>
             </a:r>
           </a:p>
           <a:p>
             <a:pPr lvl="1"/>
             <a:r>
-              <a:rPr lang="en-US" smtClean="0"/>
+              <a:rPr lang="en-US"/>
               <a:t>Second level</a:t>
             </a:r>
           </a:p>
           <a:p>
             <a:pPr lvl="2"/>
             <a:r>
-              <a:rPr lang="en-US" smtClean="0"/>
+              <a:rPr lang="en-US"/>
               <a:t>Third level</a:t>
             </a:r>
           </a:p>
           <a:p>
             <a:pPr lvl="3"/>
             <a:r>
-              <a:rPr lang="en-US" smtClean="0"/>
+              <a:rPr lang="en-US"/>
               <a:t>Fourth level</a:t>
             </a:r>
           </a:p>
           <a:p>
             <a:pPr lvl="4"/>
             <a:r>
-              <a:rPr lang="en-US" smtClean="0"/>
+              <a:rPr lang="en-US"/>
               <a:t>Fifth level</a:t>
             </a:r>
-            <a:endParaRPr lang="en-US"/>
           </a:p>
         </p:txBody>
       </p:sp>
@@ -828,7 +836,7 @@
           <a:p>
             <a:fld id="{5BCAD085-E8A6-8845-BD4E-CB4CCA059FC4}" type="datetimeFigureOut">
               <a:rPr lang="en-US" smtClean="0"/>
-              <a:t>1/27/13</a:t>
+              <a:t>8/25/2026</a:t>
             </a:fld>
             <a:endParaRPr lang="en-US"/>
           </a:p>
@@ -870,7 +878,7 @@
           <a:p>
             <a:fld id="{C1FF6DA9-008F-8B48-92A6-B652298478BF}" type="slidenum">
               <a:rPr lang="en-US" smtClean="0"/>
-              <a:t>‹#›</a:t>
+              <a:t>‹Nº›</a:t>
             </a:fld>
             <a:endParaRPr lang="en-US"/>
           </a:p>
@@ -931,10 +939,9 @@
           </a:lstStyle>
           <a:p>
             <a:r>
-              <a:rPr lang="en-US" smtClean="0"/>
+              <a:rPr lang="en-US"/>
               <a:t>Click to edit Master title style</a:t>
             </a:r>
-            <a:endParaRPr lang="en-US"/>
           </a:p>
         </p:txBody>
       </p:sp>
@@ -1051,7 +1058,7 @@
           <a:p>
             <a:pPr lvl="0"/>
             <a:r>
-              <a:rPr lang="en-US" smtClean="0"/>
+              <a:rPr lang="en-US"/>
               <a:t>Click to edit Master text styles</a:t>
             </a:r>
           </a:p>
@@ -1074,7 +1081,7 @@
           <a:p>
             <a:fld id="{5BCAD085-E8A6-8845-BD4E-CB4CCA059FC4}" type="datetimeFigureOut">
               <a:rPr lang="en-US" smtClean="0"/>
-              <a:t>1/27/13</a:t>
+              <a:t>8/25/2026</a:t>
             </a:fld>
             <a:endParaRPr lang="en-US"/>
           </a:p>
@@ -1116,7 +1123,7 @@
           <a:p>
             <a:fld id="{C1FF6DA9-008F-8B48-92A6-B652298478BF}" type="slidenum">
               <a:rPr lang="en-US" smtClean="0"/>
-              <a:t>‹#›</a:t>
+              <a:t>‹Nº›</a:t>
             </a:fld>
             <a:endParaRPr lang="en-US"/>
           </a:p>
@@ -1168,10 +1175,9 @@
           <a:lstStyle/>
           <a:p>
             <a:r>
-              <a:rPr lang="en-US" smtClean="0"/>
+              <a:rPr lang="en-US"/>
               <a:t>Click to edit Master title style</a:t>
             </a:r>
-            <a:endParaRPr lang="en-US"/>
           </a:p>
         </p:txBody>
       </p:sp>
@@ -1225,38 +1231,37 @@
           <a:p>
             <a:pPr lvl="0"/>
             <a:r>
-              <a:rPr lang="en-US" smtClean="0"/>
+              <a:rPr lang="en-US"/>
               <a:t>Click to edit Master text styles</a:t>
             </a:r>
           </a:p>
           <a:p>
             <a:pPr lvl="1"/>
             <a:r>
-              <a:rPr lang="en-US" smtClean="0"/>
+              <a:rPr lang="en-US"/>
               <a:t>Second level</a:t>
             </a:r>
           </a:p>
           <a:p>
             <a:pPr lvl="2"/>
             <a:r>
-              <a:rPr lang="en-US" smtClean="0"/>
+              <a:rPr lang="en-US"/>
               <a:t>Third level</a:t>
             </a:r>
           </a:p>
           <a:p>
             <a:pPr lvl="3"/>
             <a:r>
-              <a:rPr lang="en-US" smtClean="0"/>
+              <a:rPr lang="en-US"/>
               <a:t>Fourth level</a:t>
             </a:r>
           </a:p>
           <a:p>
             <a:pPr lvl="4"/>
             <a:r>
-              <a:rPr lang="en-US" smtClean="0"/>
+              <a:rPr lang="en-US"/>
               <a:t>Fifth level</a:t>
             </a:r>
-            <a:endParaRPr lang="en-US"/>
           </a:p>
         </p:txBody>
       </p:sp>
@@ -1310,38 +1315,37 @@
           <a:p>
             <a:pPr lvl="0"/>
             <a:r>
-              <a:rPr lang="en-US" smtClean="0"/>
+              <a:rPr lang="en-US"/>
               <a:t>Click to edit Master text styles</a:t>
             </a:r>
           </a:p>
           <a:p>
             <a:pPr lvl="1"/>
             <a:r>
-              <a:rPr lang="en-US" smtClean="0"/>
+              <a:rPr lang="en-US"/>
               <a:t>Second level</a:t>
             </a:r>
           </a:p>
           <a:p>
             <a:pPr lvl="2"/>
             <a:r>
-              <a:rPr lang="en-US" smtClean="0"/>
+              <a:rPr lang="en-US"/>
               <a:t>Third level</a:t>
             </a:r>
           </a:p>
           <a:p>
             <a:pPr lvl="3"/>
             <a:r>
-              <a:rPr lang="en-US" smtClean="0"/>
+              <a:rPr lang="en-US"/>
               <a:t>Fourth level</a:t>
             </a:r>
           </a:p>
           <a:p>
             <a:pPr lvl="4"/>
             <a:r>
-              <a:rPr lang="en-US" smtClean="0"/>
+              <a:rPr lang="en-US"/>
               <a:t>Fifth level</a:t>
             </a:r>
-            <a:endParaRPr lang="en-US"/>
           </a:p>
         </p:txBody>
       </p:sp>
@@ -1362,7 +1366,7 @@
           <a:p>
             <a:fld id="{5BCAD085-E8A6-8845-BD4E-CB4CCA059FC4}" type="datetimeFigureOut">
               <a:rPr lang="en-US" smtClean="0"/>
-              <a:t>1/27/13</a:t>
+              <a:t>8/25/2026</a:t>
             </a:fld>
             <a:endParaRPr lang="en-US"/>
           </a:p>
@@ -1404,7 +1408,7 @@
           <a:p>
             <a:fld id="{C1FF6DA9-008F-8B48-92A6-B652298478BF}" type="slidenum">
               <a:rPr lang="en-US" smtClean="0"/>
-              <a:t>‹#›</a:t>
+              <a:t>‹Nº›</a:t>
             </a:fld>
             <a:endParaRPr lang="en-US"/>
           </a:p>
@@ -1460,10 +1464,9 @@
           </a:lstStyle>
           <a:p>
             <a:r>
-              <a:rPr lang="en-US" smtClean="0"/>
+              <a:rPr lang="en-US"/>
               <a:t>Click to edit Master title style</a:t>
             </a:r>
-            <a:endParaRPr lang="en-US"/>
           </a:p>
         </p:txBody>
       </p:sp>
@@ -1526,7 +1529,7 @@
           <a:p>
             <a:pPr lvl="0"/>
             <a:r>
-              <a:rPr lang="en-US" smtClean="0"/>
+              <a:rPr lang="en-US"/>
               <a:t>Click to edit Master text styles</a:t>
             </a:r>
           </a:p>
@@ -1582,38 +1585,37 @@
           <a:p>
             <a:pPr lvl="0"/>
             <a:r>
-              <a:rPr lang="en-US" smtClean="0"/>
+              <a:rPr lang="en-US"/>
               <a:t>Click to edit Master text styles</a:t>
             </a:r>
           </a:p>
           <a:p>
             <a:pPr lvl="1"/>
             <a:r>
-              <a:rPr lang="en-US" smtClean="0"/>
+              <a:rPr lang="en-US"/>
               <a:t>Second level</a:t>
             </a:r>
           </a:p>
           <a:p>
             <a:pPr lvl="2"/>
             <a:r>
-              <a:rPr lang="en-US" smtClean="0"/>
+              <a:rPr lang="en-US"/>
               <a:t>Third level</a:t>
             </a:r>
           </a:p>
           <a:p>
             <a:pPr lvl="3"/>
             <a:r>
-              <a:rPr lang="en-US" smtClean="0"/>
+              <a:rPr lang="en-US"/>
               <a:t>Fourth level</a:t>
             </a:r>
           </a:p>
           <a:p>
             <a:pPr lvl="4"/>
             <a:r>
-              <a:rPr lang="en-US" smtClean="0"/>
+              <a:rPr lang="en-US"/>
               <a:t>Fifth level</a:t>
             </a:r>
-            <a:endParaRPr lang="en-US"/>
           </a:p>
         </p:txBody>
       </p:sp>
@@ -1676,7 +1678,7 @@
           <a:p>
             <a:pPr lvl="0"/>
             <a:r>
-              <a:rPr lang="en-US" smtClean="0"/>
+              <a:rPr lang="en-US"/>
               <a:t>Click to edit Master text styles</a:t>
             </a:r>
           </a:p>
@@ -1732,38 +1734,37 @@
           <a:p>
             <a:pPr lvl="0"/>
             <a:r>
-              <a:rPr lang="en-US" smtClean="0"/>
+              <a:rPr lang="en-US"/>
               <a:t>Click to edit Master text styles</a:t>
             </a:r>
           </a:p>
           <a:p>
             <a:pPr lvl="1"/>
             <a:r>
-              <a:rPr lang="en-US" smtClean="0"/>
+              <a:rPr lang="en-US"/>
               <a:t>Second level</a:t>
             </a:r>
           </a:p>
           <a:p>
             <a:pPr lvl="2"/>
             <a:r>
-              <a:rPr lang="en-US" smtClean="0"/>
+              <a:rPr lang="en-US"/>
               <a:t>Third level</a:t>
             </a:r>
           </a:p>
           <a:p>
             <a:pPr lvl="3"/>
             <a:r>
-              <a:rPr lang="en-US" smtClean="0"/>
+              <a:rPr lang="en-US"/>
               <a:t>Fourth level</a:t>
             </a:r>
           </a:p>
           <a:p>
             <a:pPr lvl="4"/>
             <a:r>
-              <a:rPr lang="en-US" smtClean="0"/>
+              <a:rPr lang="en-US"/>
               <a:t>Fifth level</a:t>
             </a:r>
-            <a:endParaRPr lang="en-US"/>
           </a:p>
         </p:txBody>
       </p:sp>
@@ -1784,7 +1785,7 @@
           <a:p>
             <a:fld id="{5BCAD085-E8A6-8845-BD4E-CB4CCA059FC4}" type="datetimeFigureOut">
               <a:rPr lang="en-US" smtClean="0"/>
-              <a:t>1/27/13</a:t>
+              <a:t>8/25/2026</a:t>
             </a:fld>
             <a:endParaRPr lang="en-US"/>
           </a:p>
@@ -1826,7 +1827,7 @@
           <a:p>
             <a:fld id="{C1FF6DA9-008F-8B48-92A6-B652298478BF}" type="slidenum">
               <a:rPr lang="en-US" smtClean="0"/>
-              <a:t>‹#›</a:t>
+              <a:t>‹Nº›</a:t>
             </a:fld>
             <a:endParaRPr lang="en-US"/>
           </a:p>
@@ -1878,10 +1879,9 @@
           <a:lstStyle/>
           <a:p>
             <a:r>
-              <a:rPr lang="en-US" smtClean="0"/>
+              <a:rPr lang="en-US"/>
               <a:t>Click to edit Master title style</a:t>
             </a:r>
-            <a:endParaRPr lang="en-US"/>
           </a:p>
         </p:txBody>
       </p:sp>
@@ -1902,7 +1902,7 @@
           <a:p>
             <a:fld id="{5BCAD085-E8A6-8845-BD4E-CB4CCA059FC4}" type="datetimeFigureOut">
               <a:rPr lang="en-US" smtClean="0"/>
-              <a:t>1/27/13</a:t>
+              <a:t>8/25/2026</a:t>
             </a:fld>
             <a:endParaRPr lang="en-US"/>
           </a:p>
@@ -1944,7 +1944,7 @@
           <a:p>
             <a:fld id="{C1FF6DA9-008F-8B48-92A6-B652298478BF}" type="slidenum">
               <a:rPr lang="en-US" smtClean="0"/>
-              <a:t>‹#›</a:t>
+              <a:t>‹Nº›</a:t>
             </a:fld>
             <a:endParaRPr lang="en-US"/>
           </a:p>
@@ -1997,7 +1997,7 @@
           <a:p>
             <a:fld id="{5BCAD085-E8A6-8845-BD4E-CB4CCA059FC4}" type="datetimeFigureOut">
               <a:rPr lang="en-US" smtClean="0"/>
-              <a:t>1/27/13</a:t>
+              <a:t>8/25/2026</a:t>
             </a:fld>
             <a:endParaRPr lang="en-US"/>
           </a:p>
@@ -2039,7 +2039,7 @@
           <a:p>
             <a:fld id="{C1FF6DA9-008F-8B48-92A6-B652298478BF}" type="slidenum">
               <a:rPr lang="en-US" smtClean="0"/>
-              <a:t>‹#›</a:t>
+              <a:t>‹Nº›</a:t>
             </a:fld>
             <a:endParaRPr lang="en-US"/>
           </a:p>
@@ -2100,10 +2100,9 @@
           </a:lstStyle>
           <a:p>
             <a:r>
-              <a:rPr lang="en-US" smtClean="0"/>
+              <a:rPr lang="en-US"/>
               <a:t>Click to edit Master title style</a:t>
             </a:r>
-            <a:endParaRPr lang="en-US"/>
           </a:p>
         </p:txBody>
       </p:sp>
@@ -2157,38 +2156,37 @@
           <a:p>
             <a:pPr lvl="0"/>
             <a:r>
-              <a:rPr lang="en-US" smtClean="0"/>
+              <a:rPr lang="en-US"/>
               <a:t>Click to edit Master text styles</a:t>
             </a:r>
           </a:p>
           <a:p>
             <a:pPr lvl="1"/>
             <a:r>
-              <a:rPr lang="en-US" smtClean="0"/>
+              <a:rPr lang="en-US"/>
               <a:t>Second level</a:t>
             </a:r>
           </a:p>
           <a:p>
             <a:pPr lvl="2"/>
             <a:r>
-              <a:rPr lang="en-US" smtClean="0"/>
+              <a:rPr lang="en-US"/>
               <a:t>Third level</a:t>
             </a:r>
           </a:p>
           <a:p>
             <a:pPr lvl="3"/>
             <a:r>
-              <a:rPr lang="en-US" smtClean="0"/>
+              <a:rPr lang="en-US"/>
               <a:t>Fourth level</a:t>
             </a:r>
           </a:p>
           <a:p>
             <a:pPr lvl="4"/>
             <a:r>
-              <a:rPr lang="en-US" smtClean="0"/>
+              <a:rPr lang="en-US"/>
               <a:t>Fifth level</a:t>
             </a:r>
-            <a:endParaRPr lang="en-US"/>
           </a:p>
         </p:txBody>
       </p:sp>
@@ -2251,7 +2249,7 @@
           <a:p>
             <a:pPr lvl="0"/>
             <a:r>
-              <a:rPr lang="en-US" smtClean="0"/>
+              <a:rPr lang="en-US"/>
               <a:t>Click to edit Master text styles</a:t>
             </a:r>
           </a:p>
@@ -2274,7 +2272,7 @@
           <a:p>
             <a:fld id="{5BCAD085-E8A6-8845-BD4E-CB4CCA059FC4}" type="datetimeFigureOut">
               <a:rPr lang="en-US" smtClean="0"/>
-              <a:t>1/27/13</a:t>
+              <a:t>8/25/2026</a:t>
             </a:fld>
             <a:endParaRPr lang="en-US"/>
           </a:p>
@@ -2316,7 +2314,7 @@
           <a:p>
             <a:fld id="{C1FF6DA9-008F-8B48-92A6-B652298478BF}" type="slidenum">
               <a:rPr lang="en-US" smtClean="0"/>
-              <a:t>‹#›</a:t>
+              <a:t>‹Nº›</a:t>
             </a:fld>
             <a:endParaRPr lang="en-US"/>
           </a:p>
@@ -2377,10 +2375,9 @@
           </a:lstStyle>
           <a:p>
             <a:r>
-              <a:rPr lang="en-US" smtClean="0"/>
+              <a:rPr lang="en-US"/>
               <a:t>Click to edit Master title style</a:t>
             </a:r>
-            <a:endParaRPr lang="en-US"/>
           </a:p>
         </p:txBody>
       </p:sp>
@@ -2504,7 +2501,7 @@
           <a:p>
             <a:pPr lvl="0"/>
             <a:r>
-              <a:rPr lang="en-US" smtClean="0"/>
+              <a:rPr lang="en-US"/>
               <a:t>Click to edit Master text styles</a:t>
             </a:r>
           </a:p>
@@ -2527,7 +2524,7 @@
           <a:p>
             <a:fld id="{5BCAD085-E8A6-8845-BD4E-CB4CCA059FC4}" type="datetimeFigureOut">
               <a:rPr lang="en-US" smtClean="0"/>
-              <a:t>1/27/13</a:t>
+              <a:t>8/25/2026</a:t>
             </a:fld>
             <a:endParaRPr lang="en-US"/>
           </a:p>
@@ -2569,7 +2566,7 @@
           <a:p>
             <a:fld id="{C1FF6DA9-008F-8B48-92A6-B652298478BF}" type="slidenum">
               <a:rPr lang="en-US" smtClean="0"/>
-              <a:t>‹#›</a:t>
+              <a:t>‹Nº›</a:t>
             </a:fld>
             <a:endParaRPr lang="en-US"/>
           </a:p>
@@ -2636,10 +2633,9 @@
           <a:lstStyle/>
           <a:p>
             <a:r>
-              <a:rPr lang="en-US" smtClean="0"/>
+              <a:rPr lang="en-US"/>
               <a:t>Click to edit Master title style</a:t>
             </a:r>
-            <a:endParaRPr lang="en-US"/>
           </a:p>
         </p:txBody>
       </p:sp>
@@ -2670,38 +2666,37 @@
           <a:p>
             <a:pPr lvl="0"/>
             <a:r>
-              <a:rPr lang="en-US" smtClean="0"/>
+              <a:rPr lang="en-US"/>
               <a:t>Click to edit Master text styles</a:t>
             </a:r>
           </a:p>
           <a:p>
             <a:pPr lvl="1"/>
             <a:r>
-              <a:rPr lang="en-US" smtClean="0"/>
+              <a:rPr lang="en-US"/>
               <a:t>Second level</a:t>
             </a:r>
           </a:p>
           <a:p>
             <a:pPr lvl="2"/>
             <a:r>
-              <a:rPr lang="en-US" smtClean="0"/>
+              <a:rPr lang="en-US"/>
               <a:t>Third level</a:t>
             </a:r>
           </a:p>
           <a:p>
             <a:pPr lvl="3"/>
             <a:r>
-              <a:rPr lang="en-US" smtClean="0"/>
+              <a:rPr lang="en-US"/>
               <a:t>Fourth level</a:t>
             </a:r>
           </a:p>
           <a:p>
             <a:pPr lvl="4"/>
             <a:r>
-              <a:rPr lang="en-US" smtClean="0"/>
+              <a:rPr lang="en-US"/>
               <a:t>Fifth level</a:t>
             </a:r>
-            <a:endParaRPr lang="en-US"/>
           </a:p>
         </p:txBody>
       </p:sp>
@@ -2740,7 +2735,7 @@
           <a:p>
             <a:fld id="{5BCAD085-E8A6-8845-BD4E-CB4CCA059FC4}" type="datetimeFigureOut">
               <a:rPr lang="en-US" smtClean="0"/>
-              <a:t>1/27/13</a:t>
+              <a:t>8/25/2026</a:t>
             </a:fld>
             <a:endParaRPr lang="en-US"/>
           </a:p>
@@ -2818,7 +2813,7 @@
           <a:p>
             <a:fld id="{C1FF6DA9-008F-8B48-92A6-B652298478BF}" type="slidenum">
               <a:rPr lang="en-US" smtClean="0"/>
-              <a:t>‹#›</a:t>
+              <a:t>‹Nº›</a:t>
             </a:fld>
             <a:endParaRPr lang="en-US"/>
           </a:p>
@@ -3099,7 +3094,7 @@
 </file>
 
 <file path=ppt/slides/slide1.xml><?xml version="1.0" encoding="utf-8"?>
-<p:sld xmlns:a="http://schemas.openxmlformats.org/drawingml/2006/main" xmlns:p="http://schemas.openxmlformats.org/presentationml/2006/main" xmlns:r="http://schemas.openxmlformats.org/officeDocument/2006/relationships">
+<p:sld xmlns:a="http://schemas.openxmlformats.org/drawingml/2006/main" xmlns:r="http://schemas.openxmlformats.org/officeDocument/2006/relationships" xmlns:p="http://schemas.openxmlformats.org/presentationml/2006/main">
   <p:cSld>
     <p:spTree>
       <p:nvGrpSpPr>
@@ -3107,7 +3102,14 @@
         <p:cNvGrpSpPr/>
         <p:nvPr/>
       </p:nvGrpSpPr>
-      <p:grpSpPr/>
+      <p:grpSpPr>
+        <a:xfrm>
+          <a:off x="0" y="0"/>
+          <a:ext cx="0" cy="0"/>
+          <a:chOff x="0" y="0"/>
+          <a:chExt cx="0" cy="0"/>
+        </a:xfrm>
+      </p:grpSpPr>
       <p:sp>
         <p:nvSpPr>
           <p:cNvPr id="2" name="Rectangle 1"/>
@@ -3149,6 +3151,7 @@
           <a:lstStyle/>
           <a:p>
             <a:pPr algn="ctr"/>
+            <a:endParaRPr/>
           </a:p>
         </p:txBody>
       </p:sp>
@@ -3193,6 +3196,7 @@
           <a:lstStyle/>
           <a:p>
             <a:pPr algn="ctr"/>
+            <a:endParaRPr/>
           </a:p>
         </p:txBody>
       </p:sp>
@@ -3237,6 +3241,7 @@
           <a:lstStyle/>
           <a:p>
             <a:pPr algn="ctr"/>
+            <a:endParaRPr/>
           </a:p>
         </p:txBody>
       </p:sp>
@@ -3281,6 +3286,7 @@
           <a:lstStyle/>
           <a:p>
             <a:pPr algn="ctr"/>
+            <a:endParaRPr/>
           </a:p>
         </p:txBody>
       </p:sp>
@@ -3301,7 +3307,7 @@
           <a:noFill/>
         </p:spPr>
         <p:txBody>
-          <a:bodyPr wrap="square" lIns="0" rIns="0" tIns="0" bIns="0" anchor="t">
+          <a:bodyPr wrap="square" lIns="0" tIns="0" rIns="0" bIns="0" anchor="t">
             <a:spAutoFit/>
           </a:bodyPr>
           <a:lstStyle/>
@@ -3336,7 +3342,7 @@
           <a:noFill/>
         </p:spPr>
         <p:txBody>
-          <a:bodyPr wrap="square" lIns="0" rIns="0" tIns="0" bIns="0" anchor="t">
+          <a:bodyPr wrap="square" lIns="0" tIns="0" rIns="0" bIns="0" anchor="t">
             <a:spAutoFit/>
           </a:bodyPr>
           <a:lstStyle/>
@@ -3395,6 +3401,7 @@
           <a:lstStyle/>
           <a:p>
             <a:pPr algn="ctr"/>
+            <a:endParaRPr/>
           </a:p>
         </p:txBody>
       </p:sp>
@@ -3415,7 +3422,7 @@
           <a:noFill/>
         </p:spPr>
         <p:txBody>
-          <a:bodyPr wrap="square" lIns="0" rIns="0" tIns="0" bIns="0" anchor="t">
+          <a:bodyPr wrap="square" lIns="0" tIns="0" rIns="0" bIns="0" anchor="t">
             <a:spAutoFit/>
           </a:bodyPr>
           <a:lstStyle/>
@@ -3450,7 +3457,7 @@
           <a:noFill/>
         </p:spPr>
         <p:txBody>
-          <a:bodyPr wrap="square" lIns="0" rIns="0" tIns="0" bIns="0" anchor="t">
+          <a:bodyPr wrap="square" lIns="0" tIns="0" rIns="0" bIns="0" anchor="t">
             <a:spAutoFit/>
           </a:bodyPr>
           <a:lstStyle/>
@@ -3485,7 +3492,7 @@
           <a:noFill/>
         </p:spPr>
         <p:txBody>
-          <a:bodyPr wrap="square" lIns="0" rIns="0" tIns="0" bIns="0" anchor="t">
+          <a:bodyPr wrap="square" lIns="0" tIns="0" rIns="0" bIns="0" anchor="t">
             <a:spAutoFit/>
           </a:bodyPr>
           <a:lstStyle/>
@@ -3520,7 +3527,7 @@
           <a:noFill/>
         </p:spPr>
         <p:txBody>
-          <a:bodyPr wrap="square" lIns="0" rIns="0" tIns="0" bIns="0" anchor="t">
+          <a:bodyPr wrap="square" lIns="0" tIns="0" rIns="0" bIns="0" anchor="t">
             <a:spAutoFit/>
           </a:bodyPr>
           <a:lstStyle/>
@@ -3617,6 +3624,7 @@
           <a:lstStyle/>
           <a:p>
             <a:pPr algn="ctr"/>
+            <a:endParaRPr/>
           </a:p>
         </p:txBody>
       </p:sp>
@@ -3637,7 +3645,7 @@
           <a:noFill/>
         </p:spPr>
         <p:txBody>
-          <a:bodyPr wrap="square" lIns="0" rIns="0" tIns="0" bIns="0" anchor="t">
+          <a:bodyPr wrap="square" lIns="0" tIns="0" rIns="0" bIns="0" anchor="t">
             <a:spAutoFit/>
           </a:bodyPr>
           <a:lstStyle/>
@@ -3672,7 +3680,7 @@
           <a:noFill/>
         </p:spPr>
         <p:txBody>
-          <a:bodyPr wrap="square" lIns="0" rIns="0" tIns="0" bIns="0" anchor="t">
+          <a:bodyPr wrap="square" lIns="0" tIns="0" rIns="0" bIns="0" anchor="t">
             <a:spAutoFit/>
           </a:bodyPr>
           <a:lstStyle/>
@@ -3707,7 +3715,7 @@
           <a:noFill/>
         </p:spPr>
         <p:txBody>
-          <a:bodyPr wrap="square" lIns="0" rIns="0" tIns="0" bIns="0" anchor="t">
+          <a:bodyPr wrap="square" lIns="0" tIns="0" rIns="0" bIns="0" anchor="t">
             <a:spAutoFit/>
           </a:bodyPr>
           <a:lstStyle/>
@@ -3742,7 +3750,7 @@
           <a:noFill/>
         </p:spPr>
         <p:txBody>
-          <a:bodyPr wrap="square" lIns="0" rIns="0" tIns="0" bIns="0" anchor="t">
+          <a:bodyPr wrap="square" lIns="0" tIns="0" rIns="0" bIns="0" anchor="t">
             <a:spAutoFit/>
           </a:bodyPr>
           <a:lstStyle/>
@@ -3777,7 +3785,7 @@
           <a:noFill/>
         </p:spPr>
         <p:txBody>
-          <a:bodyPr wrap="square" lIns="0" rIns="0" tIns="0" bIns="0" anchor="t">
+          <a:bodyPr wrap="square" lIns="0" tIns="0" rIns="0" bIns="0" anchor="t">
             <a:spAutoFit/>
           </a:bodyPr>
           <a:lstStyle/>
@@ -3812,7 +3820,7 @@
           <a:noFill/>
         </p:spPr>
         <p:txBody>
-          <a:bodyPr wrap="square" lIns="0" rIns="0" tIns="0" bIns="0" anchor="t">
+          <a:bodyPr wrap="square" lIns="0" tIns="0" rIns="0" bIns="0" anchor="t">
             <a:spAutoFit/>
           </a:bodyPr>
           <a:lstStyle/>
@@ -3847,7 +3855,7 @@
           <a:noFill/>
         </p:spPr>
         <p:txBody>
-          <a:bodyPr wrap="square" lIns="0" rIns="0" tIns="0" bIns="0" anchor="t">
+          <a:bodyPr wrap="square" lIns="0" tIns="0" rIns="0" bIns="0" anchor="t">
             <a:spAutoFit/>
           </a:bodyPr>
           <a:lstStyle/>
@@ -3906,7 +3914,7 @@
           <a:noFill/>
         </p:spPr>
         <p:txBody>
-          <a:bodyPr wrap="square" lIns="0" rIns="0" tIns="0" bIns="0" anchor="t">
+          <a:bodyPr wrap="square" lIns="0" tIns="0" rIns="0" bIns="0" anchor="t">
             <a:spAutoFit/>
           </a:bodyPr>
           <a:lstStyle/>
@@ -3941,7 +3949,7 @@
           <a:noFill/>
         </p:spPr>
         <p:txBody>
-          <a:bodyPr wrap="square" lIns="0" rIns="0" tIns="0" bIns="0" anchor="t">
+          <a:bodyPr wrap="square" lIns="0" tIns="0" rIns="0" bIns="0" anchor="t">
             <a:spAutoFit/>
           </a:bodyPr>
           <a:lstStyle/>
@@ -3968,28 +3976,46 @@
         <p:spPr>
           <a:xfrm>
             <a:off x="9418320" y="5504688"/>
-            <a:ext cx="2103120" cy="320040"/>
-          </a:xfrm>
-          <a:prstGeom prst="rect">
-            <a:avLst/>
-          </a:prstGeom>
-          <a:noFill/>
-        </p:spPr>
-        <p:txBody>
-          <a:bodyPr wrap="square" lIns="0" rIns="0" tIns="0" bIns="0" anchor="t">
+            <a:ext cx="2103120" cy="246221"/>
+          </a:xfrm>
+          <a:prstGeom prst="rect">
+            <a:avLst/>
+          </a:prstGeom>
+          <a:noFill/>
+        </p:spPr>
+        <p:txBody>
+          <a:bodyPr wrap="square" lIns="0" tIns="0" rIns="0" bIns="0" anchor="t">
             <a:spAutoFit/>
           </a:bodyPr>
           <a:lstStyle/>
           <a:p>
             <a:pPr algn="r"/>
             <a:r>
-              <a:rPr sz="1600" b="1">
+              <a:rPr sz="1600" b="1" dirty="0">
                 <a:solidFill>
                   <a:srgbClr val="FFFFFF"/>
                 </a:solidFill>
                 <a:latin typeface="Calibri"/>
               </a:rPr>
-              <a:t>26 / 08 / 2026</a:t>
+              <a:t>2</a:t>
+            </a:r>
+            <a:r>
+              <a:rPr lang="en-US" sz="1600" b="1" dirty="0">
+                <a:solidFill>
+                  <a:srgbClr val="FFFFFF"/>
+                </a:solidFill>
+                <a:latin typeface="Calibri"/>
+              </a:rPr>
+              <a:t>5</a:t>
+            </a:r>
+            <a:r>
+              <a:rPr sz="1600" b="1" dirty="0">
+                <a:solidFill>
+                  <a:srgbClr val="FFFFFF"/>
+                </a:solidFill>
+                <a:latin typeface="Calibri"/>
+              </a:rPr>
+              <a:t> / 08 / 2026</a:t>
             </a:r>
           </a:p>
         </p:txBody>
@@ -4003,7 +4029,7 @@
 </file>
 
 <file path=ppt/slides/slide10.xml><?xml version="1.0" encoding="utf-8"?>
-<p:sld xmlns:a="http://schemas.openxmlformats.org/drawingml/2006/main" xmlns:p="http://schemas.openxmlformats.org/presentationml/2006/main" xmlns:r="http://schemas.openxmlformats.org/officeDocument/2006/relationships">
+<p:sld xmlns:a="http://schemas.openxmlformats.org/drawingml/2006/main" xmlns:r="http://schemas.openxmlformats.org/officeDocument/2006/relationships" xmlns:p="http://schemas.openxmlformats.org/presentationml/2006/main">
   <p:cSld>
     <p:spTree>
       <p:nvGrpSpPr>
@@ -4011,7 +4037,14 @@
         <p:cNvGrpSpPr/>
         <p:nvPr/>
       </p:nvGrpSpPr>
-      <p:grpSpPr/>
+      <p:grpSpPr>
+        <a:xfrm>
+          <a:off x="0" y="0"/>
+          <a:ext cx="0" cy="0"/>
+          <a:chOff x="0" y="0"/>
+          <a:chExt cx="0" cy="0"/>
+        </a:xfrm>
+      </p:grpSpPr>
       <p:sp>
         <p:nvSpPr>
           <p:cNvPr id="2" name="Rectangle 1"/>
@@ -4053,6 +4086,7 @@
           <a:lstStyle/>
           <a:p>
             <a:pPr algn="ctr"/>
+            <a:endParaRPr/>
           </a:p>
         </p:txBody>
       </p:sp>
@@ -4073,7 +4107,7 @@
           <a:noFill/>
         </p:spPr>
         <p:txBody>
-          <a:bodyPr wrap="square" lIns="0" rIns="0" tIns="0" bIns="0" anchor="t">
+          <a:bodyPr wrap="square" lIns="0" tIns="0" rIns="0" bIns="0" anchor="t">
             <a:spAutoFit/>
           </a:bodyPr>
           <a:lstStyle/>
@@ -4108,7 +4142,7 @@
           <a:noFill/>
         </p:spPr>
         <p:txBody>
-          <a:bodyPr wrap="square" lIns="0" rIns="0" tIns="0" bIns="0" anchor="t">
+          <a:bodyPr wrap="square" lIns="0" tIns="0" rIns="0" bIns="0" anchor="t">
             <a:spAutoFit/>
           </a:bodyPr>
           <a:lstStyle/>
@@ -4167,6 +4201,7 @@
           <a:lstStyle/>
           <a:p>
             <a:pPr algn="ctr"/>
+            <a:endParaRPr/>
           </a:p>
         </p:txBody>
       </p:sp>
@@ -4187,7 +4222,7 @@
           <a:noFill/>
         </p:spPr>
         <p:txBody>
-          <a:bodyPr wrap="square" lIns="0" rIns="0" tIns="0" bIns="0" anchor="t">
+          <a:bodyPr wrap="square" lIns="0" tIns="0" rIns="0" bIns="0" anchor="t">
             <a:spAutoFit/>
           </a:bodyPr>
           <a:lstStyle/>
@@ -4248,6 +4283,7 @@
           <a:lstStyle/>
           <a:p>
             <a:pPr algn="ctr"/>
+            <a:endParaRPr/>
           </a:p>
         </p:txBody>
       </p:sp>
@@ -4268,7 +4304,7 @@
           <a:noFill/>
         </p:spPr>
         <p:txBody>
-          <a:bodyPr wrap="square" lIns="0" rIns="0" tIns="0" bIns="0" anchor="t">
+          <a:bodyPr wrap="square" lIns="0" tIns="0" rIns="0" bIns="0" anchor="t">
             <a:spAutoFit/>
           </a:bodyPr>
           <a:lstStyle/>
@@ -4303,7 +4339,7 @@
           <a:noFill/>
         </p:spPr>
         <p:txBody>
-          <a:bodyPr wrap="square" lIns="0" rIns="0" tIns="0" bIns="0" anchor="t">
+          <a:bodyPr wrap="square" lIns="0" tIns="0" rIns="0" bIns="0" anchor="t">
             <a:spAutoFit/>
           </a:bodyPr>
           <a:lstStyle/>
@@ -4358,7 +4394,7 @@
           <a:noFill/>
         </p:spPr>
         <p:txBody>
-          <a:bodyPr wrap="square" lIns="0" rIns="0" tIns="0" bIns="0" anchor="t">
+          <a:bodyPr wrap="square" lIns="0" tIns="0" rIns="0" bIns="0" anchor="t">
             <a:spAutoFit/>
           </a:bodyPr>
           <a:lstStyle/>
@@ -4417,6 +4453,7 @@
           <a:lstStyle/>
           <a:p>
             <a:pPr algn="ctr"/>
+            <a:endParaRPr/>
           </a:p>
         </p:txBody>
       </p:sp>
@@ -4437,7 +4474,7 @@
           <a:noFill/>
         </p:spPr>
         <p:txBody>
-          <a:bodyPr wrap="square" lIns="0" rIns="0" tIns="0" bIns="0" anchor="t">
+          <a:bodyPr wrap="square" lIns="0" tIns="0" rIns="0" bIns="0" anchor="t">
             <a:spAutoFit/>
           </a:bodyPr>
           <a:lstStyle/>
@@ -4463,15 +4500,12 @@
                 <a:spcPct val="122000"/>
               </a:lnSpc>
             </a:pPr>
-            <a:r>
-              <a:rPr sz="1200" b="0">
-                <a:solidFill>
-                  <a:srgbClr val="CADCFC"/>
-                </a:solidFill>
-                <a:latin typeface="Calibri"/>
-              </a:rPr>
-              <a:t/>
-            </a:r>
+            <a:endParaRPr sz="1200" b="0">
+              <a:solidFill>
+                <a:srgbClr val="CADCFC"/>
+              </a:solidFill>
+              <a:latin typeface="Calibri"/>
+            </a:endParaRPr>
           </a:p>
           <a:p>
             <a:pPr algn="l">
@@ -4540,7 +4574,7 @@
           <a:noFill/>
         </p:spPr>
         <p:txBody>
-          <a:bodyPr wrap="square" lIns="0" rIns="0" tIns="0" bIns="0" anchor="t">
+          <a:bodyPr wrap="square" lIns="0" tIns="0" rIns="0" bIns="0" anchor="t">
             <a:spAutoFit/>
           </a:bodyPr>
           <a:lstStyle/>
@@ -4601,6 +4635,7 @@
           <a:lstStyle/>
           <a:p>
             <a:pPr algn="ctr"/>
+            <a:endParaRPr/>
           </a:p>
         </p:txBody>
       </p:sp>
@@ -4645,6 +4680,7 @@
           <a:lstStyle/>
           <a:p>
             <a:pPr algn="ctr"/>
+            <a:endParaRPr/>
           </a:p>
         </p:txBody>
       </p:sp>
@@ -4665,7 +4701,7 @@
           <a:noFill/>
         </p:spPr>
         <p:txBody>
-          <a:bodyPr wrap="square" lIns="0" rIns="0" tIns="0" bIns="0" anchor="t">
+          <a:bodyPr wrap="square" lIns="0" tIns="0" rIns="0" bIns="0" anchor="t">
             <a:spAutoFit/>
           </a:bodyPr>
           <a:lstStyle/>
@@ -4700,7 +4736,7 @@
           <a:noFill/>
         </p:spPr>
         <p:txBody>
-          <a:bodyPr wrap="square" lIns="0" rIns="0" tIns="0" bIns="0" anchor="t">
+          <a:bodyPr wrap="square" lIns="0" tIns="0" rIns="0" bIns="0" anchor="t">
             <a:spAutoFit/>
           </a:bodyPr>
           <a:lstStyle/>
@@ -4735,7 +4771,7 @@
           <a:noFill/>
         </p:spPr>
         <p:txBody>
-          <a:bodyPr wrap="square" lIns="0" rIns="0" tIns="0" bIns="0" anchor="t">
+          <a:bodyPr wrap="square" lIns="0" tIns="0" rIns="0" bIns="0" anchor="t">
             <a:spAutoFit/>
           </a:bodyPr>
           <a:lstStyle/>
@@ -4796,6 +4832,7 @@
           <a:lstStyle/>
           <a:p>
             <a:pPr algn="ctr"/>
+            <a:endParaRPr/>
           </a:p>
         </p:txBody>
       </p:sp>
@@ -4840,6 +4877,7 @@
           <a:lstStyle/>
           <a:p>
             <a:pPr algn="ctr"/>
+            <a:endParaRPr/>
           </a:p>
         </p:txBody>
       </p:sp>
@@ -4860,7 +4898,7 @@
           <a:noFill/>
         </p:spPr>
         <p:txBody>
-          <a:bodyPr wrap="square" lIns="0" rIns="0" tIns="0" bIns="0" anchor="t">
+          <a:bodyPr wrap="square" lIns="0" tIns="0" rIns="0" bIns="0" anchor="t">
             <a:spAutoFit/>
           </a:bodyPr>
           <a:lstStyle/>
@@ -4895,7 +4933,7 @@
           <a:noFill/>
         </p:spPr>
         <p:txBody>
-          <a:bodyPr wrap="square" lIns="0" rIns="0" tIns="0" bIns="0" anchor="t">
+          <a:bodyPr wrap="square" lIns="0" tIns="0" rIns="0" bIns="0" anchor="t">
             <a:spAutoFit/>
           </a:bodyPr>
           <a:lstStyle/>
@@ -4930,7 +4968,7 @@
           <a:noFill/>
         </p:spPr>
         <p:txBody>
-          <a:bodyPr wrap="square" lIns="0" rIns="0" tIns="0" bIns="0" anchor="t">
+          <a:bodyPr wrap="square" lIns="0" tIns="0" rIns="0" bIns="0" anchor="t">
             <a:spAutoFit/>
           </a:bodyPr>
           <a:lstStyle/>
@@ -4991,6 +5029,7 @@
           <a:lstStyle/>
           <a:p>
             <a:pPr algn="ctr"/>
+            <a:endParaRPr/>
           </a:p>
         </p:txBody>
       </p:sp>
@@ -5035,6 +5074,7 @@
           <a:lstStyle/>
           <a:p>
             <a:pPr algn="ctr"/>
+            <a:endParaRPr/>
           </a:p>
         </p:txBody>
       </p:sp>
@@ -5055,7 +5095,7 @@
           <a:noFill/>
         </p:spPr>
         <p:txBody>
-          <a:bodyPr wrap="square" lIns="0" rIns="0" tIns="0" bIns="0" anchor="t">
+          <a:bodyPr wrap="square" lIns="0" tIns="0" rIns="0" bIns="0" anchor="t">
             <a:spAutoFit/>
           </a:bodyPr>
           <a:lstStyle/>
@@ -5090,7 +5130,7 @@
           <a:noFill/>
         </p:spPr>
         <p:txBody>
-          <a:bodyPr wrap="square" lIns="0" rIns="0" tIns="0" bIns="0" anchor="t">
+          <a:bodyPr wrap="square" lIns="0" tIns="0" rIns="0" bIns="0" anchor="t">
             <a:spAutoFit/>
           </a:bodyPr>
           <a:lstStyle/>
@@ -5125,7 +5165,7 @@
           <a:noFill/>
         </p:spPr>
         <p:txBody>
-          <a:bodyPr wrap="square" lIns="0" rIns="0" tIns="0" bIns="0" anchor="t">
+          <a:bodyPr wrap="square" lIns="0" tIns="0" rIns="0" bIns="0" anchor="t">
             <a:spAutoFit/>
           </a:bodyPr>
           <a:lstStyle/>
@@ -5186,6 +5226,7 @@
           <a:lstStyle/>
           <a:p>
             <a:pPr algn="ctr"/>
+            <a:endParaRPr/>
           </a:p>
         </p:txBody>
       </p:sp>
@@ -5230,6 +5271,7 @@
           <a:lstStyle/>
           <a:p>
             <a:pPr algn="ctr"/>
+            <a:endParaRPr/>
           </a:p>
         </p:txBody>
       </p:sp>
@@ -5250,7 +5292,7 @@
           <a:noFill/>
         </p:spPr>
         <p:txBody>
-          <a:bodyPr wrap="square" lIns="0" rIns="0" tIns="0" bIns="0" anchor="t">
+          <a:bodyPr wrap="square" lIns="0" tIns="0" rIns="0" bIns="0" anchor="t">
             <a:spAutoFit/>
           </a:bodyPr>
           <a:lstStyle/>
@@ -5285,7 +5327,7 @@
           <a:noFill/>
         </p:spPr>
         <p:txBody>
-          <a:bodyPr wrap="square" lIns="0" rIns="0" tIns="0" bIns="0" anchor="t">
+          <a:bodyPr wrap="square" lIns="0" tIns="0" rIns="0" bIns="0" anchor="t">
             <a:spAutoFit/>
           </a:bodyPr>
           <a:lstStyle/>
@@ -5320,7 +5362,7 @@
           <a:noFill/>
         </p:spPr>
         <p:txBody>
-          <a:bodyPr wrap="square" lIns="0" rIns="0" tIns="0" bIns="0" anchor="t">
+          <a:bodyPr wrap="square" lIns="0" tIns="0" rIns="0" bIns="0" anchor="t">
             <a:spAutoFit/>
           </a:bodyPr>
           <a:lstStyle/>
@@ -5381,6 +5423,7 @@
           <a:lstStyle/>
           <a:p>
             <a:pPr algn="ctr"/>
+            <a:endParaRPr/>
           </a:p>
         </p:txBody>
       </p:sp>
@@ -5425,6 +5468,7 @@
           <a:lstStyle/>
           <a:p>
             <a:pPr algn="ctr"/>
+            <a:endParaRPr/>
           </a:p>
         </p:txBody>
       </p:sp>
@@ -5445,7 +5489,7 @@
           <a:noFill/>
         </p:spPr>
         <p:txBody>
-          <a:bodyPr wrap="square" lIns="0" rIns="0" tIns="0" bIns="0" anchor="t">
+          <a:bodyPr wrap="square" lIns="0" tIns="0" rIns="0" bIns="0" anchor="t">
             <a:spAutoFit/>
           </a:bodyPr>
           <a:lstStyle/>
@@ -5480,7 +5524,7 @@
           <a:noFill/>
         </p:spPr>
         <p:txBody>
-          <a:bodyPr wrap="square" lIns="0" rIns="0" tIns="0" bIns="0" anchor="t">
+          <a:bodyPr wrap="square" lIns="0" tIns="0" rIns="0" bIns="0" anchor="t">
             <a:spAutoFit/>
           </a:bodyPr>
           <a:lstStyle/>
@@ -5515,7 +5559,7 @@
           <a:noFill/>
         </p:spPr>
         <p:txBody>
-          <a:bodyPr wrap="square" lIns="0" rIns="0" tIns="0" bIns="0" anchor="t">
+          <a:bodyPr wrap="square" lIns="0" tIns="0" rIns="0" bIns="0" anchor="t">
             <a:spAutoFit/>
           </a:bodyPr>
           <a:lstStyle/>
@@ -5542,7 +5586,7 @@
 </file>
 
 <file path=ppt/slides/slide11.xml><?xml version="1.0" encoding="utf-8"?>
-<p:sld xmlns:a="http://schemas.openxmlformats.org/drawingml/2006/main" xmlns:p="http://schemas.openxmlformats.org/presentationml/2006/main" xmlns:r="http://schemas.openxmlformats.org/officeDocument/2006/relationships">
+<p:sld xmlns:a="http://schemas.openxmlformats.org/drawingml/2006/main" xmlns:r="http://schemas.openxmlformats.org/officeDocument/2006/relationships" xmlns:p="http://schemas.openxmlformats.org/presentationml/2006/main">
   <p:cSld>
     <p:spTree>
       <p:nvGrpSpPr>
@@ -5550,7 +5594,14 @@
         <p:cNvGrpSpPr/>
         <p:nvPr/>
       </p:nvGrpSpPr>
-      <p:grpSpPr/>
+      <p:grpSpPr>
+        <a:xfrm>
+          <a:off x="0" y="0"/>
+          <a:ext cx="0" cy="0"/>
+          <a:chOff x="0" y="0"/>
+          <a:chExt cx="0" cy="0"/>
+        </a:xfrm>
+      </p:grpSpPr>
       <p:sp>
         <p:nvSpPr>
           <p:cNvPr id="2" name="Rectangle 1"/>
@@ -5592,6 +5643,7 @@
           <a:lstStyle/>
           <a:p>
             <a:pPr algn="ctr"/>
+            <a:endParaRPr/>
           </a:p>
         </p:txBody>
       </p:sp>
@@ -5612,7 +5664,7 @@
           <a:noFill/>
         </p:spPr>
         <p:txBody>
-          <a:bodyPr wrap="square" lIns="0" rIns="0" tIns="0" bIns="0" anchor="t">
+          <a:bodyPr wrap="square" lIns="0" tIns="0" rIns="0" bIns="0" anchor="t">
             <a:spAutoFit/>
           </a:bodyPr>
           <a:lstStyle/>
@@ -5647,7 +5699,7 @@
           <a:noFill/>
         </p:spPr>
         <p:txBody>
-          <a:bodyPr wrap="square" lIns="0" rIns="0" tIns="0" bIns="0" anchor="t">
+          <a:bodyPr wrap="square" lIns="0" tIns="0" rIns="0" bIns="0" anchor="t">
             <a:spAutoFit/>
           </a:bodyPr>
           <a:lstStyle/>
@@ -5706,6 +5758,7 @@
           <a:lstStyle/>
           <a:p>
             <a:pPr algn="ctr"/>
+            <a:endParaRPr/>
           </a:p>
         </p:txBody>
       </p:sp>
@@ -5726,7 +5779,7 @@
           <a:noFill/>
         </p:spPr>
         <p:txBody>
-          <a:bodyPr wrap="square" lIns="0" rIns="0" tIns="0" bIns="0" anchor="t">
+          <a:bodyPr wrap="square" lIns="0" tIns="0" rIns="0" bIns="0" anchor="t">
             <a:spAutoFit/>
           </a:bodyPr>
           <a:lstStyle/>
@@ -5761,7 +5814,7 @@
           <a:noFill/>
         </p:spPr>
         <p:txBody>
-          <a:bodyPr wrap="square" lIns="0" rIns="0" tIns="0" bIns="0" anchor="t">
+          <a:bodyPr wrap="square" lIns="0" tIns="0" rIns="0" bIns="0" anchor="t">
             <a:spAutoFit/>
           </a:bodyPr>
           <a:lstStyle/>
@@ -5822,6 +5875,7 @@
           <a:lstStyle/>
           <a:p>
             <a:pPr algn="ctr"/>
+            <a:endParaRPr/>
           </a:p>
         </p:txBody>
       </p:sp>
@@ -5868,6 +5922,7 @@
           <a:lstStyle/>
           <a:p>
             <a:pPr algn="ctr"/>
+            <a:endParaRPr/>
           </a:p>
         </p:txBody>
       </p:sp>
@@ -5888,7 +5943,7 @@
           <a:noFill/>
         </p:spPr>
         <p:txBody>
-          <a:bodyPr wrap="square" lIns="0" rIns="0" tIns="0" bIns="0" anchor="t">
+          <a:bodyPr wrap="square" lIns="0" tIns="0" rIns="0" bIns="0" anchor="t">
             <a:spAutoFit/>
           </a:bodyPr>
           <a:lstStyle/>
@@ -5951,6 +6006,7 @@
           <a:lstStyle/>
           <a:p>
             <a:pPr algn="ctr"/>
+            <a:endParaRPr/>
           </a:p>
         </p:txBody>
       </p:sp>
@@ -5971,7 +6027,7 @@
           <a:noFill/>
         </p:spPr>
         <p:txBody>
-          <a:bodyPr wrap="square" lIns="0" rIns="0" tIns="0" bIns="0" anchor="t">
+          <a:bodyPr wrap="square" lIns="0" tIns="0" rIns="0" bIns="0" anchor="t">
             <a:spAutoFit/>
           </a:bodyPr>
           <a:lstStyle/>
@@ -6100,6 +6156,7 @@
           <a:lstStyle/>
           <a:p>
             <a:pPr algn="ctr"/>
+            <a:endParaRPr/>
           </a:p>
         </p:txBody>
       </p:sp>
@@ -6146,6 +6203,7 @@
           <a:lstStyle/>
           <a:p>
             <a:pPr algn="ctr"/>
+            <a:endParaRPr/>
           </a:p>
         </p:txBody>
       </p:sp>
@@ -6166,7 +6224,7 @@
           <a:noFill/>
         </p:spPr>
         <p:txBody>
-          <a:bodyPr wrap="square" lIns="0" rIns="0" tIns="0" bIns="0" anchor="t">
+          <a:bodyPr wrap="square" lIns="0" tIns="0" rIns="0" bIns="0" anchor="t">
             <a:spAutoFit/>
           </a:bodyPr>
           <a:lstStyle/>
@@ -6229,6 +6287,7 @@
           <a:lstStyle/>
           <a:p>
             <a:pPr algn="ctr"/>
+            <a:endParaRPr/>
           </a:p>
         </p:txBody>
       </p:sp>
@@ -6249,7 +6308,7 @@
           <a:noFill/>
         </p:spPr>
         <p:txBody>
-          <a:bodyPr wrap="square" lIns="0" rIns="0" tIns="0" bIns="0" anchor="t">
+          <a:bodyPr wrap="square" lIns="0" tIns="0" rIns="0" bIns="0" anchor="t">
             <a:spAutoFit/>
           </a:bodyPr>
           <a:lstStyle/>
@@ -6378,6 +6437,7 @@
           <a:lstStyle/>
           <a:p>
             <a:pPr algn="ctr"/>
+            <a:endParaRPr/>
           </a:p>
         </p:txBody>
       </p:sp>
@@ -6424,6 +6484,7 @@
           <a:lstStyle/>
           <a:p>
             <a:pPr algn="ctr"/>
+            <a:endParaRPr/>
           </a:p>
         </p:txBody>
       </p:sp>
@@ -6444,7 +6505,7 @@
           <a:noFill/>
         </p:spPr>
         <p:txBody>
-          <a:bodyPr wrap="square" lIns="0" rIns="0" tIns="0" bIns="0" anchor="t">
+          <a:bodyPr wrap="square" lIns="0" tIns="0" rIns="0" bIns="0" anchor="t">
             <a:spAutoFit/>
           </a:bodyPr>
           <a:lstStyle/>
@@ -6507,6 +6568,7 @@
           <a:lstStyle/>
           <a:p>
             <a:pPr algn="ctr"/>
+            <a:endParaRPr/>
           </a:p>
         </p:txBody>
       </p:sp>
@@ -6527,7 +6589,7 @@
           <a:noFill/>
         </p:spPr>
         <p:txBody>
-          <a:bodyPr wrap="square" lIns="0" rIns="0" tIns="0" bIns="0" anchor="t">
+          <a:bodyPr wrap="square" lIns="0" tIns="0" rIns="0" bIns="0" anchor="t">
             <a:spAutoFit/>
           </a:bodyPr>
           <a:lstStyle/>
@@ -6656,6 +6718,7 @@
           <a:lstStyle/>
           <a:p>
             <a:pPr algn="ctr"/>
+            <a:endParaRPr/>
           </a:p>
         </p:txBody>
       </p:sp>
@@ -6702,6 +6765,7 @@
           <a:lstStyle/>
           <a:p>
             <a:pPr algn="ctr"/>
+            <a:endParaRPr/>
           </a:p>
         </p:txBody>
       </p:sp>
@@ -6722,7 +6786,7 @@
           <a:noFill/>
         </p:spPr>
         <p:txBody>
-          <a:bodyPr wrap="square" lIns="0" rIns="0" tIns="0" bIns="0" anchor="t">
+          <a:bodyPr wrap="square" lIns="0" tIns="0" rIns="0" bIns="0" anchor="t">
             <a:spAutoFit/>
           </a:bodyPr>
           <a:lstStyle/>
@@ -6785,6 +6849,7 @@
           <a:lstStyle/>
           <a:p>
             <a:pPr algn="ctr"/>
+            <a:endParaRPr/>
           </a:p>
         </p:txBody>
       </p:sp>
@@ -6805,7 +6870,7 @@
           <a:noFill/>
         </p:spPr>
         <p:txBody>
-          <a:bodyPr wrap="square" lIns="0" rIns="0" tIns="0" bIns="0" anchor="t">
+          <a:bodyPr wrap="square" lIns="0" tIns="0" rIns="0" bIns="0" anchor="t">
             <a:spAutoFit/>
           </a:bodyPr>
           <a:lstStyle/>
@@ -6934,6 +6999,7 @@
           <a:lstStyle/>
           <a:p>
             <a:pPr algn="ctr"/>
+            <a:endParaRPr/>
           </a:p>
         </p:txBody>
       </p:sp>
@@ -6980,6 +7046,7 @@
           <a:lstStyle/>
           <a:p>
             <a:pPr algn="ctr"/>
+            <a:endParaRPr/>
           </a:p>
         </p:txBody>
       </p:sp>
@@ -7000,7 +7067,7 @@
           <a:noFill/>
         </p:spPr>
         <p:txBody>
-          <a:bodyPr wrap="square" lIns="0" rIns="0" tIns="0" bIns="0" anchor="t">
+          <a:bodyPr wrap="square" lIns="0" tIns="0" rIns="0" bIns="0" anchor="t">
             <a:spAutoFit/>
           </a:bodyPr>
           <a:lstStyle/>
@@ -7063,6 +7130,7 @@
           <a:lstStyle/>
           <a:p>
             <a:pPr algn="ctr"/>
+            <a:endParaRPr/>
           </a:p>
         </p:txBody>
       </p:sp>
@@ -7083,7 +7151,7 @@
           <a:noFill/>
         </p:spPr>
         <p:txBody>
-          <a:bodyPr wrap="square" lIns="0" rIns="0" tIns="0" bIns="0" anchor="t">
+          <a:bodyPr wrap="square" lIns="0" tIns="0" rIns="0" bIns="0" anchor="t">
             <a:spAutoFit/>
           </a:bodyPr>
           <a:lstStyle/>
@@ -7212,6 +7280,7 @@
           <a:lstStyle/>
           <a:p>
             <a:pPr algn="ctr"/>
+            <a:endParaRPr/>
           </a:p>
         </p:txBody>
       </p:sp>
@@ -7232,7 +7301,7 @@
           <a:noFill/>
         </p:spPr>
         <p:txBody>
-          <a:bodyPr wrap="square" lIns="0" rIns="0" tIns="0" bIns="0" anchor="t">
+          <a:bodyPr wrap="square" lIns="0" tIns="0" rIns="0" bIns="0" anchor="t">
             <a:spAutoFit/>
           </a:bodyPr>
           <a:lstStyle/>
@@ -7263,7 +7332,7 @@
 </file>
 
 <file path=ppt/slides/slide12.xml><?xml version="1.0" encoding="utf-8"?>
-<p:sld xmlns:a="http://schemas.openxmlformats.org/drawingml/2006/main" xmlns:p="http://schemas.openxmlformats.org/presentationml/2006/main" xmlns:r="http://schemas.openxmlformats.org/officeDocument/2006/relationships">
+<p:sld xmlns:a="http://schemas.openxmlformats.org/drawingml/2006/main" xmlns:r="http://schemas.openxmlformats.org/officeDocument/2006/relationships" xmlns:p="http://schemas.openxmlformats.org/presentationml/2006/main">
   <p:cSld>
     <p:spTree>
       <p:nvGrpSpPr>
@@ -7271,7 +7340,14 @@
         <p:cNvGrpSpPr/>
         <p:nvPr/>
       </p:nvGrpSpPr>
-      <p:grpSpPr/>
+      <p:grpSpPr>
+        <a:xfrm>
+          <a:off x="0" y="0"/>
+          <a:ext cx="0" cy="0"/>
+          <a:chOff x="0" y="0"/>
+          <a:chExt cx="0" cy="0"/>
+        </a:xfrm>
+      </p:grpSpPr>
       <p:sp>
         <p:nvSpPr>
           <p:cNvPr id="2" name="Rectangle 1"/>
@@ -7313,6 +7389,7 @@
           <a:lstStyle/>
           <a:p>
             <a:pPr algn="ctr"/>
+            <a:endParaRPr/>
           </a:p>
         </p:txBody>
       </p:sp>
@@ -7333,7 +7410,7 @@
           <a:noFill/>
         </p:spPr>
         <p:txBody>
-          <a:bodyPr wrap="square" lIns="0" rIns="0" tIns="0" bIns="0" anchor="t">
+          <a:bodyPr wrap="square" lIns="0" tIns="0" rIns="0" bIns="0" anchor="t">
             <a:spAutoFit/>
           </a:bodyPr>
           <a:lstStyle/>
@@ -7368,7 +7445,7 @@
           <a:noFill/>
         </p:spPr>
         <p:txBody>
-          <a:bodyPr wrap="square" lIns="0" rIns="0" tIns="0" bIns="0" anchor="t">
+          <a:bodyPr wrap="square" lIns="0" tIns="0" rIns="0" bIns="0" anchor="t">
             <a:spAutoFit/>
           </a:bodyPr>
           <a:lstStyle/>
@@ -7427,6 +7504,7 @@
           <a:lstStyle/>
           <a:p>
             <a:pPr algn="ctr"/>
+            <a:endParaRPr/>
           </a:p>
         </p:txBody>
       </p:sp>
@@ -7447,7 +7525,7 @@
           <a:noFill/>
         </p:spPr>
         <p:txBody>
-          <a:bodyPr wrap="square" lIns="0" rIns="0" tIns="0" bIns="0" anchor="t">
+          <a:bodyPr wrap="square" lIns="0" tIns="0" rIns="0" bIns="0" anchor="t">
             <a:spAutoFit/>
           </a:bodyPr>
           <a:lstStyle/>
@@ -7508,6 +7586,7 @@
           <a:lstStyle/>
           <a:p>
             <a:pPr algn="ctr"/>
+            <a:endParaRPr/>
           </a:p>
         </p:txBody>
       </p:sp>
@@ -7528,7 +7607,7 @@
           <a:noFill/>
         </p:spPr>
         <p:txBody>
-          <a:bodyPr wrap="square" lIns="0" rIns="0" tIns="0" bIns="0" anchor="t">
+          <a:bodyPr wrap="square" lIns="0" tIns="0" rIns="0" bIns="0" anchor="t">
             <a:spAutoFit/>
           </a:bodyPr>
           <a:lstStyle/>
@@ -7563,7 +7642,7 @@
           <a:noFill/>
         </p:spPr>
         <p:txBody>
-          <a:bodyPr wrap="square" lIns="0" rIns="0" tIns="0" bIns="0" anchor="t">
+          <a:bodyPr wrap="square" lIns="0" tIns="0" rIns="0" bIns="0" anchor="t">
             <a:spAutoFit/>
           </a:bodyPr>
           <a:lstStyle/>
@@ -7598,7 +7677,7 @@
           <a:noFill/>
         </p:spPr>
         <p:txBody>
-          <a:bodyPr wrap="square" lIns="0" rIns="0" tIns="0" bIns="0" anchor="t">
+          <a:bodyPr wrap="square" lIns="0" tIns="0" rIns="0" bIns="0" anchor="t">
             <a:spAutoFit/>
           </a:bodyPr>
           <a:lstStyle/>
@@ -7657,6 +7736,7 @@
           <a:lstStyle/>
           <a:p>
             <a:pPr algn="ctr"/>
+            <a:endParaRPr/>
           </a:p>
         </p:txBody>
       </p:sp>
@@ -7703,6 +7783,7 @@
           <a:lstStyle/>
           <a:p>
             <a:pPr algn="ctr"/>
+            <a:endParaRPr/>
           </a:p>
         </p:txBody>
       </p:sp>
@@ -7723,7 +7804,7 @@
           <a:noFill/>
         </p:spPr>
         <p:txBody>
-          <a:bodyPr wrap="square" lIns="0" rIns="0" tIns="0" bIns="0" anchor="t">
+          <a:bodyPr wrap="square" lIns="0" tIns="0" rIns="0" bIns="0" anchor="t">
             <a:spAutoFit/>
           </a:bodyPr>
           <a:lstStyle/>
@@ -7758,7 +7839,7 @@
           <a:noFill/>
         </p:spPr>
         <p:txBody>
-          <a:bodyPr wrap="square" lIns="0" rIns="0" tIns="0" bIns="0" anchor="t">
+          <a:bodyPr wrap="square" lIns="0" tIns="0" rIns="0" bIns="0" anchor="t">
             <a:spAutoFit/>
           </a:bodyPr>
           <a:lstStyle/>
@@ -7793,7 +7874,7 @@
           <a:noFill/>
         </p:spPr>
         <p:txBody>
-          <a:bodyPr wrap="square" lIns="0" rIns="0" tIns="0" bIns="0" anchor="t">
+          <a:bodyPr wrap="square" lIns="0" tIns="0" rIns="0" bIns="0" anchor="t">
             <a:spAutoFit/>
           </a:bodyPr>
           <a:lstStyle/>
@@ -7852,6 +7933,7 @@
           <a:lstStyle/>
           <a:p>
             <a:pPr algn="ctr"/>
+            <a:endParaRPr/>
           </a:p>
         </p:txBody>
       </p:sp>
@@ -7898,6 +7980,7 @@
           <a:lstStyle/>
           <a:p>
             <a:pPr algn="ctr"/>
+            <a:endParaRPr/>
           </a:p>
         </p:txBody>
       </p:sp>
@@ -7918,7 +8001,7 @@
           <a:noFill/>
         </p:spPr>
         <p:txBody>
-          <a:bodyPr wrap="square" lIns="0" rIns="0" tIns="0" bIns="0" anchor="t">
+          <a:bodyPr wrap="square" lIns="0" tIns="0" rIns="0" bIns="0" anchor="t">
             <a:spAutoFit/>
           </a:bodyPr>
           <a:lstStyle/>
@@ -7953,7 +8036,7 @@
           <a:noFill/>
         </p:spPr>
         <p:txBody>
-          <a:bodyPr wrap="square" lIns="0" rIns="0" tIns="0" bIns="0" anchor="t">
+          <a:bodyPr wrap="square" lIns="0" tIns="0" rIns="0" bIns="0" anchor="t">
             <a:spAutoFit/>
           </a:bodyPr>
           <a:lstStyle/>
@@ -7988,7 +8071,7 @@
           <a:noFill/>
         </p:spPr>
         <p:txBody>
-          <a:bodyPr wrap="square" lIns="0" rIns="0" tIns="0" bIns="0" anchor="t">
+          <a:bodyPr wrap="square" lIns="0" tIns="0" rIns="0" bIns="0" anchor="t">
             <a:spAutoFit/>
           </a:bodyPr>
           <a:lstStyle/>
@@ -8023,7 +8106,7 @@
           <a:noFill/>
         </p:spPr>
         <p:txBody>
-          <a:bodyPr wrap="square" lIns="0" rIns="0" tIns="0" bIns="0" anchor="t">
+          <a:bodyPr wrap="square" lIns="0" tIns="0" rIns="0" bIns="0" anchor="t">
             <a:spAutoFit/>
           </a:bodyPr>
           <a:lstStyle/>
@@ -8084,6 +8167,7 @@
           <a:lstStyle/>
           <a:p>
             <a:pPr algn="ctr"/>
+            <a:endParaRPr/>
           </a:p>
         </p:txBody>
       </p:sp>
@@ -8130,6 +8214,7 @@
           <a:lstStyle/>
           <a:p>
             <a:pPr algn="ctr"/>
+            <a:endParaRPr/>
           </a:p>
         </p:txBody>
       </p:sp>
@@ -8150,7 +8235,7 @@
           <a:noFill/>
         </p:spPr>
         <p:txBody>
-          <a:bodyPr wrap="square" lIns="0" rIns="0" tIns="0" bIns="0" anchor="t">
+          <a:bodyPr wrap="square" lIns="0" tIns="0" rIns="0" bIns="0" anchor="t">
             <a:spAutoFit/>
           </a:bodyPr>
           <a:lstStyle/>
@@ -8185,7 +8270,7 @@
           <a:noFill/>
         </p:spPr>
         <p:txBody>
-          <a:bodyPr wrap="square" lIns="0" rIns="0" tIns="0" bIns="0" anchor="t">
+          <a:bodyPr wrap="square" lIns="0" tIns="0" rIns="0" bIns="0" anchor="t">
             <a:spAutoFit/>
           </a:bodyPr>
           <a:lstStyle/>
@@ -8250,6 +8335,7 @@
           <a:lstStyle/>
           <a:p>
             <a:pPr algn="ctr"/>
+            <a:endParaRPr/>
           </a:p>
         </p:txBody>
       </p:sp>
@@ -8296,6 +8382,7 @@
           <a:lstStyle/>
           <a:p>
             <a:pPr algn="ctr"/>
+            <a:endParaRPr/>
           </a:p>
         </p:txBody>
       </p:sp>
@@ -8316,7 +8403,7 @@
           <a:noFill/>
         </p:spPr>
         <p:txBody>
-          <a:bodyPr wrap="square" lIns="0" rIns="0" tIns="0" bIns="0" anchor="t">
+          <a:bodyPr wrap="square" lIns="0" tIns="0" rIns="0" bIns="0" anchor="t">
             <a:spAutoFit/>
           </a:bodyPr>
           <a:lstStyle/>
@@ -8351,7 +8438,7 @@
           <a:noFill/>
         </p:spPr>
         <p:txBody>
-          <a:bodyPr wrap="square" lIns="0" rIns="0" tIns="0" bIns="0" anchor="t">
+          <a:bodyPr wrap="square" lIns="0" tIns="0" rIns="0" bIns="0" anchor="t">
             <a:spAutoFit/>
           </a:bodyPr>
           <a:lstStyle/>
@@ -8416,6 +8503,7 @@
           <a:lstStyle/>
           <a:p>
             <a:pPr algn="ctr"/>
+            <a:endParaRPr/>
           </a:p>
         </p:txBody>
       </p:sp>
@@ -8462,6 +8550,7 @@
           <a:lstStyle/>
           <a:p>
             <a:pPr algn="ctr"/>
+            <a:endParaRPr/>
           </a:p>
         </p:txBody>
       </p:sp>
@@ -8482,7 +8571,7 @@
           <a:noFill/>
         </p:spPr>
         <p:txBody>
-          <a:bodyPr wrap="square" lIns="0" rIns="0" tIns="0" bIns="0" anchor="t">
+          <a:bodyPr wrap="square" lIns="0" tIns="0" rIns="0" bIns="0" anchor="t">
             <a:spAutoFit/>
           </a:bodyPr>
           <a:lstStyle/>
@@ -8517,7 +8606,7 @@
           <a:noFill/>
         </p:spPr>
         <p:txBody>
-          <a:bodyPr wrap="square" lIns="0" rIns="0" tIns="0" bIns="0" anchor="t">
+          <a:bodyPr wrap="square" lIns="0" tIns="0" rIns="0" bIns="0" anchor="t">
             <a:spAutoFit/>
           </a:bodyPr>
           <a:lstStyle/>
@@ -8548,7 +8637,7 @@
 </file>
 
 <file path=ppt/slides/slide13.xml><?xml version="1.0" encoding="utf-8"?>
-<p:sld xmlns:a="http://schemas.openxmlformats.org/drawingml/2006/main" xmlns:p="http://schemas.openxmlformats.org/presentationml/2006/main" xmlns:r="http://schemas.openxmlformats.org/officeDocument/2006/relationships">
+<p:sld xmlns:a="http://schemas.openxmlformats.org/drawingml/2006/main" xmlns:r="http://schemas.openxmlformats.org/officeDocument/2006/relationships" xmlns:p="http://schemas.openxmlformats.org/presentationml/2006/main">
   <p:cSld>
     <p:spTree>
       <p:nvGrpSpPr>
@@ -8556,7 +8645,14 @@
         <p:cNvGrpSpPr/>
         <p:nvPr/>
       </p:nvGrpSpPr>
-      <p:grpSpPr/>
+      <p:grpSpPr>
+        <a:xfrm>
+          <a:off x="0" y="0"/>
+          <a:ext cx="0" cy="0"/>
+          <a:chOff x="0" y="0"/>
+          <a:chExt cx="0" cy="0"/>
+        </a:xfrm>
+      </p:grpSpPr>
       <p:sp>
         <p:nvSpPr>
           <p:cNvPr id="2" name="Rectangle 1"/>
@@ -8598,6 +8694,7 @@
           <a:lstStyle/>
           <a:p>
             <a:pPr algn="ctr"/>
+            <a:endParaRPr/>
           </a:p>
         </p:txBody>
       </p:sp>
@@ -8618,7 +8715,7 @@
           <a:noFill/>
         </p:spPr>
         <p:txBody>
-          <a:bodyPr wrap="square" lIns="0" rIns="0" tIns="0" bIns="0" anchor="t">
+          <a:bodyPr wrap="square" lIns="0" tIns="0" rIns="0" bIns="0" anchor="t">
             <a:spAutoFit/>
           </a:bodyPr>
           <a:lstStyle/>
@@ -8653,7 +8750,7 @@
           <a:noFill/>
         </p:spPr>
         <p:txBody>
-          <a:bodyPr wrap="square" lIns="0" rIns="0" tIns="0" bIns="0" anchor="t">
+          <a:bodyPr wrap="square" lIns="0" tIns="0" rIns="0" bIns="0" anchor="t">
             <a:spAutoFit/>
           </a:bodyPr>
           <a:lstStyle/>
@@ -8712,6 +8809,7 @@
           <a:lstStyle/>
           <a:p>
             <a:pPr algn="ctr"/>
+            <a:endParaRPr/>
           </a:p>
         </p:txBody>
       </p:sp>
@@ -8732,7 +8830,7 @@
           <a:noFill/>
         </p:spPr>
         <p:txBody>
-          <a:bodyPr wrap="square" lIns="0" rIns="0" tIns="0" bIns="0" anchor="t">
+          <a:bodyPr wrap="square" lIns="0" tIns="0" rIns="0" bIns="0" anchor="t">
             <a:spAutoFit/>
           </a:bodyPr>
           <a:lstStyle/>
@@ -8793,6 +8891,7 @@
           <a:lstStyle/>
           <a:p>
             <a:pPr algn="ctr"/>
+            <a:endParaRPr/>
           </a:p>
         </p:txBody>
       </p:sp>
@@ -8813,7 +8912,7 @@
           <a:noFill/>
         </p:spPr>
         <p:txBody>
-          <a:bodyPr wrap="square" lIns="0" rIns="0" tIns="0" bIns="0" anchor="t">
+          <a:bodyPr wrap="square" lIns="0" tIns="0" rIns="0" bIns="0" anchor="t">
             <a:spAutoFit/>
           </a:bodyPr>
           <a:lstStyle/>
@@ -8874,6 +8973,7 @@
           <a:lstStyle/>
           <a:p>
             <a:pPr algn="ctr"/>
+            <a:endParaRPr/>
           </a:p>
         </p:txBody>
       </p:sp>
@@ -8894,7 +8994,7 @@
           <a:noFill/>
         </p:spPr>
         <p:txBody>
-          <a:bodyPr wrap="square" lIns="0" rIns="0" tIns="0" bIns="0" anchor="t">
+          <a:bodyPr wrap="square" lIns="0" tIns="0" rIns="0" bIns="0" anchor="t">
             <a:spAutoFit/>
           </a:bodyPr>
           <a:lstStyle/>
@@ -8929,7 +9029,7 @@
           <a:noFill/>
         </p:spPr>
         <p:txBody>
-          <a:bodyPr wrap="square" lIns="0" rIns="0" tIns="0" bIns="0" anchor="t">
+          <a:bodyPr wrap="square" lIns="0" tIns="0" rIns="0" bIns="0" anchor="t">
             <a:spAutoFit/>
           </a:bodyPr>
           <a:lstStyle/>
@@ -9008,6 +9108,7 @@
           <a:lstStyle/>
           <a:p>
             <a:pPr algn="ctr"/>
+            <a:endParaRPr/>
           </a:p>
         </p:txBody>
       </p:sp>
@@ -9054,6 +9155,7 @@
           <a:lstStyle/>
           <a:p>
             <a:pPr algn="ctr"/>
+            <a:endParaRPr/>
           </a:p>
         </p:txBody>
       </p:sp>
@@ -9074,7 +9176,7 @@
           <a:noFill/>
         </p:spPr>
         <p:txBody>
-          <a:bodyPr wrap="square" lIns="0" rIns="0" tIns="0" bIns="0" anchor="t">
+          <a:bodyPr wrap="square" lIns="0" tIns="0" rIns="0" bIns="0" anchor="t">
             <a:spAutoFit/>
           </a:bodyPr>
           <a:lstStyle/>
@@ -9109,7 +9211,7 @@
           <a:noFill/>
         </p:spPr>
         <p:txBody>
-          <a:bodyPr wrap="square" lIns="0" rIns="0" tIns="0" bIns="0" anchor="t">
+          <a:bodyPr wrap="square" lIns="0" tIns="0" rIns="0" bIns="0" anchor="t">
             <a:spAutoFit/>
           </a:bodyPr>
           <a:lstStyle/>
@@ -9188,6 +9290,7 @@
           <a:lstStyle/>
           <a:p>
             <a:pPr algn="ctr"/>
+            <a:endParaRPr/>
           </a:p>
         </p:txBody>
       </p:sp>
@@ -9234,6 +9337,7 @@
           <a:lstStyle/>
           <a:p>
             <a:pPr algn="ctr"/>
+            <a:endParaRPr/>
           </a:p>
         </p:txBody>
       </p:sp>
@@ -9254,7 +9358,7 @@
           <a:noFill/>
         </p:spPr>
         <p:txBody>
-          <a:bodyPr wrap="square" lIns="0" rIns="0" tIns="0" bIns="0" anchor="t">
+          <a:bodyPr wrap="square" lIns="0" tIns="0" rIns="0" bIns="0" anchor="t">
             <a:spAutoFit/>
           </a:bodyPr>
           <a:lstStyle/>
@@ -9289,7 +9393,7 @@
           <a:noFill/>
         </p:spPr>
         <p:txBody>
-          <a:bodyPr wrap="square" lIns="0" rIns="0" tIns="0" bIns="0" anchor="t">
+          <a:bodyPr wrap="square" lIns="0" tIns="0" rIns="0" bIns="0" anchor="t">
             <a:spAutoFit/>
           </a:bodyPr>
           <a:lstStyle/>
@@ -9368,6 +9472,7 @@
           <a:lstStyle/>
           <a:p>
             <a:pPr algn="ctr"/>
+            <a:endParaRPr/>
           </a:p>
         </p:txBody>
       </p:sp>
@@ -9414,6 +9519,7 @@
           <a:lstStyle/>
           <a:p>
             <a:pPr algn="ctr"/>
+            <a:endParaRPr/>
           </a:p>
         </p:txBody>
       </p:sp>
@@ -9434,7 +9540,7 @@
           <a:noFill/>
         </p:spPr>
         <p:txBody>
-          <a:bodyPr wrap="square" lIns="0" rIns="0" tIns="0" bIns="0" anchor="t">
+          <a:bodyPr wrap="square" lIns="0" tIns="0" rIns="0" bIns="0" anchor="t">
             <a:spAutoFit/>
           </a:bodyPr>
           <a:lstStyle/>
@@ -9469,7 +9575,7 @@
           <a:noFill/>
         </p:spPr>
         <p:txBody>
-          <a:bodyPr wrap="square" lIns="0" rIns="0" tIns="0" bIns="0" anchor="t">
+          <a:bodyPr wrap="square" lIns="0" tIns="0" rIns="0" bIns="0" anchor="t">
             <a:spAutoFit/>
           </a:bodyPr>
           <a:lstStyle/>
@@ -9524,7 +9630,7 @@
           <a:noFill/>
         </p:spPr>
         <p:txBody>
-          <a:bodyPr wrap="square" lIns="0" rIns="0" tIns="0" bIns="0" anchor="t">
+          <a:bodyPr wrap="square" lIns="0" tIns="0" rIns="0" bIns="0" anchor="t">
             <a:spAutoFit/>
           </a:bodyPr>
           <a:lstStyle/>
@@ -9585,6 +9691,7 @@
           <a:lstStyle/>
           <a:p>
             <a:pPr algn="ctr"/>
+            <a:endParaRPr/>
           </a:p>
         </p:txBody>
       </p:sp>
@@ -9631,6 +9738,7 @@
           <a:lstStyle/>
           <a:p>
             <a:pPr algn="ctr"/>
+            <a:endParaRPr/>
           </a:p>
         </p:txBody>
       </p:sp>
@@ -9651,7 +9759,7 @@
           <a:noFill/>
         </p:spPr>
         <p:txBody>
-          <a:bodyPr wrap="square" lIns="0" rIns="0" tIns="0" bIns="0" anchor="t">
+          <a:bodyPr wrap="square" lIns="0" tIns="0" rIns="0" bIns="0" anchor="t">
             <a:spAutoFit/>
           </a:bodyPr>
           <a:lstStyle/>
@@ -9686,7 +9794,7 @@
           <a:noFill/>
         </p:spPr>
         <p:txBody>
-          <a:bodyPr wrap="square" lIns="0" rIns="0" tIns="0" bIns="0" anchor="t">
+          <a:bodyPr wrap="square" lIns="0" tIns="0" rIns="0" bIns="0" anchor="t">
             <a:spAutoFit/>
           </a:bodyPr>
           <a:lstStyle/>
@@ -9747,6 +9855,7 @@
           <a:lstStyle/>
           <a:p>
             <a:pPr algn="ctr"/>
+            <a:endParaRPr/>
           </a:p>
         </p:txBody>
       </p:sp>
@@ -9793,6 +9902,7 @@
           <a:lstStyle/>
           <a:p>
             <a:pPr algn="ctr"/>
+            <a:endParaRPr/>
           </a:p>
         </p:txBody>
       </p:sp>
@@ -9813,7 +9923,7 @@
           <a:noFill/>
         </p:spPr>
         <p:txBody>
-          <a:bodyPr wrap="square" lIns="0" rIns="0" tIns="0" bIns="0" anchor="t">
+          <a:bodyPr wrap="square" lIns="0" tIns="0" rIns="0" bIns="0" anchor="t">
             <a:spAutoFit/>
           </a:bodyPr>
           <a:lstStyle/>
@@ -9848,7 +9958,7 @@
           <a:noFill/>
         </p:spPr>
         <p:txBody>
-          <a:bodyPr wrap="square" lIns="0" rIns="0" tIns="0" bIns="0" anchor="t">
+          <a:bodyPr wrap="square" lIns="0" tIns="0" rIns="0" bIns="0" anchor="t">
             <a:spAutoFit/>
           </a:bodyPr>
           <a:lstStyle/>
@@ -9909,6 +10019,7 @@
           <a:lstStyle/>
           <a:p>
             <a:pPr algn="ctr"/>
+            <a:endParaRPr/>
           </a:p>
         </p:txBody>
       </p:sp>
@@ -9955,6 +10066,7 @@
           <a:lstStyle/>
           <a:p>
             <a:pPr algn="ctr"/>
+            <a:endParaRPr/>
           </a:p>
         </p:txBody>
       </p:sp>
@@ -9975,7 +10087,7 @@
           <a:noFill/>
         </p:spPr>
         <p:txBody>
-          <a:bodyPr wrap="square" lIns="0" rIns="0" tIns="0" bIns="0" anchor="t">
+          <a:bodyPr wrap="square" lIns="0" tIns="0" rIns="0" bIns="0" anchor="t">
             <a:spAutoFit/>
           </a:bodyPr>
           <a:lstStyle/>
@@ -10010,7 +10122,7 @@
           <a:noFill/>
         </p:spPr>
         <p:txBody>
-          <a:bodyPr wrap="square" lIns="0" rIns="0" tIns="0" bIns="0" anchor="t">
+          <a:bodyPr wrap="square" lIns="0" tIns="0" rIns="0" bIns="0" anchor="t">
             <a:spAutoFit/>
           </a:bodyPr>
           <a:lstStyle/>
@@ -10071,6 +10183,7 @@
           <a:lstStyle/>
           <a:p>
             <a:pPr algn="ctr"/>
+            <a:endParaRPr/>
           </a:p>
         </p:txBody>
       </p:sp>
@@ -10117,6 +10230,7 @@
           <a:lstStyle/>
           <a:p>
             <a:pPr algn="ctr"/>
+            <a:endParaRPr/>
           </a:p>
         </p:txBody>
       </p:sp>
@@ -10137,7 +10251,7 @@
           <a:noFill/>
         </p:spPr>
         <p:txBody>
-          <a:bodyPr wrap="square" lIns="0" rIns="0" tIns="0" bIns="0" anchor="t">
+          <a:bodyPr wrap="square" lIns="0" tIns="0" rIns="0" bIns="0" anchor="t">
             <a:spAutoFit/>
           </a:bodyPr>
           <a:lstStyle/>
@@ -10172,7 +10286,7 @@
           <a:noFill/>
         </p:spPr>
         <p:txBody>
-          <a:bodyPr wrap="square" lIns="0" rIns="0" tIns="0" bIns="0" anchor="t">
+          <a:bodyPr wrap="square" lIns="0" tIns="0" rIns="0" bIns="0" anchor="t">
             <a:spAutoFit/>
           </a:bodyPr>
           <a:lstStyle/>
@@ -10199,7 +10313,7 @@
 </file>
 
 <file path=ppt/slides/slide14.xml><?xml version="1.0" encoding="utf-8"?>
-<p:sld xmlns:a="http://schemas.openxmlformats.org/drawingml/2006/main" xmlns:p="http://schemas.openxmlformats.org/presentationml/2006/main" xmlns:r="http://schemas.openxmlformats.org/officeDocument/2006/relationships">
+<p:sld xmlns:a="http://schemas.openxmlformats.org/drawingml/2006/main" xmlns:r="http://schemas.openxmlformats.org/officeDocument/2006/relationships" xmlns:p="http://schemas.openxmlformats.org/presentationml/2006/main">
   <p:cSld>
     <p:spTree>
       <p:nvGrpSpPr>
@@ -10207,7 +10321,14 @@
         <p:cNvGrpSpPr/>
         <p:nvPr/>
       </p:nvGrpSpPr>
-      <p:grpSpPr/>
+      <p:grpSpPr>
+        <a:xfrm>
+          <a:off x="0" y="0"/>
+          <a:ext cx="0" cy="0"/>
+          <a:chOff x="0" y="0"/>
+          <a:chExt cx="0" cy="0"/>
+        </a:xfrm>
+      </p:grpSpPr>
       <p:sp>
         <p:nvSpPr>
           <p:cNvPr id="2" name="Rectangle 1"/>
@@ -10249,6 +10370,7 @@
           <a:lstStyle/>
           <a:p>
             <a:pPr algn="ctr"/>
+            <a:endParaRPr/>
           </a:p>
         </p:txBody>
       </p:sp>
@@ -10269,7 +10391,7 @@
           <a:noFill/>
         </p:spPr>
         <p:txBody>
-          <a:bodyPr wrap="square" lIns="0" rIns="0" tIns="0" bIns="0" anchor="t">
+          <a:bodyPr wrap="square" lIns="0" tIns="0" rIns="0" bIns="0" anchor="t">
             <a:spAutoFit/>
           </a:bodyPr>
           <a:lstStyle/>
@@ -10304,7 +10426,7 @@
           <a:noFill/>
         </p:spPr>
         <p:txBody>
-          <a:bodyPr wrap="square" lIns="0" rIns="0" tIns="0" bIns="0" anchor="t">
+          <a:bodyPr wrap="square" lIns="0" tIns="0" rIns="0" bIns="0" anchor="t">
             <a:spAutoFit/>
           </a:bodyPr>
           <a:lstStyle/>
@@ -10363,6 +10485,7 @@
           <a:lstStyle/>
           <a:p>
             <a:pPr algn="ctr"/>
+            <a:endParaRPr/>
           </a:p>
         </p:txBody>
       </p:sp>
@@ -10383,7 +10506,7 @@
           <a:noFill/>
         </p:spPr>
         <p:txBody>
-          <a:bodyPr wrap="square" lIns="0" rIns="0" tIns="0" bIns="0" anchor="t">
+          <a:bodyPr wrap="square" lIns="0" tIns="0" rIns="0" bIns="0" anchor="t">
             <a:spAutoFit/>
           </a:bodyPr>
           <a:lstStyle/>
@@ -10505,7 +10628,7 @@
           <a:noFill/>
         </p:spPr>
         <p:txBody>
-          <a:bodyPr wrap="square" lIns="0" rIns="0" tIns="0" bIns="0" anchor="t">
+          <a:bodyPr wrap="square" lIns="0" tIns="0" rIns="0" bIns="0" anchor="t">
             <a:spAutoFit/>
           </a:bodyPr>
           <a:lstStyle/>
@@ -10540,7 +10663,7 @@
           <a:noFill/>
         </p:spPr>
         <p:txBody>
-          <a:bodyPr wrap="square" lIns="0" rIns="0" tIns="0" bIns="0" anchor="t">
+          <a:bodyPr wrap="square" lIns="0" tIns="0" rIns="0" bIns="0" anchor="t">
             <a:spAutoFit/>
           </a:bodyPr>
           <a:lstStyle/>
@@ -10579,7 +10702,7 @@
           <a:noFill/>
         </p:spPr>
         <p:txBody>
-          <a:bodyPr wrap="square" lIns="0" rIns="0" tIns="0" bIns="0" anchor="t">
+          <a:bodyPr wrap="square" lIns="0" tIns="0" rIns="0" bIns="0" anchor="t">
             <a:spAutoFit/>
           </a:bodyPr>
           <a:lstStyle/>
@@ -10614,7 +10737,7 @@
           <a:noFill/>
         </p:spPr>
         <p:txBody>
-          <a:bodyPr wrap="square" lIns="0" rIns="0" tIns="0" bIns="0" anchor="t">
+          <a:bodyPr wrap="square" lIns="0" tIns="0" rIns="0" bIns="0" anchor="t">
             <a:spAutoFit/>
           </a:bodyPr>
           <a:lstStyle/>
@@ -10653,7 +10776,7 @@
           <a:noFill/>
         </p:spPr>
         <p:txBody>
-          <a:bodyPr wrap="square" lIns="0" rIns="0" tIns="0" bIns="0" anchor="t">
+          <a:bodyPr wrap="square" lIns="0" tIns="0" rIns="0" bIns="0" anchor="t">
             <a:spAutoFit/>
           </a:bodyPr>
           <a:lstStyle/>
@@ -10688,7 +10811,7 @@
           <a:noFill/>
         </p:spPr>
         <p:txBody>
-          <a:bodyPr wrap="square" lIns="0" rIns="0" tIns="0" bIns="0" anchor="t">
+          <a:bodyPr wrap="square" lIns="0" tIns="0" rIns="0" bIns="0" anchor="t">
             <a:spAutoFit/>
           </a:bodyPr>
           <a:lstStyle/>
@@ -10753,6 +10876,7 @@
           <a:lstStyle/>
           <a:p>
             <a:pPr algn="ctr"/>
+            <a:endParaRPr/>
           </a:p>
         </p:txBody>
       </p:sp>
@@ -10773,7 +10897,7 @@
           <a:noFill/>
         </p:spPr>
         <p:txBody>
-          <a:bodyPr wrap="square" lIns="0" rIns="0" tIns="0" bIns="0" anchor="t">
+          <a:bodyPr wrap="square" lIns="0" tIns="0" rIns="0" bIns="0" anchor="t">
             <a:spAutoFit/>
           </a:bodyPr>
           <a:lstStyle/>
@@ -10804,7 +10928,7 @@
 </file>
 
 <file path=ppt/slides/slide15.xml><?xml version="1.0" encoding="utf-8"?>
-<p:sld xmlns:a="http://schemas.openxmlformats.org/drawingml/2006/main" xmlns:p="http://schemas.openxmlformats.org/presentationml/2006/main" xmlns:r="http://schemas.openxmlformats.org/officeDocument/2006/relationships">
+<p:sld xmlns:a="http://schemas.openxmlformats.org/drawingml/2006/main" xmlns:r="http://schemas.openxmlformats.org/officeDocument/2006/relationships" xmlns:p="http://schemas.openxmlformats.org/presentationml/2006/main">
   <p:cSld>
     <p:spTree>
       <p:nvGrpSpPr>
@@ -10812,7 +10936,14 @@
         <p:cNvGrpSpPr/>
         <p:nvPr/>
       </p:nvGrpSpPr>
-      <p:grpSpPr/>
+      <p:grpSpPr>
+        <a:xfrm>
+          <a:off x="0" y="0"/>
+          <a:ext cx="0" cy="0"/>
+          <a:chOff x="0" y="0"/>
+          <a:chExt cx="0" cy="0"/>
+        </a:xfrm>
+      </p:grpSpPr>
       <p:sp>
         <p:nvSpPr>
           <p:cNvPr id="2" name="Rectangle 1"/>
@@ -10854,6 +10985,7 @@
           <a:lstStyle/>
           <a:p>
             <a:pPr algn="ctr"/>
+            <a:endParaRPr/>
           </a:p>
         </p:txBody>
       </p:sp>
@@ -10874,7 +11006,7 @@
           <a:noFill/>
         </p:spPr>
         <p:txBody>
-          <a:bodyPr wrap="square" lIns="0" rIns="0" tIns="0" bIns="0" anchor="t">
+          <a:bodyPr wrap="square" lIns="0" tIns="0" rIns="0" bIns="0" anchor="t">
             <a:spAutoFit/>
           </a:bodyPr>
           <a:lstStyle/>
@@ -10909,7 +11041,7 @@
           <a:noFill/>
         </p:spPr>
         <p:txBody>
-          <a:bodyPr wrap="square" lIns="0" rIns="0" tIns="0" bIns="0" anchor="t">
+          <a:bodyPr wrap="square" lIns="0" tIns="0" rIns="0" bIns="0" anchor="t">
             <a:spAutoFit/>
           </a:bodyPr>
           <a:lstStyle/>
@@ -10968,6 +11100,7 @@
           <a:lstStyle/>
           <a:p>
             <a:pPr algn="ctr"/>
+            <a:endParaRPr/>
           </a:p>
         </p:txBody>
       </p:sp>
@@ -10988,7 +11121,7 @@
           <a:noFill/>
         </p:spPr>
         <p:txBody>
-          <a:bodyPr wrap="square" lIns="0" rIns="0" tIns="0" bIns="0" anchor="t">
+          <a:bodyPr wrap="square" lIns="0" tIns="0" rIns="0" bIns="0" anchor="t">
             <a:spAutoFit/>
           </a:bodyPr>
           <a:lstStyle/>
@@ -11110,7 +11243,7 @@
           <a:noFill/>
         </p:spPr>
         <p:txBody>
-          <a:bodyPr wrap="square" lIns="0" rIns="0" tIns="0" bIns="0" anchor="t">
+          <a:bodyPr wrap="square" lIns="0" tIns="0" rIns="0" bIns="0" anchor="t">
             <a:spAutoFit/>
           </a:bodyPr>
           <a:lstStyle/>
@@ -11145,7 +11278,7 @@
           <a:noFill/>
         </p:spPr>
         <p:txBody>
-          <a:bodyPr wrap="square" lIns="0" rIns="0" tIns="0" bIns="0" anchor="t">
+          <a:bodyPr wrap="square" lIns="0" tIns="0" rIns="0" bIns="0" anchor="t">
             <a:spAutoFit/>
           </a:bodyPr>
           <a:lstStyle/>
@@ -11184,7 +11317,7 @@
           <a:noFill/>
         </p:spPr>
         <p:txBody>
-          <a:bodyPr wrap="square" lIns="0" rIns="0" tIns="0" bIns="0" anchor="t">
+          <a:bodyPr wrap="square" lIns="0" tIns="0" rIns="0" bIns="0" anchor="t">
             <a:spAutoFit/>
           </a:bodyPr>
           <a:lstStyle/>
@@ -11219,7 +11352,7 @@
           <a:noFill/>
         </p:spPr>
         <p:txBody>
-          <a:bodyPr wrap="square" lIns="0" rIns="0" tIns="0" bIns="0" anchor="t">
+          <a:bodyPr wrap="square" lIns="0" tIns="0" rIns="0" bIns="0" anchor="t">
             <a:spAutoFit/>
           </a:bodyPr>
           <a:lstStyle/>
@@ -11258,7 +11391,7 @@
           <a:noFill/>
         </p:spPr>
         <p:txBody>
-          <a:bodyPr wrap="square" lIns="0" rIns="0" tIns="0" bIns="0" anchor="t">
+          <a:bodyPr wrap="square" lIns="0" tIns="0" rIns="0" bIns="0" anchor="t">
             <a:spAutoFit/>
           </a:bodyPr>
           <a:lstStyle/>
@@ -11293,7 +11426,7 @@
           <a:noFill/>
         </p:spPr>
         <p:txBody>
-          <a:bodyPr wrap="square" lIns="0" rIns="0" tIns="0" bIns="0" anchor="t">
+          <a:bodyPr wrap="square" lIns="0" tIns="0" rIns="0" bIns="0" anchor="t">
             <a:spAutoFit/>
           </a:bodyPr>
           <a:lstStyle/>
@@ -11358,6 +11491,7 @@
           <a:lstStyle/>
           <a:p>
             <a:pPr algn="ctr"/>
+            <a:endParaRPr/>
           </a:p>
         </p:txBody>
       </p:sp>
@@ -11378,7 +11512,7 @@
           <a:noFill/>
         </p:spPr>
         <p:txBody>
-          <a:bodyPr wrap="square" lIns="0" rIns="0" tIns="0" bIns="0" anchor="t">
+          <a:bodyPr wrap="square" lIns="0" tIns="0" rIns="0" bIns="0" anchor="t">
             <a:spAutoFit/>
           </a:bodyPr>
           <a:lstStyle/>
@@ -11409,7 +11543,7 @@
 </file>
 
 <file path=ppt/slides/slide16.xml><?xml version="1.0" encoding="utf-8"?>
-<p:sld xmlns:a="http://schemas.openxmlformats.org/drawingml/2006/main" xmlns:p="http://schemas.openxmlformats.org/presentationml/2006/main" xmlns:r="http://schemas.openxmlformats.org/officeDocument/2006/relationships">
+<p:sld xmlns:a="http://schemas.openxmlformats.org/drawingml/2006/main" xmlns:r="http://schemas.openxmlformats.org/officeDocument/2006/relationships" xmlns:p="http://schemas.openxmlformats.org/presentationml/2006/main">
   <p:cSld>
     <p:spTree>
       <p:nvGrpSpPr>
@@ -11417,7 +11551,14 @@
         <p:cNvGrpSpPr/>
         <p:nvPr/>
       </p:nvGrpSpPr>
-      <p:grpSpPr/>
+      <p:grpSpPr>
+        <a:xfrm>
+          <a:off x="0" y="0"/>
+          <a:ext cx="0" cy="0"/>
+          <a:chOff x="0" y="0"/>
+          <a:chExt cx="0" cy="0"/>
+        </a:xfrm>
+      </p:grpSpPr>
       <p:sp>
         <p:nvSpPr>
           <p:cNvPr id="2" name="Rectangle 1"/>
@@ -11459,6 +11600,7 @@
           <a:lstStyle/>
           <a:p>
             <a:pPr algn="ctr"/>
+            <a:endParaRPr/>
           </a:p>
         </p:txBody>
       </p:sp>
@@ -11479,7 +11621,7 @@
           <a:noFill/>
         </p:spPr>
         <p:txBody>
-          <a:bodyPr wrap="square" lIns="0" rIns="0" tIns="0" bIns="0" anchor="t">
+          <a:bodyPr wrap="square" lIns="0" tIns="0" rIns="0" bIns="0" anchor="t">
             <a:spAutoFit/>
           </a:bodyPr>
           <a:lstStyle/>
@@ -11514,7 +11656,7 @@
           <a:noFill/>
         </p:spPr>
         <p:txBody>
-          <a:bodyPr wrap="square" lIns="0" rIns="0" tIns="0" bIns="0" anchor="t">
+          <a:bodyPr wrap="square" lIns="0" tIns="0" rIns="0" bIns="0" anchor="t">
             <a:spAutoFit/>
           </a:bodyPr>
           <a:lstStyle/>
@@ -11573,6 +11715,7 @@
           <a:lstStyle/>
           <a:p>
             <a:pPr algn="ctr"/>
+            <a:endParaRPr/>
           </a:p>
         </p:txBody>
       </p:sp>
@@ -11593,7 +11736,7 @@
           <a:noFill/>
         </p:spPr>
         <p:txBody>
-          <a:bodyPr wrap="square" lIns="0" rIns="0" tIns="0" bIns="0" anchor="t">
+          <a:bodyPr wrap="square" lIns="0" tIns="0" rIns="0" bIns="0" anchor="t">
             <a:spAutoFit/>
           </a:bodyPr>
           <a:lstStyle/>
@@ -11654,6 +11797,7 @@
           <a:lstStyle/>
           <a:p>
             <a:pPr algn="ctr"/>
+            <a:endParaRPr/>
           </a:p>
         </p:txBody>
       </p:sp>
@@ -11674,7 +11818,7 @@
           <a:noFill/>
         </p:spPr>
         <p:txBody>
-          <a:bodyPr wrap="square" lIns="0" rIns="0" tIns="0" bIns="0" anchor="t">
+          <a:bodyPr wrap="square" lIns="0" tIns="0" rIns="0" bIns="0" anchor="t">
             <a:spAutoFit/>
           </a:bodyPr>
           <a:lstStyle/>
@@ -11709,7 +11853,7 @@
           <a:noFill/>
         </p:spPr>
         <p:txBody>
-          <a:bodyPr wrap="square" lIns="0" rIns="0" tIns="0" bIns="0" anchor="t">
+          <a:bodyPr wrap="square" lIns="0" tIns="0" rIns="0" bIns="0" anchor="t">
             <a:spAutoFit/>
           </a:bodyPr>
           <a:lstStyle/>
@@ -11774,6 +11918,7 @@
           <a:lstStyle/>
           <a:p>
             <a:pPr algn="ctr"/>
+            <a:endParaRPr/>
           </a:p>
         </p:txBody>
       </p:sp>
@@ -11794,7 +11939,7 @@
           <a:noFill/>
         </p:spPr>
         <p:txBody>
-          <a:bodyPr wrap="square" lIns="0" rIns="0" tIns="0" bIns="0" anchor="t">
+          <a:bodyPr wrap="square" lIns="0" tIns="0" rIns="0" bIns="0" anchor="t">
             <a:spAutoFit/>
           </a:bodyPr>
           <a:lstStyle/>
@@ -11829,7 +11974,7 @@
           <a:noFill/>
         </p:spPr>
         <p:txBody>
-          <a:bodyPr wrap="square" lIns="0" rIns="0" tIns="0" bIns="0" anchor="t">
+          <a:bodyPr wrap="square" lIns="0" tIns="0" rIns="0" bIns="0" anchor="t">
             <a:spAutoFit/>
           </a:bodyPr>
           <a:lstStyle/>
@@ -11868,7 +12013,7 @@
           <a:noFill/>
         </p:spPr>
         <p:txBody>
-          <a:bodyPr wrap="square" lIns="0" rIns="0" tIns="0" bIns="0" anchor="t">
+          <a:bodyPr wrap="square" lIns="0" tIns="0" rIns="0" bIns="0" anchor="t">
             <a:spAutoFit/>
           </a:bodyPr>
           <a:lstStyle/>
@@ -11931,6 +12076,7 @@
           <a:lstStyle/>
           <a:p>
             <a:pPr algn="ctr"/>
+            <a:endParaRPr/>
           </a:p>
         </p:txBody>
       </p:sp>
@@ -11951,7 +12097,7 @@
           <a:noFill/>
         </p:spPr>
         <p:txBody>
-          <a:bodyPr wrap="square" lIns="0" rIns="0" tIns="0" bIns="0" anchor="t">
+          <a:bodyPr wrap="square" lIns="0" tIns="0" rIns="0" bIns="0" anchor="t">
             <a:spAutoFit/>
           </a:bodyPr>
           <a:lstStyle/>
@@ -12014,6 +12160,7 @@
           <a:lstStyle/>
           <a:p>
             <a:pPr algn="ctr"/>
+            <a:endParaRPr/>
           </a:p>
         </p:txBody>
       </p:sp>
@@ -12034,7 +12181,7 @@
           <a:noFill/>
         </p:spPr>
         <p:txBody>
-          <a:bodyPr wrap="square" lIns="0" rIns="0" tIns="0" bIns="0" anchor="t">
+          <a:bodyPr wrap="square" lIns="0" tIns="0" rIns="0" bIns="0" anchor="t">
             <a:spAutoFit/>
           </a:bodyPr>
           <a:lstStyle/>
@@ -12097,6 +12244,7 @@
           <a:lstStyle/>
           <a:p>
             <a:pPr algn="ctr"/>
+            <a:endParaRPr/>
           </a:p>
         </p:txBody>
       </p:sp>
@@ -12117,7 +12265,7 @@
           <a:noFill/>
         </p:spPr>
         <p:txBody>
-          <a:bodyPr wrap="square" lIns="0" rIns="0" tIns="0" bIns="0" anchor="t">
+          <a:bodyPr wrap="square" lIns="0" tIns="0" rIns="0" bIns="0" anchor="t">
             <a:spAutoFit/>
           </a:bodyPr>
           <a:lstStyle/>
@@ -12180,6 +12328,7 @@
           <a:lstStyle/>
           <a:p>
             <a:pPr algn="ctr"/>
+            <a:endParaRPr/>
           </a:p>
         </p:txBody>
       </p:sp>
@@ -12200,7 +12349,7 @@
           <a:noFill/>
         </p:spPr>
         <p:txBody>
-          <a:bodyPr wrap="square" lIns="0" rIns="0" tIns="0" bIns="0" anchor="t">
+          <a:bodyPr wrap="square" lIns="0" tIns="0" rIns="0" bIns="0" anchor="t">
             <a:spAutoFit/>
           </a:bodyPr>
           <a:lstStyle/>
@@ -12263,6 +12412,7 @@
           <a:lstStyle/>
           <a:p>
             <a:pPr algn="ctr"/>
+            <a:endParaRPr/>
           </a:p>
         </p:txBody>
       </p:sp>
@@ -12283,7 +12433,7 @@
           <a:noFill/>
         </p:spPr>
         <p:txBody>
-          <a:bodyPr wrap="square" lIns="0" rIns="0" tIns="0" bIns="0" anchor="t">
+          <a:bodyPr wrap="square" lIns="0" tIns="0" rIns="0" bIns="0" anchor="t">
             <a:spAutoFit/>
           </a:bodyPr>
           <a:lstStyle/>
@@ -12346,6 +12496,7 @@
           <a:lstStyle/>
           <a:p>
             <a:pPr algn="ctr"/>
+            <a:endParaRPr/>
           </a:p>
         </p:txBody>
       </p:sp>
@@ -12366,7 +12517,7 @@
           <a:noFill/>
         </p:spPr>
         <p:txBody>
-          <a:bodyPr wrap="square" lIns="0" rIns="0" tIns="0" bIns="0" anchor="t">
+          <a:bodyPr wrap="square" lIns="0" tIns="0" rIns="0" bIns="0" anchor="t">
             <a:spAutoFit/>
           </a:bodyPr>
           <a:lstStyle/>
@@ -12429,6 +12580,7 @@
           <a:lstStyle/>
           <a:p>
             <a:pPr algn="ctr"/>
+            <a:endParaRPr/>
           </a:p>
         </p:txBody>
       </p:sp>
@@ -12449,7 +12601,7 @@
           <a:noFill/>
         </p:spPr>
         <p:txBody>
-          <a:bodyPr wrap="square" lIns="0" rIns="0" tIns="0" bIns="0" anchor="t">
+          <a:bodyPr wrap="square" lIns="0" tIns="0" rIns="0" bIns="0" anchor="t">
             <a:spAutoFit/>
           </a:bodyPr>
           <a:lstStyle/>
@@ -12512,6 +12664,7 @@
           <a:lstStyle/>
           <a:p>
             <a:pPr algn="ctr"/>
+            <a:endParaRPr/>
           </a:p>
         </p:txBody>
       </p:sp>
@@ -12532,7 +12685,7 @@
           <a:noFill/>
         </p:spPr>
         <p:txBody>
-          <a:bodyPr wrap="square" lIns="0" rIns="0" tIns="0" bIns="0" anchor="t">
+          <a:bodyPr wrap="square" lIns="0" tIns="0" rIns="0" bIns="0" anchor="t">
             <a:spAutoFit/>
           </a:bodyPr>
           <a:lstStyle/>
@@ -12595,6 +12748,7 @@
           <a:lstStyle/>
           <a:p>
             <a:pPr algn="ctr"/>
+            <a:endParaRPr/>
           </a:p>
         </p:txBody>
       </p:sp>
@@ -12615,7 +12769,7 @@
           <a:noFill/>
         </p:spPr>
         <p:txBody>
-          <a:bodyPr wrap="square" lIns="0" rIns="0" tIns="0" bIns="0" anchor="t">
+          <a:bodyPr wrap="square" lIns="0" tIns="0" rIns="0" bIns="0" anchor="t">
             <a:spAutoFit/>
           </a:bodyPr>
           <a:lstStyle/>
@@ -12678,6 +12832,7 @@
           <a:lstStyle/>
           <a:p>
             <a:pPr algn="ctr"/>
+            <a:endParaRPr/>
           </a:p>
         </p:txBody>
       </p:sp>
@@ -12698,7 +12853,7 @@
           <a:noFill/>
         </p:spPr>
         <p:txBody>
-          <a:bodyPr wrap="square" lIns="0" rIns="0" tIns="0" bIns="0" anchor="t">
+          <a:bodyPr wrap="square" lIns="0" tIns="0" rIns="0" bIns="0" anchor="t">
             <a:spAutoFit/>
           </a:bodyPr>
           <a:lstStyle/>
@@ -12761,6 +12916,7 @@
           <a:lstStyle/>
           <a:p>
             <a:pPr algn="ctr"/>
+            <a:endParaRPr/>
           </a:p>
         </p:txBody>
       </p:sp>
@@ -12781,7 +12937,7 @@
           <a:noFill/>
         </p:spPr>
         <p:txBody>
-          <a:bodyPr wrap="square" lIns="0" rIns="0" tIns="0" bIns="0" anchor="t">
+          <a:bodyPr wrap="square" lIns="0" tIns="0" rIns="0" bIns="0" anchor="t">
             <a:spAutoFit/>
           </a:bodyPr>
           <a:lstStyle/>
@@ -12844,6 +13000,7 @@
           <a:lstStyle/>
           <a:p>
             <a:pPr algn="ctr"/>
+            <a:endParaRPr/>
           </a:p>
         </p:txBody>
       </p:sp>
@@ -12864,7 +13021,7 @@
           <a:noFill/>
         </p:spPr>
         <p:txBody>
-          <a:bodyPr wrap="square" lIns="0" rIns="0" tIns="0" bIns="0" anchor="t">
+          <a:bodyPr wrap="square" lIns="0" tIns="0" rIns="0" bIns="0" anchor="t">
             <a:spAutoFit/>
           </a:bodyPr>
           <a:lstStyle/>
@@ -12927,6 +13084,7 @@
           <a:lstStyle/>
           <a:p>
             <a:pPr algn="ctr"/>
+            <a:endParaRPr/>
           </a:p>
         </p:txBody>
       </p:sp>
@@ -12947,7 +13105,7 @@
           <a:noFill/>
         </p:spPr>
         <p:txBody>
-          <a:bodyPr wrap="square" lIns="0" rIns="0" tIns="0" bIns="0" anchor="t">
+          <a:bodyPr wrap="square" lIns="0" tIns="0" rIns="0" bIns="0" anchor="t">
             <a:spAutoFit/>
           </a:bodyPr>
           <a:lstStyle/>
@@ -13010,6 +13168,7 @@
           <a:lstStyle/>
           <a:p>
             <a:pPr algn="ctr"/>
+            <a:endParaRPr/>
           </a:p>
         </p:txBody>
       </p:sp>
@@ -13030,7 +13189,7 @@
           <a:noFill/>
         </p:spPr>
         <p:txBody>
-          <a:bodyPr wrap="square" lIns="0" rIns="0" tIns="0" bIns="0" anchor="t">
+          <a:bodyPr wrap="square" lIns="0" tIns="0" rIns="0" bIns="0" anchor="t">
             <a:spAutoFit/>
           </a:bodyPr>
           <a:lstStyle/>
@@ -13093,6 +13252,7 @@
           <a:lstStyle/>
           <a:p>
             <a:pPr algn="ctr"/>
+            <a:endParaRPr/>
           </a:p>
         </p:txBody>
       </p:sp>
@@ -13113,7 +13273,7 @@
           <a:noFill/>
         </p:spPr>
         <p:txBody>
-          <a:bodyPr wrap="square" lIns="0" rIns="0" tIns="0" bIns="0" anchor="t">
+          <a:bodyPr wrap="square" lIns="0" tIns="0" rIns="0" bIns="0" anchor="t">
             <a:spAutoFit/>
           </a:bodyPr>
           <a:lstStyle/>
@@ -13176,6 +13336,7 @@
           <a:lstStyle/>
           <a:p>
             <a:pPr algn="ctr"/>
+            <a:endParaRPr/>
           </a:p>
         </p:txBody>
       </p:sp>
@@ -13196,7 +13357,7 @@
           <a:noFill/>
         </p:spPr>
         <p:txBody>
-          <a:bodyPr wrap="square" lIns="0" rIns="0" tIns="0" bIns="0" anchor="t">
+          <a:bodyPr wrap="square" lIns="0" tIns="0" rIns="0" bIns="0" anchor="t">
             <a:spAutoFit/>
           </a:bodyPr>
           <a:lstStyle/>
@@ -13259,6 +13420,7 @@
           <a:lstStyle/>
           <a:p>
             <a:pPr algn="ctr"/>
+            <a:endParaRPr/>
           </a:p>
         </p:txBody>
       </p:sp>
@@ -13279,7 +13441,7 @@
           <a:noFill/>
         </p:spPr>
         <p:txBody>
-          <a:bodyPr wrap="square" lIns="0" rIns="0" tIns="0" bIns="0" anchor="t">
+          <a:bodyPr wrap="square" lIns="0" tIns="0" rIns="0" bIns="0" anchor="t">
             <a:spAutoFit/>
           </a:bodyPr>
           <a:lstStyle/>
@@ -13342,6 +13504,7 @@
           <a:lstStyle/>
           <a:p>
             <a:pPr algn="ctr"/>
+            <a:endParaRPr/>
           </a:p>
         </p:txBody>
       </p:sp>
@@ -13362,7 +13525,7 @@
           <a:noFill/>
         </p:spPr>
         <p:txBody>
-          <a:bodyPr wrap="square" lIns="0" rIns="0" tIns="0" bIns="0" anchor="t">
+          <a:bodyPr wrap="square" lIns="0" tIns="0" rIns="0" bIns="0" anchor="t">
             <a:spAutoFit/>
           </a:bodyPr>
           <a:lstStyle/>
@@ -13425,6 +13588,7 @@
           <a:lstStyle/>
           <a:p>
             <a:pPr algn="ctr"/>
+            <a:endParaRPr/>
           </a:p>
         </p:txBody>
       </p:sp>
@@ -13445,7 +13609,7 @@
           <a:noFill/>
         </p:spPr>
         <p:txBody>
-          <a:bodyPr wrap="square" lIns="0" rIns="0" tIns="0" bIns="0" anchor="t">
+          <a:bodyPr wrap="square" lIns="0" tIns="0" rIns="0" bIns="0" anchor="t">
             <a:spAutoFit/>
           </a:bodyPr>
           <a:lstStyle/>
@@ -13508,6 +13672,7 @@
           <a:lstStyle/>
           <a:p>
             <a:pPr algn="ctr"/>
+            <a:endParaRPr/>
           </a:p>
         </p:txBody>
       </p:sp>
@@ -13528,7 +13693,7 @@
           <a:noFill/>
         </p:spPr>
         <p:txBody>
-          <a:bodyPr wrap="square" lIns="0" rIns="0" tIns="0" bIns="0" anchor="t">
+          <a:bodyPr wrap="square" lIns="0" tIns="0" rIns="0" bIns="0" anchor="t">
             <a:spAutoFit/>
           </a:bodyPr>
           <a:lstStyle/>
@@ -13591,6 +13756,7 @@
           <a:lstStyle/>
           <a:p>
             <a:pPr algn="ctr"/>
+            <a:endParaRPr/>
           </a:p>
         </p:txBody>
       </p:sp>
@@ -13611,7 +13777,7 @@
           <a:noFill/>
         </p:spPr>
         <p:txBody>
-          <a:bodyPr wrap="square" lIns="0" rIns="0" tIns="0" bIns="0" anchor="t">
+          <a:bodyPr wrap="square" lIns="0" tIns="0" rIns="0" bIns="0" anchor="t">
             <a:spAutoFit/>
           </a:bodyPr>
           <a:lstStyle/>
@@ -13701,6 +13867,7 @@
           <a:lstStyle/>
           <a:p>
             <a:pPr algn="ctr"/>
+            <a:endParaRPr/>
           </a:p>
         </p:txBody>
       </p:sp>
@@ -13721,7 +13888,7 @@
           <a:noFill/>
         </p:spPr>
         <p:txBody>
-          <a:bodyPr wrap="square" lIns="0" rIns="0" tIns="0" bIns="0" anchor="t">
+          <a:bodyPr wrap="square" lIns="0" tIns="0" rIns="0" bIns="0" anchor="t">
             <a:spAutoFit/>
           </a:bodyPr>
           <a:lstStyle/>
@@ -13752,7 +13919,7 @@
 </file>
 
 <file path=ppt/slides/slide17.xml><?xml version="1.0" encoding="utf-8"?>
-<p:sld xmlns:a="http://schemas.openxmlformats.org/drawingml/2006/main" xmlns:p="http://schemas.openxmlformats.org/presentationml/2006/main" xmlns:r="http://schemas.openxmlformats.org/officeDocument/2006/relationships">
+<p:sld xmlns:a="http://schemas.openxmlformats.org/drawingml/2006/main" xmlns:r="http://schemas.openxmlformats.org/officeDocument/2006/relationships" xmlns:p="http://schemas.openxmlformats.org/presentationml/2006/main">
   <p:cSld>
     <p:spTree>
       <p:nvGrpSpPr>
@@ -13760,7 +13927,14 @@
         <p:cNvGrpSpPr/>
         <p:nvPr/>
       </p:nvGrpSpPr>
-      <p:grpSpPr/>
+      <p:grpSpPr>
+        <a:xfrm>
+          <a:off x="0" y="0"/>
+          <a:ext cx="0" cy="0"/>
+          <a:chOff x="0" y="0"/>
+          <a:chExt cx="0" cy="0"/>
+        </a:xfrm>
+      </p:grpSpPr>
       <p:sp>
         <p:nvSpPr>
           <p:cNvPr id="2" name="Rectangle 1"/>
@@ -13802,6 +13976,7 @@
           <a:lstStyle/>
           <a:p>
             <a:pPr algn="ctr"/>
+            <a:endParaRPr/>
           </a:p>
         </p:txBody>
       </p:sp>
@@ -13822,7 +13997,7 @@
           <a:noFill/>
         </p:spPr>
         <p:txBody>
-          <a:bodyPr wrap="square" lIns="0" rIns="0" tIns="0" bIns="0" anchor="t">
+          <a:bodyPr wrap="square" lIns="0" tIns="0" rIns="0" bIns="0" anchor="t">
             <a:spAutoFit/>
           </a:bodyPr>
           <a:lstStyle/>
@@ -13857,7 +14032,7 @@
           <a:noFill/>
         </p:spPr>
         <p:txBody>
-          <a:bodyPr wrap="square" lIns="0" rIns="0" tIns="0" bIns="0" anchor="t">
+          <a:bodyPr wrap="square" lIns="0" tIns="0" rIns="0" bIns="0" anchor="t">
             <a:spAutoFit/>
           </a:bodyPr>
           <a:lstStyle/>
@@ -13916,6 +14091,7 @@
           <a:lstStyle/>
           <a:p>
             <a:pPr algn="ctr"/>
+            <a:endParaRPr/>
           </a:p>
         </p:txBody>
       </p:sp>
@@ -13936,7 +14112,7 @@
           <a:noFill/>
         </p:spPr>
         <p:txBody>
-          <a:bodyPr wrap="square" lIns="0" rIns="0" tIns="0" bIns="0" anchor="t">
+          <a:bodyPr wrap="square" lIns="0" tIns="0" rIns="0" bIns="0" anchor="t">
             <a:spAutoFit/>
           </a:bodyPr>
           <a:lstStyle/>
@@ -13997,6 +14173,7 @@
           <a:lstStyle/>
           <a:p>
             <a:pPr algn="ctr"/>
+            <a:endParaRPr/>
           </a:p>
         </p:txBody>
       </p:sp>
@@ -14017,7 +14194,7 @@
           <a:noFill/>
         </p:spPr>
         <p:txBody>
-          <a:bodyPr wrap="square" lIns="0" rIns="0" tIns="0" bIns="0" anchor="t">
+          <a:bodyPr wrap="square" lIns="0" tIns="0" rIns="0" bIns="0" anchor="t">
             <a:spAutoFit/>
           </a:bodyPr>
           <a:lstStyle/>
@@ -14052,7 +14229,7 @@
           <a:noFill/>
         </p:spPr>
         <p:txBody>
-          <a:bodyPr wrap="square" lIns="0" rIns="0" tIns="0" bIns="0" anchor="t">
+          <a:bodyPr wrap="square" lIns="0" tIns="0" rIns="0" bIns="0" anchor="t">
             <a:spAutoFit/>
           </a:bodyPr>
           <a:lstStyle/>
@@ -14125,6 +14302,7 @@
           <a:lstStyle/>
           <a:p>
             <a:pPr algn="ctr"/>
+            <a:endParaRPr/>
           </a:p>
         </p:txBody>
       </p:sp>
@@ -14145,7 +14323,7 @@
           <a:noFill/>
         </p:spPr>
         <p:txBody>
-          <a:bodyPr wrap="square" lIns="0" rIns="0" tIns="0" bIns="0" anchor="t">
+          <a:bodyPr wrap="square" lIns="0" tIns="0" rIns="0" bIns="0" anchor="t">
             <a:spAutoFit/>
           </a:bodyPr>
           <a:lstStyle/>
@@ -14180,7 +14358,7 @@
           <a:noFill/>
         </p:spPr>
         <p:txBody>
-          <a:bodyPr wrap="square" lIns="0" rIns="0" tIns="0" bIns="0" anchor="t">
+          <a:bodyPr wrap="square" lIns="0" tIns="0" rIns="0" bIns="0" anchor="t">
             <a:spAutoFit/>
           </a:bodyPr>
           <a:lstStyle/>
@@ -14253,6 +14431,7 @@
           <a:lstStyle/>
           <a:p>
             <a:pPr algn="ctr"/>
+            <a:endParaRPr/>
           </a:p>
         </p:txBody>
       </p:sp>
@@ -14273,7 +14452,7 @@
           <a:noFill/>
         </p:spPr>
         <p:txBody>
-          <a:bodyPr wrap="square" lIns="0" rIns="0" tIns="0" bIns="0" anchor="t">
+          <a:bodyPr wrap="square" lIns="0" tIns="0" rIns="0" bIns="0" anchor="t">
             <a:spAutoFit/>
           </a:bodyPr>
           <a:lstStyle/>
@@ -14308,7 +14487,7 @@
           <a:noFill/>
         </p:spPr>
         <p:txBody>
-          <a:bodyPr wrap="square" lIns="0" rIns="0" tIns="0" bIns="0" anchor="t">
+          <a:bodyPr wrap="square" lIns="0" tIns="0" rIns="0" bIns="0" anchor="t">
             <a:spAutoFit/>
           </a:bodyPr>
           <a:lstStyle/>
@@ -14381,6 +14560,7 @@
           <a:lstStyle/>
           <a:p>
             <a:pPr algn="ctr"/>
+            <a:endParaRPr/>
           </a:p>
         </p:txBody>
       </p:sp>
@@ -14401,7 +14581,7 @@
           <a:noFill/>
         </p:spPr>
         <p:txBody>
-          <a:bodyPr wrap="square" lIns="0" rIns="0" tIns="0" bIns="0" anchor="t">
+          <a:bodyPr wrap="square" lIns="0" tIns="0" rIns="0" bIns="0" anchor="t">
             <a:spAutoFit/>
           </a:bodyPr>
           <a:lstStyle/>
@@ -14436,7 +14616,7 @@
           <a:noFill/>
         </p:spPr>
         <p:txBody>
-          <a:bodyPr wrap="square" lIns="0" rIns="0" tIns="0" bIns="0" anchor="t">
+          <a:bodyPr wrap="square" lIns="0" tIns="0" rIns="0" bIns="0" anchor="t">
             <a:spAutoFit/>
           </a:bodyPr>
           <a:lstStyle/>
@@ -14509,6 +14689,7 @@
           <a:lstStyle/>
           <a:p>
             <a:pPr algn="ctr"/>
+            <a:endParaRPr/>
           </a:p>
         </p:txBody>
       </p:sp>
@@ -14529,7 +14710,7 @@
           <a:noFill/>
         </p:spPr>
         <p:txBody>
-          <a:bodyPr wrap="square" lIns="0" rIns="0" tIns="0" bIns="0" anchor="t">
+          <a:bodyPr wrap="square" lIns="0" tIns="0" rIns="0" bIns="0" anchor="t">
             <a:spAutoFit/>
           </a:bodyPr>
           <a:lstStyle/>
@@ -14564,7 +14745,7 @@
           <a:noFill/>
         </p:spPr>
         <p:txBody>
-          <a:bodyPr wrap="square" lIns="0" rIns="0" tIns="0" bIns="0" anchor="t">
+          <a:bodyPr wrap="square" lIns="0" tIns="0" rIns="0" bIns="0" anchor="t">
             <a:spAutoFit/>
           </a:bodyPr>
           <a:lstStyle/>
@@ -14637,6 +14818,7 @@
           <a:lstStyle/>
           <a:p>
             <a:pPr algn="ctr"/>
+            <a:endParaRPr/>
           </a:p>
         </p:txBody>
       </p:sp>
@@ -14657,7 +14839,7 @@
           <a:noFill/>
         </p:spPr>
         <p:txBody>
-          <a:bodyPr wrap="square" lIns="0" rIns="0" tIns="0" bIns="0" anchor="t">
+          <a:bodyPr wrap="square" lIns="0" tIns="0" rIns="0" bIns="0" anchor="t">
             <a:spAutoFit/>
           </a:bodyPr>
           <a:lstStyle/>
@@ -14692,7 +14874,7 @@
           <a:noFill/>
         </p:spPr>
         <p:txBody>
-          <a:bodyPr wrap="square" lIns="0" rIns="0" tIns="0" bIns="0" anchor="t">
+          <a:bodyPr wrap="square" lIns="0" tIns="0" rIns="0" bIns="0" anchor="t">
             <a:spAutoFit/>
           </a:bodyPr>
           <a:lstStyle/>
@@ -14765,6 +14947,7 @@
           <a:lstStyle/>
           <a:p>
             <a:pPr algn="ctr"/>
+            <a:endParaRPr/>
           </a:p>
         </p:txBody>
       </p:sp>
@@ -14785,7 +14968,7 @@
           <a:noFill/>
         </p:spPr>
         <p:txBody>
-          <a:bodyPr wrap="square" lIns="0" rIns="0" tIns="0" bIns="0" anchor="t">
+          <a:bodyPr wrap="square" lIns="0" tIns="0" rIns="0" bIns="0" anchor="t">
             <a:spAutoFit/>
           </a:bodyPr>
           <a:lstStyle/>
@@ -14820,7 +15003,7 @@
           <a:noFill/>
         </p:spPr>
         <p:txBody>
-          <a:bodyPr wrap="square" lIns="0" rIns="0" tIns="0" bIns="0" anchor="t">
+          <a:bodyPr wrap="square" lIns="0" tIns="0" rIns="0" bIns="0" anchor="t">
             <a:spAutoFit/>
           </a:bodyPr>
           <a:lstStyle/>
@@ -14893,6 +15076,7 @@
           <a:lstStyle/>
           <a:p>
             <a:pPr algn="ctr"/>
+            <a:endParaRPr/>
           </a:p>
         </p:txBody>
       </p:sp>
@@ -14913,7 +15097,7 @@
           <a:noFill/>
         </p:spPr>
         <p:txBody>
-          <a:bodyPr wrap="square" lIns="0" rIns="0" tIns="0" bIns="0" anchor="t">
+          <a:bodyPr wrap="square" lIns="0" tIns="0" rIns="0" bIns="0" anchor="t">
             <a:spAutoFit/>
           </a:bodyPr>
           <a:lstStyle/>
@@ -14948,7 +15132,7 @@
           <a:noFill/>
         </p:spPr>
         <p:txBody>
-          <a:bodyPr wrap="square" lIns="0" rIns="0" tIns="0" bIns="0" anchor="t">
+          <a:bodyPr wrap="square" lIns="0" tIns="0" rIns="0" bIns="0" anchor="t">
             <a:spAutoFit/>
           </a:bodyPr>
           <a:lstStyle/>
@@ -15021,6 +15205,7 @@
           <a:lstStyle/>
           <a:p>
             <a:pPr algn="ctr"/>
+            <a:endParaRPr/>
           </a:p>
         </p:txBody>
       </p:sp>
@@ -15041,7 +15226,7 @@
           <a:noFill/>
         </p:spPr>
         <p:txBody>
-          <a:bodyPr wrap="square" lIns="0" rIns="0" tIns="0" bIns="0" anchor="t">
+          <a:bodyPr wrap="square" lIns="0" tIns="0" rIns="0" bIns="0" anchor="t">
             <a:spAutoFit/>
           </a:bodyPr>
           <a:lstStyle/>
@@ -15076,7 +15261,7 @@
           <a:noFill/>
         </p:spPr>
         <p:txBody>
-          <a:bodyPr wrap="square" lIns="0" rIns="0" tIns="0" bIns="0" anchor="t">
+          <a:bodyPr wrap="square" lIns="0" tIns="0" rIns="0" bIns="0" anchor="t">
             <a:spAutoFit/>
           </a:bodyPr>
           <a:lstStyle/>
@@ -15149,6 +15334,7 @@
           <a:lstStyle/>
           <a:p>
             <a:pPr algn="ctr"/>
+            <a:endParaRPr/>
           </a:p>
         </p:txBody>
       </p:sp>
@@ -15169,7 +15355,7 @@
           <a:noFill/>
         </p:spPr>
         <p:txBody>
-          <a:bodyPr wrap="square" lIns="0" rIns="0" tIns="0" bIns="0" anchor="t">
+          <a:bodyPr wrap="square" lIns="0" tIns="0" rIns="0" bIns="0" anchor="t">
             <a:spAutoFit/>
           </a:bodyPr>
           <a:lstStyle/>
@@ -15204,7 +15390,7 @@
           <a:noFill/>
         </p:spPr>
         <p:txBody>
-          <a:bodyPr wrap="square" lIns="0" rIns="0" tIns="0" bIns="0" anchor="t">
+          <a:bodyPr wrap="square" lIns="0" tIns="0" rIns="0" bIns="0" anchor="t">
             <a:spAutoFit/>
           </a:bodyPr>
           <a:lstStyle/>
@@ -15251,7 +15437,7 @@
           <a:noFill/>
         </p:spPr>
         <p:txBody>
-          <a:bodyPr wrap="square" lIns="0" rIns="0" tIns="0" bIns="0" anchor="t">
+          <a:bodyPr wrap="square" lIns="0" tIns="0" rIns="0" bIns="0" anchor="t">
             <a:spAutoFit/>
           </a:bodyPr>
           <a:lstStyle/>
@@ -15312,6 +15498,7 @@
           <a:lstStyle/>
           <a:p>
             <a:pPr algn="ctr"/>
+            <a:endParaRPr/>
           </a:p>
         </p:txBody>
       </p:sp>
@@ -15332,7 +15519,7 @@
           <a:noFill/>
         </p:spPr>
         <p:txBody>
-          <a:bodyPr wrap="square" lIns="0" rIns="0" tIns="0" bIns="0" anchor="t">
+          <a:bodyPr wrap="square" lIns="0" tIns="0" rIns="0" bIns="0" anchor="t">
             <a:spAutoFit/>
           </a:bodyPr>
           <a:lstStyle/>
@@ -15367,7 +15554,7 @@
           <a:noFill/>
         </p:spPr>
         <p:txBody>
-          <a:bodyPr wrap="square" lIns="0" rIns="0" tIns="0" bIns="0" anchor="t">
+          <a:bodyPr wrap="square" lIns="0" tIns="0" rIns="0" bIns="0" anchor="t">
             <a:spAutoFit/>
           </a:bodyPr>
           <a:lstStyle/>
@@ -15428,6 +15615,7 @@
           <a:lstStyle/>
           <a:p>
             <a:pPr algn="ctr"/>
+            <a:endParaRPr/>
           </a:p>
         </p:txBody>
       </p:sp>
@@ -15448,7 +15636,7 @@
           <a:noFill/>
         </p:spPr>
         <p:txBody>
-          <a:bodyPr wrap="square" lIns="0" rIns="0" tIns="0" bIns="0" anchor="t">
+          <a:bodyPr wrap="square" lIns="0" tIns="0" rIns="0" bIns="0" anchor="t">
             <a:spAutoFit/>
           </a:bodyPr>
           <a:lstStyle/>
@@ -15483,7 +15671,7 @@
           <a:noFill/>
         </p:spPr>
         <p:txBody>
-          <a:bodyPr wrap="square" lIns="0" rIns="0" tIns="0" bIns="0" anchor="t">
+          <a:bodyPr wrap="square" lIns="0" tIns="0" rIns="0" bIns="0" anchor="t">
             <a:spAutoFit/>
           </a:bodyPr>
           <a:lstStyle/>
@@ -15544,6 +15732,7 @@
           <a:lstStyle/>
           <a:p>
             <a:pPr algn="ctr"/>
+            <a:endParaRPr/>
           </a:p>
         </p:txBody>
       </p:sp>
@@ -15564,7 +15753,7 @@
           <a:noFill/>
         </p:spPr>
         <p:txBody>
-          <a:bodyPr wrap="square" lIns="0" rIns="0" tIns="0" bIns="0" anchor="t">
+          <a:bodyPr wrap="square" lIns="0" tIns="0" rIns="0" bIns="0" anchor="t">
             <a:spAutoFit/>
           </a:bodyPr>
           <a:lstStyle/>
@@ -15599,7 +15788,7 @@
           <a:noFill/>
         </p:spPr>
         <p:txBody>
-          <a:bodyPr wrap="square" lIns="0" rIns="0" tIns="0" bIns="0" anchor="t">
+          <a:bodyPr wrap="square" lIns="0" tIns="0" rIns="0" bIns="0" anchor="t">
             <a:spAutoFit/>
           </a:bodyPr>
           <a:lstStyle/>
@@ -15660,6 +15849,7 @@
           <a:lstStyle/>
           <a:p>
             <a:pPr algn="ctr"/>
+            <a:endParaRPr/>
           </a:p>
         </p:txBody>
       </p:sp>
@@ -15680,7 +15870,7 @@
           <a:noFill/>
         </p:spPr>
         <p:txBody>
-          <a:bodyPr wrap="square" lIns="0" rIns="0" tIns="0" bIns="0" anchor="t">
+          <a:bodyPr wrap="square" lIns="0" tIns="0" rIns="0" bIns="0" anchor="t">
             <a:spAutoFit/>
           </a:bodyPr>
           <a:lstStyle/>
@@ -15715,7 +15905,7 @@
           <a:noFill/>
         </p:spPr>
         <p:txBody>
-          <a:bodyPr wrap="square" lIns="0" rIns="0" tIns="0" bIns="0" anchor="t">
+          <a:bodyPr wrap="square" lIns="0" tIns="0" rIns="0" bIns="0" anchor="t">
             <a:spAutoFit/>
           </a:bodyPr>
           <a:lstStyle/>
@@ -15742,7 +15932,7 @@
 </file>
 
 <file path=ppt/slides/slide18.xml><?xml version="1.0" encoding="utf-8"?>
-<p:sld xmlns:a="http://schemas.openxmlformats.org/drawingml/2006/main" xmlns:p="http://schemas.openxmlformats.org/presentationml/2006/main" xmlns:r="http://schemas.openxmlformats.org/officeDocument/2006/relationships">
+<p:sld xmlns:a="http://schemas.openxmlformats.org/drawingml/2006/main" xmlns:r="http://schemas.openxmlformats.org/officeDocument/2006/relationships" xmlns:p="http://schemas.openxmlformats.org/presentationml/2006/main">
   <p:cSld>
     <p:spTree>
       <p:nvGrpSpPr>
@@ -15750,7 +15940,14 @@
         <p:cNvGrpSpPr/>
         <p:nvPr/>
       </p:nvGrpSpPr>
-      <p:grpSpPr/>
+      <p:grpSpPr>
+        <a:xfrm>
+          <a:off x="0" y="0"/>
+          <a:ext cx="0" cy="0"/>
+          <a:chOff x="0" y="0"/>
+          <a:chExt cx="0" cy="0"/>
+        </a:xfrm>
+      </p:grpSpPr>
       <p:sp>
         <p:nvSpPr>
           <p:cNvPr id="2" name="Rectangle 1"/>
@@ -15792,6 +15989,7 @@
           <a:lstStyle/>
           <a:p>
             <a:pPr algn="ctr"/>
+            <a:endParaRPr/>
           </a:p>
         </p:txBody>
       </p:sp>
@@ -15812,7 +16010,7 @@
           <a:noFill/>
         </p:spPr>
         <p:txBody>
-          <a:bodyPr wrap="square" lIns="0" rIns="0" tIns="0" bIns="0" anchor="t">
+          <a:bodyPr wrap="square" lIns="0" tIns="0" rIns="0" bIns="0" anchor="t">
             <a:spAutoFit/>
           </a:bodyPr>
           <a:lstStyle/>
@@ -15847,7 +16045,7 @@
           <a:noFill/>
         </p:spPr>
         <p:txBody>
-          <a:bodyPr wrap="square" lIns="0" rIns="0" tIns="0" bIns="0" anchor="t">
+          <a:bodyPr wrap="square" lIns="0" tIns="0" rIns="0" bIns="0" anchor="t">
             <a:spAutoFit/>
           </a:bodyPr>
           <a:lstStyle/>
@@ -15906,6 +16104,7 @@
           <a:lstStyle/>
           <a:p>
             <a:pPr algn="ctr"/>
+            <a:endParaRPr/>
           </a:p>
         </p:txBody>
       </p:sp>
@@ -15926,7 +16125,7 @@
           <a:noFill/>
         </p:spPr>
         <p:txBody>
-          <a:bodyPr wrap="square" lIns="0" rIns="0" tIns="0" bIns="0" anchor="t">
+          <a:bodyPr wrap="square" lIns="0" tIns="0" rIns="0" bIns="0" anchor="t">
             <a:spAutoFit/>
           </a:bodyPr>
           <a:lstStyle/>
@@ -15961,7 +16160,7 @@
           <a:noFill/>
         </p:spPr>
         <p:txBody>
-          <a:bodyPr wrap="square" lIns="0" rIns="0" tIns="0" bIns="0" anchor="t">
+          <a:bodyPr wrap="square" lIns="0" tIns="0" rIns="0" bIns="0" anchor="t">
             <a:spAutoFit/>
           </a:bodyPr>
           <a:lstStyle/>
@@ -16022,6 +16221,7 @@
           <a:lstStyle/>
           <a:p>
             <a:pPr algn="ctr"/>
+            <a:endParaRPr/>
           </a:p>
         </p:txBody>
       </p:sp>
@@ -16042,7 +16242,7 @@
           <a:noFill/>
         </p:spPr>
         <p:txBody>
-          <a:bodyPr wrap="square" lIns="0" rIns="0" tIns="0" bIns="0" anchor="t">
+          <a:bodyPr wrap="square" lIns="0" tIns="0" rIns="0" bIns="0" anchor="t">
             <a:spAutoFit/>
           </a:bodyPr>
           <a:lstStyle/>
@@ -16077,7 +16277,7 @@
           <a:noFill/>
         </p:spPr>
         <p:txBody>
-          <a:bodyPr wrap="square" lIns="0" rIns="0" tIns="0" bIns="0" anchor="t">
+          <a:bodyPr wrap="square" lIns="0" tIns="0" rIns="0" bIns="0" anchor="t">
             <a:spAutoFit/>
           </a:bodyPr>
           <a:lstStyle/>
@@ -16112,7 +16312,7 @@
           <a:noFill/>
         </p:spPr>
         <p:txBody>
-          <a:bodyPr wrap="square" lIns="0" rIns="0" tIns="0" bIns="0" anchor="t">
+          <a:bodyPr wrap="square" lIns="0" tIns="0" rIns="0" bIns="0" anchor="t">
             <a:spAutoFit/>
           </a:bodyPr>
           <a:lstStyle/>
@@ -16173,6 +16373,7 @@
           <a:lstStyle/>
           <a:p>
             <a:pPr algn="ctr"/>
+            <a:endParaRPr/>
           </a:p>
         </p:txBody>
       </p:sp>
@@ -16219,6 +16420,7 @@
           <a:lstStyle/>
           <a:p>
             <a:pPr algn="ctr"/>
+            <a:endParaRPr/>
           </a:p>
         </p:txBody>
       </p:sp>
@@ -16239,7 +16441,7 @@
           <a:noFill/>
         </p:spPr>
         <p:txBody>
-          <a:bodyPr wrap="square" lIns="0" rIns="0" tIns="0" bIns="0" anchor="t">
+          <a:bodyPr wrap="square" lIns="0" tIns="0" rIns="0" bIns="0" anchor="t">
             <a:spAutoFit/>
           </a:bodyPr>
           <a:lstStyle/>
@@ -16294,7 +16496,7 @@
           <a:noFill/>
         </p:spPr>
         <p:txBody>
-          <a:bodyPr wrap="square" lIns="0" rIns="0" tIns="0" bIns="0" anchor="t">
+          <a:bodyPr wrap="square" lIns="0" tIns="0" rIns="0" bIns="0" anchor="t">
             <a:spAutoFit/>
           </a:bodyPr>
           <a:lstStyle/>
@@ -16333,7 +16535,7 @@
           <a:noFill/>
         </p:spPr>
         <p:txBody>
-          <a:bodyPr wrap="square" lIns="0" rIns="0" tIns="0" bIns="0" anchor="t">
+          <a:bodyPr wrap="square" lIns="0" tIns="0" rIns="0" bIns="0" anchor="t">
             <a:spAutoFit/>
           </a:bodyPr>
           <a:lstStyle/>
@@ -16398,6 +16600,7 @@
           <a:lstStyle/>
           <a:p>
             <a:pPr algn="ctr"/>
+            <a:endParaRPr/>
           </a:p>
         </p:txBody>
       </p:sp>
@@ -16444,6 +16647,7 @@
           <a:lstStyle/>
           <a:p>
             <a:pPr algn="ctr"/>
+            <a:endParaRPr/>
           </a:p>
         </p:txBody>
       </p:sp>
@@ -16464,7 +16668,7 @@
           <a:noFill/>
         </p:spPr>
         <p:txBody>
-          <a:bodyPr wrap="square" lIns="0" rIns="0" tIns="0" bIns="0" anchor="t">
+          <a:bodyPr wrap="square" lIns="0" tIns="0" rIns="0" bIns="0" anchor="t">
             <a:spAutoFit/>
           </a:bodyPr>
           <a:lstStyle/>
@@ -16519,7 +16723,7 @@
           <a:noFill/>
         </p:spPr>
         <p:txBody>
-          <a:bodyPr wrap="square" lIns="0" rIns="0" tIns="0" bIns="0" anchor="t">
+          <a:bodyPr wrap="square" lIns="0" tIns="0" rIns="0" bIns="0" anchor="t">
             <a:spAutoFit/>
           </a:bodyPr>
           <a:lstStyle/>
@@ -16558,7 +16762,7 @@
           <a:noFill/>
         </p:spPr>
         <p:txBody>
-          <a:bodyPr wrap="square" lIns="0" rIns="0" tIns="0" bIns="0" anchor="t">
+          <a:bodyPr wrap="square" lIns="0" tIns="0" rIns="0" bIns="0" anchor="t">
             <a:spAutoFit/>
           </a:bodyPr>
           <a:lstStyle/>
@@ -16623,6 +16827,7 @@
           <a:lstStyle/>
           <a:p>
             <a:pPr algn="ctr"/>
+            <a:endParaRPr/>
           </a:p>
         </p:txBody>
       </p:sp>
@@ -16669,6 +16874,7 @@
           <a:lstStyle/>
           <a:p>
             <a:pPr algn="ctr"/>
+            <a:endParaRPr/>
           </a:p>
         </p:txBody>
       </p:sp>
@@ -16689,7 +16895,7 @@
           <a:noFill/>
         </p:spPr>
         <p:txBody>
-          <a:bodyPr wrap="square" lIns="0" rIns="0" tIns="0" bIns="0" anchor="t">
+          <a:bodyPr wrap="square" lIns="0" tIns="0" rIns="0" bIns="0" anchor="t">
             <a:spAutoFit/>
           </a:bodyPr>
           <a:lstStyle/>
@@ -16744,7 +16950,7 @@
           <a:noFill/>
         </p:spPr>
         <p:txBody>
-          <a:bodyPr wrap="square" lIns="0" rIns="0" tIns="0" bIns="0" anchor="t">
+          <a:bodyPr wrap="square" lIns="0" tIns="0" rIns="0" bIns="0" anchor="t">
             <a:spAutoFit/>
           </a:bodyPr>
           <a:lstStyle/>
@@ -16783,7 +16989,7 @@
           <a:noFill/>
         </p:spPr>
         <p:txBody>
-          <a:bodyPr wrap="square" lIns="0" rIns="0" tIns="0" bIns="0" anchor="t">
+          <a:bodyPr wrap="square" lIns="0" tIns="0" rIns="0" bIns="0" anchor="t">
             <a:spAutoFit/>
           </a:bodyPr>
           <a:lstStyle/>
@@ -16848,6 +17054,7 @@
           <a:lstStyle/>
           <a:p>
             <a:pPr algn="ctr"/>
+            <a:endParaRPr/>
           </a:p>
         </p:txBody>
       </p:sp>
@@ -16894,6 +17101,7 @@
           <a:lstStyle/>
           <a:p>
             <a:pPr algn="ctr"/>
+            <a:endParaRPr/>
           </a:p>
         </p:txBody>
       </p:sp>
@@ -16914,7 +17122,7 @@
           <a:noFill/>
         </p:spPr>
         <p:txBody>
-          <a:bodyPr wrap="square" lIns="0" rIns="0" tIns="0" bIns="0" anchor="t">
+          <a:bodyPr wrap="square" lIns="0" tIns="0" rIns="0" bIns="0" anchor="t">
             <a:spAutoFit/>
           </a:bodyPr>
           <a:lstStyle/>
@@ -16969,7 +17177,7 @@
           <a:noFill/>
         </p:spPr>
         <p:txBody>
-          <a:bodyPr wrap="square" lIns="0" rIns="0" tIns="0" bIns="0" anchor="t">
+          <a:bodyPr wrap="square" lIns="0" tIns="0" rIns="0" bIns="0" anchor="t">
             <a:spAutoFit/>
           </a:bodyPr>
           <a:lstStyle/>
@@ -17008,7 +17216,7 @@
           <a:noFill/>
         </p:spPr>
         <p:txBody>
-          <a:bodyPr wrap="square" lIns="0" rIns="0" tIns="0" bIns="0" anchor="t">
+          <a:bodyPr wrap="square" lIns="0" tIns="0" rIns="0" bIns="0" anchor="t">
             <a:spAutoFit/>
           </a:bodyPr>
           <a:lstStyle/>
@@ -17073,6 +17281,7 @@
           <a:lstStyle/>
           <a:p>
             <a:pPr algn="ctr"/>
+            <a:endParaRPr/>
           </a:p>
         </p:txBody>
       </p:sp>
@@ -17093,7 +17302,7 @@
           <a:noFill/>
         </p:spPr>
         <p:txBody>
-          <a:bodyPr wrap="square" lIns="0" rIns="0" tIns="0" bIns="0" anchor="t">
+          <a:bodyPr wrap="square" lIns="0" tIns="0" rIns="0" bIns="0" anchor="t">
             <a:spAutoFit/>
           </a:bodyPr>
           <a:lstStyle/>
@@ -17120,7 +17329,7 @@
 </file>
 
 <file path=ppt/slides/slide19.xml><?xml version="1.0" encoding="utf-8"?>
-<p:sld xmlns:a="http://schemas.openxmlformats.org/drawingml/2006/main" xmlns:p="http://schemas.openxmlformats.org/presentationml/2006/main" xmlns:r="http://schemas.openxmlformats.org/officeDocument/2006/relationships">
+<p:sld xmlns:a="http://schemas.openxmlformats.org/drawingml/2006/main" xmlns:r="http://schemas.openxmlformats.org/officeDocument/2006/relationships" xmlns:p="http://schemas.openxmlformats.org/presentationml/2006/main">
   <p:cSld>
     <p:spTree>
       <p:nvGrpSpPr>
@@ -17128,7 +17337,14 @@
         <p:cNvGrpSpPr/>
         <p:nvPr/>
       </p:nvGrpSpPr>
-      <p:grpSpPr/>
+      <p:grpSpPr>
+        <a:xfrm>
+          <a:off x="0" y="0"/>
+          <a:ext cx="0" cy="0"/>
+          <a:chOff x="0" y="0"/>
+          <a:chExt cx="0" cy="0"/>
+        </a:xfrm>
+      </p:grpSpPr>
       <p:sp>
         <p:nvSpPr>
           <p:cNvPr id="2" name="Rectangle 1"/>
@@ -17170,6 +17386,7 @@
           <a:lstStyle/>
           <a:p>
             <a:pPr algn="ctr"/>
+            <a:endParaRPr/>
           </a:p>
         </p:txBody>
       </p:sp>
@@ -17190,7 +17407,7 @@
           <a:noFill/>
         </p:spPr>
         <p:txBody>
-          <a:bodyPr wrap="square" lIns="0" rIns="0" tIns="0" bIns="0" anchor="t">
+          <a:bodyPr wrap="square" lIns="0" tIns="0" rIns="0" bIns="0" anchor="t">
             <a:spAutoFit/>
           </a:bodyPr>
           <a:lstStyle/>
@@ -17225,7 +17442,7 @@
           <a:noFill/>
         </p:spPr>
         <p:txBody>
-          <a:bodyPr wrap="square" lIns="0" rIns="0" tIns="0" bIns="0" anchor="t">
+          <a:bodyPr wrap="square" lIns="0" tIns="0" rIns="0" bIns="0" anchor="t">
             <a:spAutoFit/>
           </a:bodyPr>
           <a:lstStyle/>
@@ -17284,6 +17501,7 @@
           <a:lstStyle/>
           <a:p>
             <a:pPr algn="ctr"/>
+            <a:endParaRPr/>
           </a:p>
         </p:txBody>
       </p:sp>
@@ -17304,7 +17522,7 @@
           <a:noFill/>
         </p:spPr>
         <p:txBody>
-          <a:bodyPr wrap="square" lIns="0" rIns="0" tIns="0" bIns="0" anchor="t">
+          <a:bodyPr wrap="square" lIns="0" tIns="0" rIns="0" bIns="0" anchor="t">
             <a:spAutoFit/>
           </a:bodyPr>
           <a:lstStyle/>
@@ -17365,6 +17583,7 @@
           <a:lstStyle/>
           <a:p>
             <a:pPr algn="ctr"/>
+            <a:endParaRPr/>
           </a:p>
         </p:txBody>
       </p:sp>
@@ -17411,6 +17630,7 @@
           <a:lstStyle/>
           <a:p>
             <a:pPr algn="ctr"/>
+            <a:endParaRPr/>
           </a:p>
         </p:txBody>
       </p:sp>
@@ -17457,6 +17677,7 @@
           <a:lstStyle/>
           <a:p>
             <a:pPr algn="ctr"/>
+            <a:endParaRPr/>
           </a:p>
         </p:txBody>
       </p:sp>
@@ -17477,7 +17698,7 @@
           <a:noFill/>
         </p:spPr>
         <p:txBody>
-          <a:bodyPr wrap="square" lIns="0" rIns="0" tIns="0" bIns="0" anchor="t">
+          <a:bodyPr wrap="square" lIns="0" tIns="0" rIns="0" bIns="0" anchor="t">
             <a:spAutoFit/>
           </a:bodyPr>
           <a:lstStyle/>
@@ -17512,7 +17733,7 @@
           <a:noFill/>
         </p:spPr>
         <p:txBody>
-          <a:bodyPr wrap="square" lIns="0" rIns="0" tIns="0" bIns="0" anchor="t">
+          <a:bodyPr wrap="square" lIns="0" tIns="0" rIns="0" bIns="0" anchor="t">
             <a:spAutoFit/>
           </a:bodyPr>
           <a:lstStyle/>
@@ -17547,7 +17768,7 @@
           <a:noFill/>
         </p:spPr>
         <p:txBody>
-          <a:bodyPr wrap="square" lIns="0" rIns="0" tIns="0" bIns="0" anchor="t">
+          <a:bodyPr wrap="square" lIns="0" tIns="0" rIns="0" bIns="0" anchor="t">
             <a:spAutoFit/>
           </a:bodyPr>
           <a:lstStyle/>
@@ -17612,6 +17833,7 @@
           <a:lstStyle/>
           <a:p>
             <a:pPr algn="ctr"/>
+            <a:endParaRPr/>
           </a:p>
         </p:txBody>
       </p:sp>
@@ -17658,6 +17880,7 @@
           <a:lstStyle/>
           <a:p>
             <a:pPr algn="ctr"/>
+            <a:endParaRPr/>
           </a:p>
         </p:txBody>
       </p:sp>
@@ -17704,6 +17927,7 @@
           <a:lstStyle/>
           <a:p>
             <a:pPr algn="ctr"/>
+            <a:endParaRPr/>
           </a:p>
         </p:txBody>
       </p:sp>
@@ -17724,7 +17948,7 @@
           <a:noFill/>
         </p:spPr>
         <p:txBody>
-          <a:bodyPr wrap="square" lIns="0" rIns="0" tIns="0" bIns="0" anchor="t">
+          <a:bodyPr wrap="square" lIns="0" tIns="0" rIns="0" bIns="0" anchor="t">
             <a:spAutoFit/>
           </a:bodyPr>
           <a:lstStyle/>
@@ -17759,7 +17983,7 @@
           <a:noFill/>
         </p:spPr>
         <p:txBody>
-          <a:bodyPr wrap="square" lIns="0" rIns="0" tIns="0" bIns="0" anchor="t">
+          <a:bodyPr wrap="square" lIns="0" tIns="0" rIns="0" bIns="0" anchor="t">
             <a:spAutoFit/>
           </a:bodyPr>
           <a:lstStyle/>
@@ -17794,7 +18018,7 @@
           <a:noFill/>
         </p:spPr>
         <p:txBody>
-          <a:bodyPr wrap="square" lIns="0" rIns="0" tIns="0" bIns="0" anchor="t">
+          <a:bodyPr wrap="square" lIns="0" tIns="0" rIns="0" bIns="0" anchor="t">
             <a:spAutoFit/>
           </a:bodyPr>
           <a:lstStyle/>
@@ -17859,6 +18083,7 @@
           <a:lstStyle/>
           <a:p>
             <a:pPr algn="ctr"/>
+            <a:endParaRPr/>
           </a:p>
         </p:txBody>
       </p:sp>
@@ -17905,6 +18130,7 @@
           <a:lstStyle/>
           <a:p>
             <a:pPr algn="ctr"/>
+            <a:endParaRPr/>
           </a:p>
         </p:txBody>
       </p:sp>
@@ -17951,6 +18177,7 @@
           <a:lstStyle/>
           <a:p>
             <a:pPr algn="ctr"/>
+            <a:endParaRPr/>
           </a:p>
         </p:txBody>
       </p:sp>
@@ -17971,7 +18198,7 @@
           <a:noFill/>
         </p:spPr>
         <p:txBody>
-          <a:bodyPr wrap="square" lIns="0" rIns="0" tIns="0" bIns="0" anchor="t">
+          <a:bodyPr wrap="square" lIns="0" tIns="0" rIns="0" bIns="0" anchor="t">
             <a:spAutoFit/>
           </a:bodyPr>
           <a:lstStyle/>
@@ -18006,7 +18233,7 @@
           <a:noFill/>
         </p:spPr>
         <p:txBody>
-          <a:bodyPr wrap="square" lIns="0" rIns="0" tIns="0" bIns="0" anchor="t">
+          <a:bodyPr wrap="square" lIns="0" tIns="0" rIns="0" bIns="0" anchor="t">
             <a:spAutoFit/>
           </a:bodyPr>
           <a:lstStyle/>
@@ -18041,7 +18268,7 @@
           <a:noFill/>
         </p:spPr>
         <p:txBody>
-          <a:bodyPr wrap="square" lIns="0" rIns="0" tIns="0" bIns="0" anchor="t">
+          <a:bodyPr wrap="square" lIns="0" tIns="0" rIns="0" bIns="0" anchor="t">
             <a:spAutoFit/>
           </a:bodyPr>
           <a:lstStyle/>
@@ -18072,7 +18299,7 @@
 </file>
 
 <file path=ppt/slides/slide2.xml><?xml version="1.0" encoding="utf-8"?>
-<p:sld xmlns:a="http://schemas.openxmlformats.org/drawingml/2006/main" xmlns:p="http://schemas.openxmlformats.org/presentationml/2006/main" xmlns:r="http://schemas.openxmlformats.org/officeDocument/2006/relationships">
+<p:sld xmlns:a="http://schemas.openxmlformats.org/drawingml/2006/main" xmlns:r="http://schemas.openxmlformats.org/officeDocument/2006/relationships" xmlns:p="http://schemas.openxmlformats.org/presentationml/2006/main">
   <p:cSld>
     <p:spTree>
       <p:nvGrpSpPr>
@@ -18080,7 +18307,14 @@
         <p:cNvGrpSpPr/>
         <p:nvPr/>
       </p:nvGrpSpPr>
-      <p:grpSpPr/>
+      <p:grpSpPr>
+        <a:xfrm>
+          <a:off x="0" y="0"/>
+          <a:ext cx="0" cy="0"/>
+          <a:chOff x="0" y="0"/>
+          <a:chExt cx="0" cy="0"/>
+        </a:xfrm>
+      </p:grpSpPr>
       <p:sp>
         <p:nvSpPr>
           <p:cNvPr id="2" name="Rectangle 1"/>
@@ -18122,6 +18356,7 @@
           <a:lstStyle/>
           <a:p>
             <a:pPr algn="ctr"/>
+            <a:endParaRPr/>
           </a:p>
         </p:txBody>
       </p:sp>
@@ -18142,7 +18377,7 @@
           <a:noFill/>
         </p:spPr>
         <p:txBody>
-          <a:bodyPr wrap="square" lIns="0" rIns="0" tIns="0" bIns="0" anchor="t">
+          <a:bodyPr wrap="square" lIns="0" tIns="0" rIns="0" bIns="0" anchor="t">
             <a:spAutoFit/>
           </a:bodyPr>
           <a:lstStyle/>
@@ -18177,7 +18412,7 @@
           <a:noFill/>
         </p:spPr>
         <p:txBody>
-          <a:bodyPr wrap="square" lIns="0" rIns="0" tIns="0" bIns="0" anchor="t">
+          <a:bodyPr wrap="square" lIns="0" tIns="0" rIns="0" bIns="0" anchor="t">
             <a:spAutoFit/>
           </a:bodyPr>
           <a:lstStyle/>
@@ -18236,6 +18471,7 @@
           <a:lstStyle/>
           <a:p>
             <a:pPr algn="ctr"/>
+            <a:endParaRPr/>
           </a:p>
         </p:txBody>
       </p:sp>
@@ -18256,7 +18492,7 @@
           <a:noFill/>
         </p:spPr>
         <p:txBody>
-          <a:bodyPr wrap="square" lIns="0" rIns="0" tIns="0" bIns="0" anchor="t">
+          <a:bodyPr wrap="square" lIns="0" tIns="0" rIns="0" bIns="0" anchor="t">
             <a:spAutoFit/>
           </a:bodyPr>
           <a:lstStyle/>
@@ -18317,6 +18553,7 @@
           <a:lstStyle/>
           <a:p>
             <a:pPr algn="ctr"/>
+            <a:endParaRPr/>
           </a:p>
         </p:txBody>
       </p:sp>
@@ -18363,6 +18600,7 @@
           <a:lstStyle/>
           <a:p>
             <a:pPr algn="ctr"/>
+            <a:endParaRPr/>
           </a:p>
         </p:txBody>
       </p:sp>
@@ -18383,7 +18621,7 @@
           <a:noFill/>
         </p:spPr>
         <p:txBody>
-          <a:bodyPr wrap="square" lIns="0" rIns="0" tIns="0" bIns="0" anchor="t">
+          <a:bodyPr wrap="square" lIns="0" tIns="0" rIns="0" bIns="0" anchor="t">
             <a:spAutoFit/>
           </a:bodyPr>
           <a:lstStyle/>
@@ -18418,7 +18656,7 @@
           <a:noFill/>
         </p:spPr>
         <p:txBody>
-          <a:bodyPr wrap="square" lIns="0" rIns="0" tIns="0" bIns="0" anchor="t">
+          <a:bodyPr wrap="square" lIns="0" tIns="0" rIns="0" bIns="0" anchor="t">
             <a:spAutoFit/>
           </a:bodyPr>
           <a:lstStyle/>
@@ -18453,7 +18691,7 @@
           <a:noFill/>
         </p:spPr>
         <p:txBody>
-          <a:bodyPr wrap="square" lIns="0" rIns="0" tIns="0" bIns="0" anchor="t">
+          <a:bodyPr wrap="square" lIns="0" tIns="0" rIns="0" bIns="0" anchor="t">
             <a:spAutoFit/>
           </a:bodyPr>
           <a:lstStyle/>
@@ -18514,6 +18752,7 @@
           <a:lstStyle/>
           <a:p>
             <a:pPr algn="ctr"/>
+            <a:endParaRPr/>
           </a:p>
         </p:txBody>
       </p:sp>
@@ -18560,6 +18799,7 @@
           <a:lstStyle/>
           <a:p>
             <a:pPr algn="ctr"/>
+            <a:endParaRPr/>
           </a:p>
         </p:txBody>
       </p:sp>
@@ -18580,7 +18820,7 @@
           <a:noFill/>
         </p:spPr>
         <p:txBody>
-          <a:bodyPr wrap="square" lIns="0" rIns="0" tIns="0" bIns="0" anchor="t">
+          <a:bodyPr wrap="square" lIns="0" tIns="0" rIns="0" bIns="0" anchor="t">
             <a:spAutoFit/>
           </a:bodyPr>
           <a:lstStyle/>
@@ -18615,7 +18855,7 @@
           <a:noFill/>
         </p:spPr>
         <p:txBody>
-          <a:bodyPr wrap="square" lIns="0" rIns="0" tIns="0" bIns="0" anchor="t">
+          <a:bodyPr wrap="square" lIns="0" tIns="0" rIns="0" bIns="0" anchor="t">
             <a:spAutoFit/>
           </a:bodyPr>
           <a:lstStyle/>
@@ -18650,7 +18890,7 @@
           <a:noFill/>
         </p:spPr>
         <p:txBody>
-          <a:bodyPr wrap="square" lIns="0" rIns="0" tIns="0" bIns="0" anchor="t">
+          <a:bodyPr wrap="square" lIns="0" tIns="0" rIns="0" bIns="0" anchor="t">
             <a:spAutoFit/>
           </a:bodyPr>
           <a:lstStyle/>
@@ -18711,6 +18951,7 @@
           <a:lstStyle/>
           <a:p>
             <a:pPr algn="ctr"/>
+            <a:endParaRPr/>
           </a:p>
         </p:txBody>
       </p:sp>
@@ -18757,6 +18998,7 @@
           <a:lstStyle/>
           <a:p>
             <a:pPr algn="ctr"/>
+            <a:endParaRPr/>
           </a:p>
         </p:txBody>
       </p:sp>
@@ -18777,7 +19019,7 @@
           <a:noFill/>
         </p:spPr>
         <p:txBody>
-          <a:bodyPr wrap="square" lIns="0" rIns="0" tIns="0" bIns="0" anchor="t">
+          <a:bodyPr wrap="square" lIns="0" tIns="0" rIns="0" bIns="0" anchor="t">
             <a:spAutoFit/>
           </a:bodyPr>
           <a:lstStyle/>
@@ -18812,7 +19054,7 @@
           <a:noFill/>
         </p:spPr>
         <p:txBody>
-          <a:bodyPr wrap="square" lIns="0" rIns="0" tIns="0" bIns="0" anchor="t">
+          <a:bodyPr wrap="square" lIns="0" tIns="0" rIns="0" bIns="0" anchor="t">
             <a:spAutoFit/>
           </a:bodyPr>
           <a:lstStyle/>
@@ -18847,7 +19089,7 @@
           <a:noFill/>
         </p:spPr>
         <p:txBody>
-          <a:bodyPr wrap="square" lIns="0" rIns="0" tIns="0" bIns="0" anchor="t">
+          <a:bodyPr wrap="square" lIns="0" tIns="0" rIns="0" bIns="0" anchor="t">
             <a:spAutoFit/>
           </a:bodyPr>
           <a:lstStyle/>
@@ -18908,6 +19150,7 @@
           <a:lstStyle/>
           <a:p>
             <a:pPr algn="ctr"/>
+            <a:endParaRPr/>
           </a:p>
         </p:txBody>
       </p:sp>
@@ -18954,6 +19197,7 @@
           <a:lstStyle/>
           <a:p>
             <a:pPr algn="ctr"/>
+            <a:endParaRPr/>
           </a:p>
         </p:txBody>
       </p:sp>
@@ -18974,7 +19218,7 @@
           <a:noFill/>
         </p:spPr>
         <p:txBody>
-          <a:bodyPr wrap="square" lIns="0" rIns="0" tIns="0" bIns="0" anchor="t">
+          <a:bodyPr wrap="square" lIns="0" tIns="0" rIns="0" bIns="0" anchor="t">
             <a:spAutoFit/>
           </a:bodyPr>
           <a:lstStyle/>
@@ -19009,7 +19253,7 @@
           <a:noFill/>
         </p:spPr>
         <p:txBody>
-          <a:bodyPr wrap="square" lIns="0" rIns="0" tIns="0" bIns="0" anchor="t">
+          <a:bodyPr wrap="square" lIns="0" tIns="0" rIns="0" bIns="0" anchor="t">
             <a:spAutoFit/>
           </a:bodyPr>
           <a:lstStyle/>
@@ -19044,7 +19288,7 @@
           <a:noFill/>
         </p:spPr>
         <p:txBody>
-          <a:bodyPr wrap="square" lIns="0" rIns="0" tIns="0" bIns="0" anchor="t">
+          <a:bodyPr wrap="square" lIns="0" tIns="0" rIns="0" bIns="0" anchor="t">
             <a:spAutoFit/>
           </a:bodyPr>
           <a:lstStyle/>
@@ -19105,6 +19349,7 @@
           <a:lstStyle/>
           <a:p>
             <a:pPr algn="ctr"/>
+            <a:endParaRPr/>
           </a:p>
         </p:txBody>
       </p:sp>
@@ -19151,6 +19396,7 @@
           <a:lstStyle/>
           <a:p>
             <a:pPr algn="ctr"/>
+            <a:endParaRPr/>
           </a:p>
         </p:txBody>
       </p:sp>
@@ -19171,7 +19417,7 @@
           <a:noFill/>
         </p:spPr>
         <p:txBody>
-          <a:bodyPr wrap="square" lIns="0" rIns="0" tIns="0" bIns="0" anchor="t">
+          <a:bodyPr wrap="square" lIns="0" tIns="0" rIns="0" bIns="0" anchor="t">
             <a:spAutoFit/>
           </a:bodyPr>
           <a:lstStyle/>
@@ -19206,7 +19452,7 @@
           <a:noFill/>
         </p:spPr>
         <p:txBody>
-          <a:bodyPr wrap="square" lIns="0" rIns="0" tIns="0" bIns="0" anchor="t">
+          <a:bodyPr wrap="square" lIns="0" tIns="0" rIns="0" bIns="0" anchor="t">
             <a:spAutoFit/>
           </a:bodyPr>
           <a:lstStyle/>
@@ -19241,7 +19487,7 @@
           <a:noFill/>
         </p:spPr>
         <p:txBody>
-          <a:bodyPr wrap="square" lIns="0" rIns="0" tIns="0" bIns="0" anchor="t">
+          <a:bodyPr wrap="square" lIns="0" tIns="0" rIns="0" bIns="0" anchor="t">
             <a:spAutoFit/>
           </a:bodyPr>
           <a:lstStyle/>
@@ -19302,6 +19548,7 @@
           <a:lstStyle/>
           <a:p>
             <a:pPr algn="ctr"/>
+            <a:endParaRPr/>
           </a:p>
         </p:txBody>
       </p:sp>
@@ -19348,6 +19595,7 @@
           <a:lstStyle/>
           <a:p>
             <a:pPr algn="ctr"/>
+            <a:endParaRPr/>
           </a:p>
         </p:txBody>
       </p:sp>
@@ -19368,7 +19616,7 @@
           <a:noFill/>
         </p:spPr>
         <p:txBody>
-          <a:bodyPr wrap="square" lIns="0" rIns="0" tIns="0" bIns="0" anchor="t">
+          <a:bodyPr wrap="square" lIns="0" tIns="0" rIns="0" bIns="0" anchor="t">
             <a:spAutoFit/>
           </a:bodyPr>
           <a:lstStyle/>
@@ -19403,7 +19651,7 @@
           <a:noFill/>
         </p:spPr>
         <p:txBody>
-          <a:bodyPr wrap="square" lIns="0" rIns="0" tIns="0" bIns="0" anchor="t">
+          <a:bodyPr wrap="square" lIns="0" tIns="0" rIns="0" bIns="0" anchor="t">
             <a:spAutoFit/>
           </a:bodyPr>
           <a:lstStyle/>
@@ -19438,7 +19686,7 @@
           <a:noFill/>
         </p:spPr>
         <p:txBody>
-          <a:bodyPr wrap="square" lIns="0" rIns="0" tIns="0" bIns="0" anchor="t">
+          <a:bodyPr wrap="square" lIns="0" tIns="0" rIns="0" bIns="0" anchor="t">
             <a:spAutoFit/>
           </a:bodyPr>
           <a:lstStyle/>
@@ -19499,6 +19747,7 @@
           <a:lstStyle/>
           <a:p>
             <a:pPr algn="ctr"/>
+            <a:endParaRPr/>
           </a:p>
         </p:txBody>
       </p:sp>
@@ -19545,6 +19794,7 @@
           <a:lstStyle/>
           <a:p>
             <a:pPr algn="ctr"/>
+            <a:endParaRPr/>
           </a:p>
         </p:txBody>
       </p:sp>
@@ -19565,7 +19815,7 @@
           <a:noFill/>
         </p:spPr>
         <p:txBody>
-          <a:bodyPr wrap="square" lIns="0" rIns="0" tIns="0" bIns="0" anchor="t">
+          <a:bodyPr wrap="square" lIns="0" tIns="0" rIns="0" bIns="0" anchor="t">
             <a:spAutoFit/>
           </a:bodyPr>
           <a:lstStyle/>
@@ -19600,7 +19850,7 @@
           <a:noFill/>
         </p:spPr>
         <p:txBody>
-          <a:bodyPr wrap="square" lIns="0" rIns="0" tIns="0" bIns="0" anchor="t">
+          <a:bodyPr wrap="square" lIns="0" tIns="0" rIns="0" bIns="0" anchor="t">
             <a:spAutoFit/>
           </a:bodyPr>
           <a:lstStyle/>
@@ -19635,7 +19885,7 @@
           <a:noFill/>
         </p:spPr>
         <p:txBody>
-          <a:bodyPr wrap="square" lIns="0" rIns="0" tIns="0" bIns="0" anchor="t">
+          <a:bodyPr wrap="square" lIns="0" tIns="0" rIns="0" bIns="0" anchor="t">
             <a:spAutoFit/>
           </a:bodyPr>
           <a:lstStyle/>
@@ -19696,6 +19946,7 @@
           <a:lstStyle/>
           <a:p>
             <a:pPr algn="ctr"/>
+            <a:endParaRPr/>
           </a:p>
         </p:txBody>
       </p:sp>
@@ -19742,6 +19993,7 @@
           <a:lstStyle/>
           <a:p>
             <a:pPr algn="ctr"/>
+            <a:endParaRPr/>
           </a:p>
         </p:txBody>
       </p:sp>
@@ -19762,7 +20014,7 @@
           <a:noFill/>
         </p:spPr>
         <p:txBody>
-          <a:bodyPr wrap="square" lIns="0" rIns="0" tIns="0" bIns="0" anchor="t">
+          <a:bodyPr wrap="square" lIns="0" tIns="0" rIns="0" bIns="0" anchor="t">
             <a:spAutoFit/>
           </a:bodyPr>
           <a:lstStyle/>
@@ -19797,7 +20049,7 @@
           <a:noFill/>
         </p:spPr>
         <p:txBody>
-          <a:bodyPr wrap="square" lIns="0" rIns="0" tIns="0" bIns="0" anchor="t">
+          <a:bodyPr wrap="square" lIns="0" tIns="0" rIns="0" bIns="0" anchor="t">
             <a:spAutoFit/>
           </a:bodyPr>
           <a:lstStyle/>
@@ -19832,7 +20084,7 @@
           <a:noFill/>
         </p:spPr>
         <p:txBody>
-          <a:bodyPr wrap="square" lIns="0" rIns="0" tIns="0" bIns="0" anchor="t">
+          <a:bodyPr wrap="square" lIns="0" tIns="0" rIns="0" bIns="0" anchor="t">
             <a:spAutoFit/>
           </a:bodyPr>
           <a:lstStyle/>
@@ -19859,7 +20111,7 @@
 </file>
 
 <file path=ppt/slides/slide20.xml><?xml version="1.0" encoding="utf-8"?>
-<p:sld xmlns:a="http://schemas.openxmlformats.org/drawingml/2006/main" xmlns:p="http://schemas.openxmlformats.org/presentationml/2006/main" xmlns:r="http://schemas.openxmlformats.org/officeDocument/2006/relationships">
+<p:sld xmlns:a="http://schemas.openxmlformats.org/drawingml/2006/main" xmlns:r="http://schemas.openxmlformats.org/officeDocument/2006/relationships" xmlns:p="http://schemas.openxmlformats.org/presentationml/2006/main">
   <p:cSld>
     <p:spTree>
       <p:nvGrpSpPr>
@@ -19867,7 +20119,14 @@
         <p:cNvGrpSpPr/>
         <p:nvPr/>
       </p:nvGrpSpPr>
-      <p:grpSpPr/>
+      <p:grpSpPr>
+        <a:xfrm>
+          <a:off x="0" y="0"/>
+          <a:ext cx="0" cy="0"/>
+          <a:chOff x="0" y="0"/>
+          <a:chExt cx="0" cy="0"/>
+        </a:xfrm>
+      </p:grpSpPr>
       <p:sp>
         <p:nvSpPr>
           <p:cNvPr id="2" name="Rectangle 1"/>
@@ -19909,6 +20168,7 @@
           <a:lstStyle/>
           <a:p>
             <a:pPr algn="ctr"/>
+            <a:endParaRPr/>
           </a:p>
         </p:txBody>
       </p:sp>
@@ -19929,7 +20189,7 @@
           <a:noFill/>
         </p:spPr>
         <p:txBody>
-          <a:bodyPr wrap="square" lIns="0" rIns="0" tIns="0" bIns="0" anchor="t">
+          <a:bodyPr wrap="square" lIns="0" tIns="0" rIns="0" bIns="0" anchor="t">
             <a:spAutoFit/>
           </a:bodyPr>
           <a:lstStyle/>
@@ -19964,7 +20224,7 @@
           <a:noFill/>
         </p:spPr>
         <p:txBody>
-          <a:bodyPr wrap="square" lIns="0" rIns="0" tIns="0" bIns="0" anchor="t">
+          <a:bodyPr wrap="square" lIns="0" tIns="0" rIns="0" bIns="0" anchor="t">
             <a:spAutoFit/>
           </a:bodyPr>
           <a:lstStyle/>
@@ -20023,6 +20283,7 @@
           <a:lstStyle/>
           <a:p>
             <a:pPr algn="ctr"/>
+            <a:endParaRPr/>
           </a:p>
         </p:txBody>
       </p:sp>
@@ -20043,7 +20304,7 @@
           <a:noFill/>
         </p:spPr>
         <p:txBody>
-          <a:bodyPr wrap="square" lIns="0" rIns="0" tIns="0" bIns="0" anchor="t">
+          <a:bodyPr wrap="square" lIns="0" tIns="0" rIns="0" bIns="0" anchor="t">
             <a:spAutoFit/>
           </a:bodyPr>
           <a:lstStyle/>
@@ -20104,6 +20365,7 @@
           <a:lstStyle/>
           <a:p>
             <a:pPr algn="ctr"/>
+            <a:endParaRPr/>
           </a:p>
         </p:txBody>
       </p:sp>
@@ -20150,6 +20412,7 @@
           <a:lstStyle/>
           <a:p>
             <a:pPr algn="ctr"/>
+            <a:endParaRPr/>
           </a:p>
         </p:txBody>
       </p:sp>
@@ -20196,6 +20459,7 @@
           <a:lstStyle/>
           <a:p>
             <a:pPr algn="ctr"/>
+            <a:endParaRPr/>
           </a:p>
         </p:txBody>
       </p:sp>
@@ -20216,7 +20480,7 @@
           <a:noFill/>
         </p:spPr>
         <p:txBody>
-          <a:bodyPr wrap="square" lIns="0" rIns="0" tIns="0" bIns="0" anchor="t">
+          <a:bodyPr wrap="square" lIns="0" tIns="0" rIns="0" bIns="0" anchor="t">
             <a:spAutoFit/>
           </a:bodyPr>
           <a:lstStyle/>
@@ -20251,7 +20515,7 @@
           <a:noFill/>
         </p:spPr>
         <p:txBody>
-          <a:bodyPr wrap="square" lIns="0" rIns="0" tIns="0" bIns="0" anchor="t">
+          <a:bodyPr wrap="square" lIns="0" tIns="0" rIns="0" bIns="0" anchor="t">
             <a:spAutoFit/>
           </a:bodyPr>
           <a:lstStyle/>
@@ -20286,7 +20550,7 @@
           <a:noFill/>
         </p:spPr>
         <p:txBody>
-          <a:bodyPr wrap="square" lIns="0" rIns="0" tIns="0" bIns="0" anchor="t">
+          <a:bodyPr wrap="square" lIns="0" tIns="0" rIns="0" bIns="0" anchor="t">
             <a:spAutoFit/>
           </a:bodyPr>
           <a:lstStyle/>
@@ -20351,6 +20615,7 @@
           <a:lstStyle/>
           <a:p>
             <a:pPr algn="ctr"/>
+            <a:endParaRPr/>
           </a:p>
         </p:txBody>
       </p:sp>
@@ -20397,6 +20662,7 @@
           <a:lstStyle/>
           <a:p>
             <a:pPr algn="ctr"/>
+            <a:endParaRPr/>
           </a:p>
         </p:txBody>
       </p:sp>
@@ -20443,6 +20709,7 @@
           <a:lstStyle/>
           <a:p>
             <a:pPr algn="ctr"/>
+            <a:endParaRPr/>
           </a:p>
         </p:txBody>
       </p:sp>
@@ -20463,7 +20730,7 @@
           <a:noFill/>
         </p:spPr>
         <p:txBody>
-          <a:bodyPr wrap="square" lIns="0" rIns="0" tIns="0" bIns="0" anchor="t">
+          <a:bodyPr wrap="square" lIns="0" tIns="0" rIns="0" bIns="0" anchor="t">
             <a:spAutoFit/>
           </a:bodyPr>
           <a:lstStyle/>
@@ -20498,7 +20765,7 @@
           <a:noFill/>
         </p:spPr>
         <p:txBody>
-          <a:bodyPr wrap="square" lIns="0" rIns="0" tIns="0" bIns="0" anchor="t">
+          <a:bodyPr wrap="square" lIns="0" tIns="0" rIns="0" bIns="0" anchor="t">
             <a:spAutoFit/>
           </a:bodyPr>
           <a:lstStyle/>
@@ -20533,7 +20800,7 @@
           <a:noFill/>
         </p:spPr>
         <p:txBody>
-          <a:bodyPr wrap="square" lIns="0" rIns="0" tIns="0" bIns="0" anchor="t">
+          <a:bodyPr wrap="square" lIns="0" tIns="0" rIns="0" bIns="0" anchor="t">
             <a:spAutoFit/>
           </a:bodyPr>
           <a:lstStyle/>
@@ -20598,6 +20865,7 @@
           <a:lstStyle/>
           <a:p>
             <a:pPr algn="ctr"/>
+            <a:endParaRPr/>
           </a:p>
         </p:txBody>
       </p:sp>
@@ -20644,6 +20912,7 @@
           <a:lstStyle/>
           <a:p>
             <a:pPr algn="ctr"/>
+            <a:endParaRPr/>
           </a:p>
         </p:txBody>
       </p:sp>
@@ -20690,6 +20959,7 @@
           <a:lstStyle/>
           <a:p>
             <a:pPr algn="ctr"/>
+            <a:endParaRPr/>
           </a:p>
         </p:txBody>
       </p:sp>
@@ -20710,7 +20980,7 @@
           <a:noFill/>
         </p:spPr>
         <p:txBody>
-          <a:bodyPr wrap="square" lIns="0" rIns="0" tIns="0" bIns="0" anchor="t">
+          <a:bodyPr wrap="square" lIns="0" tIns="0" rIns="0" bIns="0" anchor="t">
             <a:spAutoFit/>
           </a:bodyPr>
           <a:lstStyle/>
@@ -20745,7 +21015,7 @@
           <a:noFill/>
         </p:spPr>
         <p:txBody>
-          <a:bodyPr wrap="square" lIns="0" rIns="0" tIns="0" bIns="0" anchor="t">
+          <a:bodyPr wrap="square" lIns="0" tIns="0" rIns="0" bIns="0" anchor="t">
             <a:spAutoFit/>
           </a:bodyPr>
           <a:lstStyle/>
@@ -20780,7 +21050,7 @@
           <a:noFill/>
         </p:spPr>
         <p:txBody>
-          <a:bodyPr wrap="square" lIns="0" rIns="0" tIns="0" bIns="0" anchor="t">
+          <a:bodyPr wrap="square" lIns="0" tIns="0" rIns="0" bIns="0" anchor="t">
             <a:spAutoFit/>
           </a:bodyPr>
           <a:lstStyle/>
@@ -20811,7 +21081,7 @@
 </file>
 
 <file path=ppt/slides/slide21.xml><?xml version="1.0" encoding="utf-8"?>
-<p:sld xmlns:a="http://schemas.openxmlformats.org/drawingml/2006/main" xmlns:p="http://schemas.openxmlformats.org/presentationml/2006/main" xmlns:r="http://schemas.openxmlformats.org/officeDocument/2006/relationships">
+<p:sld xmlns:a="http://schemas.openxmlformats.org/drawingml/2006/main" xmlns:r="http://schemas.openxmlformats.org/officeDocument/2006/relationships" xmlns:p="http://schemas.openxmlformats.org/presentationml/2006/main">
   <p:cSld>
     <p:spTree>
       <p:nvGrpSpPr>
@@ -20819,7 +21089,14 @@
         <p:cNvGrpSpPr/>
         <p:nvPr/>
       </p:nvGrpSpPr>
-      <p:grpSpPr/>
+      <p:grpSpPr>
+        <a:xfrm>
+          <a:off x="0" y="0"/>
+          <a:ext cx="0" cy="0"/>
+          <a:chOff x="0" y="0"/>
+          <a:chExt cx="0" cy="0"/>
+        </a:xfrm>
+      </p:grpSpPr>
       <p:sp>
         <p:nvSpPr>
           <p:cNvPr id="2" name="Rectangle 1"/>
@@ -20861,6 +21138,7 @@
           <a:lstStyle/>
           <a:p>
             <a:pPr algn="ctr"/>
+            <a:endParaRPr/>
           </a:p>
         </p:txBody>
       </p:sp>
@@ -20905,6 +21183,7 @@
           <a:lstStyle/>
           <a:p>
             <a:pPr algn="ctr"/>
+            <a:endParaRPr/>
           </a:p>
         </p:txBody>
       </p:sp>
@@ -20949,6 +21228,7 @@
           <a:lstStyle/>
           <a:p>
             <a:pPr algn="ctr"/>
+            <a:endParaRPr/>
           </a:p>
         </p:txBody>
       </p:sp>
@@ -20993,6 +21273,7 @@
           <a:lstStyle/>
           <a:p>
             <a:pPr algn="ctr"/>
+            <a:endParaRPr/>
           </a:p>
         </p:txBody>
       </p:sp>
@@ -21013,7 +21294,7 @@
           <a:noFill/>
         </p:spPr>
         <p:txBody>
-          <a:bodyPr wrap="square" lIns="0" rIns="0" tIns="0" bIns="0" anchor="t">
+          <a:bodyPr wrap="square" lIns="0" tIns="0" rIns="0" bIns="0" anchor="t">
             <a:spAutoFit/>
           </a:bodyPr>
           <a:lstStyle/>
@@ -21048,7 +21329,7 @@
           <a:noFill/>
         </p:spPr>
         <p:txBody>
-          <a:bodyPr wrap="square" lIns="0" rIns="0" tIns="0" bIns="0" anchor="t">
+          <a:bodyPr wrap="square" lIns="0" tIns="0" rIns="0" bIns="0" anchor="t">
             <a:spAutoFit/>
           </a:bodyPr>
           <a:lstStyle/>
@@ -21083,7 +21364,7 @@
           <a:noFill/>
         </p:spPr>
         <p:txBody>
-          <a:bodyPr wrap="square" lIns="0" rIns="0" tIns="0" bIns="0" anchor="t">
+          <a:bodyPr wrap="square" lIns="0" tIns="0" rIns="0" bIns="0" anchor="t">
             <a:spAutoFit/>
           </a:bodyPr>
           <a:lstStyle/>
@@ -21118,7 +21399,7 @@
           <a:noFill/>
         </p:spPr>
         <p:txBody>
-          <a:bodyPr wrap="square" lIns="0" rIns="0" tIns="0" bIns="0" anchor="t">
+          <a:bodyPr wrap="square" lIns="0" tIns="0" rIns="0" bIns="0" anchor="t">
             <a:spAutoFit/>
           </a:bodyPr>
           <a:lstStyle/>
@@ -21153,7 +21434,7 @@
           <a:noFill/>
         </p:spPr>
         <p:txBody>
-          <a:bodyPr wrap="square" lIns="0" rIns="0" tIns="0" bIns="0" anchor="t">
+          <a:bodyPr wrap="square" lIns="0" tIns="0" rIns="0" bIns="0" anchor="t">
             <a:spAutoFit/>
           </a:bodyPr>
           <a:lstStyle/>
@@ -21180,28 +21461,46 @@
         <p:spPr>
           <a:xfrm>
             <a:off x="822960" y="5166360"/>
-            <a:ext cx="10058400" cy="320040"/>
-          </a:xfrm>
-          <a:prstGeom prst="rect">
-            <a:avLst/>
-          </a:prstGeom>
-          <a:noFill/>
-        </p:spPr>
-        <p:txBody>
-          <a:bodyPr wrap="square" lIns="0" rIns="0" tIns="0" bIns="0" anchor="t">
+            <a:ext cx="10058400" cy="215444"/>
+          </a:xfrm>
+          <a:prstGeom prst="rect">
+            <a:avLst/>
+          </a:prstGeom>
+          <a:noFill/>
+        </p:spPr>
+        <p:txBody>
+          <a:bodyPr wrap="square" lIns="0" tIns="0" rIns="0" bIns="0" anchor="t">
             <a:spAutoFit/>
           </a:bodyPr>
           <a:lstStyle/>
           <a:p>
             <a:pPr algn="l"/>
             <a:r>
-              <a:rPr sz="1400" b="1">
+              <a:rPr sz="1400" b="1" dirty="0">
                 <a:solidFill>
                   <a:srgbClr val="F59E0B"/>
                 </a:solidFill>
                 <a:latin typeface="Calibri"/>
               </a:rPr>
-              <a:t>26 / 08 / 2026</a:t>
+              <a:t>2</a:t>
+            </a:r>
+            <a:r>
+              <a:rPr lang="en-US" sz="1400" b="1" dirty="0">
+                <a:solidFill>
+                  <a:srgbClr val="F59E0B"/>
+                </a:solidFill>
+                <a:latin typeface="Calibri"/>
+              </a:rPr>
+              <a:t>5</a:t>
+            </a:r>
+            <a:r>
+              <a:rPr sz="1400" b="1" dirty="0">
+                <a:solidFill>
+                  <a:srgbClr val="F59E0B"/>
+                </a:solidFill>
+                <a:latin typeface="Calibri"/>
+              </a:rPr>
+              <a:t> / 08 / 2026</a:t>
             </a:r>
           </a:p>
         </p:txBody>
@@ -21239,7 +21538,7 @@
 </file>
 
 <file path=ppt/slides/slide3.xml><?xml version="1.0" encoding="utf-8"?>
-<p:sld xmlns:a="http://schemas.openxmlformats.org/drawingml/2006/main" xmlns:p="http://schemas.openxmlformats.org/presentationml/2006/main" xmlns:r="http://schemas.openxmlformats.org/officeDocument/2006/relationships">
+<p:sld xmlns:a="http://schemas.openxmlformats.org/drawingml/2006/main" xmlns:r="http://schemas.openxmlformats.org/officeDocument/2006/relationships" xmlns:p="http://schemas.openxmlformats.org/presentationml/2006/main">
   <p:cSld>
     <p:spTree>
       <p:nvGrpSpPr>
@@ -21247,7 +21546,14 @@
         <p:cNvGrpSpPr/>
         <p:nvPr/>
       </p:nvGrpSpPr>
-      <p:grpSpPr/>
+      <p:grpSpPr>
+        <a:xfrm>
+          <a:off x="0" y="0"/>
+          <a:ext cx="0" cy="0"/>
+          <a:chOff x="0" y="0"/>
+          <a:chExt cx="0" cy="0"/>
+        </a:xfrm>
+      </p:grpSpPr>
       <p:sp>
         <p:nvSpPr>
           <p:cNvPr id="2" name="Rectangle 1"/>
@@ -21289,6 +21595,7 @@
           <a:lstStyle/>
           <a:p>
             <a:pPr algn="ctr"/>
+            <a:endParaRPr/>
           </a:p>
         </p:txBody>
       </p:sp>
@@ -21309,7 +21616,7 @@
           <a:noFill/>
         </p:spPr>
         <p:txBody>
-          <a:bodyPr wrap="square" lIns="0" rIns="0" tIns="0" bIns="0" anchor="t">
+          <a:bodyPr wrap="square" lIns="0" tIns="0" rIns="0" bIns="0" anchor="t">
             <a:spAutoFit/>
           </a:bodyPr>
           <a:lstStyle/>
@@ -21344,7 +21651,7 @@
           <a:noFill/>
         </p:spPr>
         <p:txBody>
-          <a:bodyPr wrap="square" lIns="0" rIns="0" tIns="0" bIns="0" anchor="t">
+          <a:bodyPr wrap="square" lIns="0" tIns="0" rIns="0" bIns="0" anchor="t">
             <a:spAutoFit/>
           </a:bodyPr>
           <a:lstStyle/>
@@ -21403,6 +21710,7 @@
           <a:lstStyle/>
           <a:p>
             <a:pPr algn="ctr"/>
+            <a:endParaRPr/>
           </a:p>
         </p:txBody>
       </p:sp>
@@ -21423,7 +21731,7 @@
           <a:noFill/>
         </p:spPr>
         <p:txBody>
-          <a:bodyPr wrap="square" lIns="0" rIns="0" tIns="0" bIns="0" anchor="t">
+          <a:bodyPr wrap="square" lIns="0" tIns="0" rIns="0" bIns="0" anchor="t">
             <a:spAutoFit/>
           </a:bodyPr>
           <a:lstStyle/>
@@ -21484,6 +21792,7 @@
           <a:lstStyle/>
           <a:p>
             <a:pPr algn="ctr"/>
+            <a:endParaRPr/>
           </a:p>
         </p:txBody>
       </p:sp>
@@ -21504,7 +21813,7 @@
           <a:noFill/>
         </p:spPr>
         <p:txBody>
-          <a:bodyPr wrap="square" lIns="0" rIns="0" tIns="0" bIns="0" anchor="t">
+          <a:bodyPr wrap="square" lIns="0" tIns="0" rIns="0" bIns="0" anchor="t">
             <a:spAutoFit/>
           </a:bodyPr>
           <a:lstStyle/>
@@ -21539,7 +21848,7 @@
           <a:noFill/>
         </p:spPr>
         <p:txBody>
-          <a:bodyPr wrap="square" lIns="0" rIns="0" tIns="0" bIns="0" anchor="t">
+          <a:bodyPr wrap="square" lIns="0" tIns="0" rIns="0" bIns="0" anchor="t">
             <a:spAutoFit/>
           </a:bodyPr>
           <a:lstStyle/>
@@ -21578,7 +21887,7 @@
           <a:noFill/>
         </p:spPr>
         <p:txBody>
-          <a:bodyPr wrap="square" lIns="0" rIns="0" tIns="0" bIns="0" anchor="t">
+          <a:bodyPr wrap="square" lIns="0" tIns="0" rIns="0" bIns="0" anchor="t">
             <a:spAutoFit/>
           </a:bodyPr>
           <a:lstStyle/>
@@ -21639,6 +21948,7 @@
           <a:lstStyle/>
           <a:p>
             <a:pPr algn="ctr"/>
+            <a:endParaRPr/>
           </a:p>
         </p:txBody>
       </p:sp>
@@ -21685,6 +21995,7 @@
           <a:lstStyle/>
           <a:p>
             <a:pPr algn="ctr"/>
+            <a:endParaRPr/>
           </a:p>
         </p:txBody>
       </p:sp>
@@ -21705,7 +22016,7 @@
           <a:noFill/>
         </p:spPr>
         <p:txBody>
-          <a:bodyPr wrap="square" lIns="0" rIns="0" tIns="0" bIns="0" anchor="t">
+          <a:bodyPr wrap="square" lIns="0" tIns="0" rIns="0" bIns="0" anchor="t">
             <a:spAutoFit/>
           </a:bodyPr>
           <a:lstStyle/>
@@ -21740,7 +22051,7 @@
           <a:noFill/>
         </p:spPr>
         <p:txBody>
-          <a:bodyPr wrap="square" lIns="0" rIns="0" tIns="0" bIns="0" anchor="t">
+          <a:bodyPr wrap="square" lIns="0" tIns="0" rIns="0" bIns="0" anchor="t">
             <a:spAutoFit/>
           </a:bodyPr>
           <a:lstStyle/>
@@ -21805,6 +22116,7 @@
           <a:lstStyle/>
           <a:p>
             <a:pPr algn="ctr"/>
+            <a:endParaRPr/>
           </a:p>
         </p:txBody>
       </p:sp>
@@ -21851,6 +22163,7 @@
           <a:lstStyle/>
           <a:p>
             <a:pPr algn="ctr"/>
+            <a:endParaRPr/>
           </a:p>
         </p:txBody>
       </p:sp>
@@ -21871,7 +22184,7 @@
           <a:noFill/>
         </p:spPr>
         <p:txBody>
-          <a:bodyPr wrap="square" lIns="0" rIns="0" tIns="0" bIns="0" anchor="t">
+          <a:bodyPr wrap="square" lIns="0" tIns="0" rIns="0" bIns="0" anchor="t">
             <a:spAutoFit/>
           </a:bodyPr>
           <a:lstStyle/>
@@ -21906,7 +22219,7 @@
           <a:noFill/>
         </p:spPr>
         <p:txBody>
-          <a:bodyPr wrap="square" lIns="0" rIns="0" tIns="0" bIns="0" anchor="t">
+          <a:bodyPr wrap="square" lIns="0" tIns="0" rIns="0" bIns="0" anchor="t">
             <a:spAutoFit/>
           </a:bodyPr>
           <a:lstStyle/>
@@ -21971,6 +22284,7 @@
           <a:lstStyle/>
           <a:p>
             <a:pPr algn="ctr"/>
+            <a:endParaRPr/>
           </a:p>
         </p:txBody>
       </p:sp>
@@ -22017,6 +22331,7 @@
           <a:lstStyle/>
           <a:p>
             <a:pPr algn="ctr"/>
+            <a:endParaRPr/>
           </a:p>
         </p:txBody>
       </p:sp>
@@ -22037,7 +22352,7 @@
           <a:noFill/>
         </p:spPr>
         <p:txBody>
-          <a:bodyPr wrap="square" lIns="0" rIns="0" tIns="0" bIns="0" anchor="t">
+          <a:bodyPr wrap="square" lIns="0" tIns="0" rIns="0" bIns="0" anchor="t">
             <a:spAutoFit/>
           </a:bodyPr>
           <a:lstStyle/>
@@ -22072,7 +22387,7 @@
           <a:noFill/>
         </p:spPr>
         <p:txBody>
-          <a:bodyPr wrap="square" lIns="0" rIns="0" tIns="0" bIns="0" anchor="t">
+          <a:bodyPr wrap="square" lIns="0" tIns="0" rIns="0" bIns="0" anchor="t">
             <a:spAutoFit/>
           </a:bodyPr>
           <a:lstStyle/>
@@ -22137,6 +22452,7 @@
           <a:lstStyle/>
           <a:p>
             <a:pPr algn="ctr"/>
+            <a:endParaRPr/>
           </a:p>
         </p:txBody>
       </p:sp>
@@ -22183,6 +22499,7 @@
           <a:lstStyle/>
           <a:p>
             <a:pPr algn="ctr"/>
+            <a:endParaRPr/>
           </a:p>
         </p:txBody>
       </p:sp>
@@ -22203,7 +22520,7 @@
           <a:noFill/>
         </p:spPr>
         <p:txBody>
-          <a:bodyPr wrap="square" lIns="0" rIns="0" tIns="0" bIns="0" anchor="t">
+          <a:bodyPr wrap="square" lIns="0" tIns="0" rIns="0" bIns="0" anchor="t">
             <a:spAutoFit/>
           </a:bodyPr>
           <a:lstStyle/>
@@ -22238,7 +22555,7 @@
           <a:noFill/>
         </p:spPr>
         <p:txBody>
-          <a:bodyPr wrap="square" lIns="0" rIns="0" tIns="0" bIns="0" anchor="t">
+          <a:bodyPr wrap="square" lIns="0" tIns="0" rIns="0" bIns="0" anchor="t">
             <a:spAutoFit/>
           </a:bodyPr>
           <a:lstStyle/>
@@ -22269,7 +22586,7 @@
 </file>
 
 <file path=ppt/slides/slide4.xml><?xml version="1.0" encoding="utf-8"?>
-<p:sld xmlns:a="http://schemas.openxmlformats.org/drawingml/2006/main" xmlns:p="http://schemas.openxmlformats.org/presentationml/2006/main" xmlns:r="http://schemas.openxmlformats.org/officeDocument/2006/relationships">
+<p:sld xmlns:a="http://schemas.openxmlformats.org/drawingml/2006/main" xmlns:r="http://schemas.openxmlformats.org/officeDocument/2006/relationships" xmlns:p="http://schemas.openxmlformats.org/presentationml/2006/main">
   <p:cSld>
     <p:spTree>
       <p:nvGrpSpPr>
@@ -22277,7 +22594,14 @@
         <p:cNvGrpSpPr/>
         <p:nvPr/>
       </p:nvGrpSpPr>
-      <p:grpSpPr/>
+      <p:grpSpPr>
+        <a:xfrm>
+          <a:off x="0" y="0"/>
+          <a:ext cx="0" cy="0"/>
+          <a:chOff x="0" y="0"/>
+          <a:chExt cx="0" cy="0"/>
+        </a:xfrm>
+      </p:grpSpPr>
       <p:sp>
         <p:nvSpPr>
           <p:cNvPr id="2" name="Rectangle 1"/>
@@ -22319,6 +22643,7 @@
           <a:lstStyle/>
           <a:p>
             <a:pPr algn="ctr"/>
+            <a:endParaRPr/>
           </a:p>
         </p:txBody>
       </p:sp>
@@ -22339,7 +22664,7 @@
           <a:noFill/>
         </p:spPr>
         <p:txBody>
-          <a:bodyPr wrap="square" lIns="0" rIns="0" tIns="0" bIns="0" anchor="t">
+          <a:bodyPr wrap="square" lIns="0" tIns="0" rIns="0" bIns="0" anchor="t">
             <a:spAutoFit/>
           </a:bodyPr>
           <a:lstStyle/>
@@ -22374,7 +22699,7 @@
           <a:noFill/>
         </p:spPr>
         <p:txBody>
-          <a:bodyPr wrap="square" lIns="0" rIns="0" tIns="0" bIns="0" anchor="t">
+          <a:bodyPr wrap="square" lIns="0" tIns="0" rIns="0" bIns="0" anchor="t">
             <a:spAutoFit/>
           </a:bodyPr>
           <a:lstStyle/>
@@ -22433,6 +22758,7 @@
           <a:lstStyle/>
           <a:p>
             <a:pPr algn="ctr"/>
+            <a:endParaRPr/>
           </a:p>
         </p:txBody>
       </p:sp>
@@ -22453,7 +22779,7 @@
           <a:noFill/>
         </p:spPr>
         <p:txBody>
-          <a:bodyPr wrap="square" lIns="0" rIns="0" tIns="0" bIns="0" anchor="t">
+          <a:bodyPr wrap="square" lIns="0" tIns="0" rIns="0" bIns="0" anchor="t">
             <a:spAutoFit/>
           </a:bodyPr>
           <a:lstStyle/>
@@ -22514,6 +22840,7 @@
           <a:lstStyle/>
           <a:p>
             <a:pPr algn="ctr"/>
+            <a:endParaRPr/>
           </a:p>
         </p:txBody>
       </p:sp>
@@ -22558,6 +22885,7 @@
           <a:lstStyle/>
           <a:p>
             <a:pPr algn="ctr"/>
+            <a:endParaRPr/>
           </a:p>
         </p:txBody>
       </p:sp>
@@ -22578,7 +22906,7 @@
           <a:noFill/>
         </p:spPr>
         <p:txBody>
-          <a:bodyPr wrap="square" lIns="0" rIns="0" tIns="0" bIns="0" anchor="t">
+          <a:bodyPr wrap="square" lIns="0" tIns="0" rIns="0" bIns="0" anchor="t">
             <a:spAutoFit/>
           </a:bodyPr>
           <a:lstStyle/>
@@ -22613,7 +22941,7 @@
           <a:noFill/>
         </p:spPr>
         <p:txBody>
-          <a:bodyPr wrap="square" lIns="0" rIns="0" tIns="0" bIns="0" anchor="t">
+          <a:bodyPr wrap="square" lIns="0" tIns="0" rIns="0" bIns="0" anchor="t">
             <a:spAutoFit/>
           </a:bodyPr>
           <a:lstStyle/>
@@ -22678,6 +23006,7 @@
           <a:lstStyle/>
           <a:p>
             <a:pPr algn="ctr"/>
+            <a:endParaRPr/>
           </a:p>
         </p:txBody>
       </p:sp>
@@ -22722,6 +23051,7 @@
           <a:lstStyle/>
           <a:p>
             <a:pPr algn="ctr"/>
+            <a:endParaRPr/>
           </a:p>
         </p:txBody>
       </p:sp>
@@ -22742,7 +23072,7 @@
           <a:noFill/>
         </p:spPr>
         <p:txBody>
-          <a:bodyPr wrap="square" lIns="0" rIns="0" tIns="0" bIns="0" anchor="t">
+          <a:bodyPr wrap="square" lIns="0" tIns="0" rIns="0" bIns="0" anchor="t">
             <a:spAutoFit/>
           </a:bodyPr>
           <a:lstStyle/>
@@ -22777,7 +23107,7 @@
           <a:noFill/>
         </p:spPr>
         <p:txBody>
-          <a:bodyPr wrap="square" lIns="0" rIns="0" tIns="0" bIns="0" anchor="t">
+          <a:bodyPr wrap="square" lIns="0" tIns="0" rIns="0" bIns="0" anchor="t">
             <a:spAutoFit/>
           </a:bodyPr>
           <a:lstStyle/>
@@ -22842,6 +23172,7 @@
           <a:lstStyle/>
           <a:p>
             <a:pPr algn="ctr"/>
+            <a:endParaRPr/>
           </a:p>
         </p:txBody>
       </p:sp>
@@ -22886,6 +23217,7 @@
           <a:lstStyle/>
           <a:p>
             <a:pPr algn="ctr"/>
+            <a:endParaRPr/>
           </a:p>
         </p:txBody>
       </p:sp>
@@ -22906,7 +23238,7 @@
           <a:noFill/>
         </p:spPr>
         <p:txBody>
-          <a:bodyPr wrap="square" lIns="0" rIns="0" tIns="0" bIns="0" anchor="t">
+          <a:bodyPr wrap="square" lIns="0" tIns="0" rIns="0" bIns="0" anchor="t">
             <a:spAutoFit/>
           </a:bodyPr>
           <a:lstStyle/>
@@ -22941,7 +23273,7 @@
           <a:noFill/>
         </p:spPr>
         <p:txBody>
-          <a:bodyPr wrap="square" lIns="0" rIns="0" tIns="0" bIns="0" anchor="t">
+          <a:bodyPr wrap="square" lIns="0" tIns="0" rIns="0" bIns="0" anchor="t">
             <a:spAutoFit/>
           </a:bodyPr>
           <a:lstStyle/>
@@ -23006,6 +23338,7 @@
           <a:lstStyle/>
           <a:p>
             <a:pPr algn="ctr"/>
+            <a:endParaRPr/>
           </a:p>
         </p:txBody>
       </p:sp>
@@ -23050,6 +23383,7 @@
           <a:lstStyle/>
           <a:p>
             <a:pPr algn="ctr"/>
+            <a:endParaRPr/>
           </a:p>
         </p:txBody>
       </p:sp>
@@ -23070,7 +23404,7 @@
           <a:noFill/>
         </p:spPr>
         <p:txBody>
-          <a:bodyPr wrap="square" lIns="0" rIns="0" tIns="0" bIns="0" anchor="t">
+          <a:bodyPr wrap="square" lIns="0" tIns="0" rIns="0" bIns="0" anchor="t">
             <a:spAutoFit/>
           </a:bodyPr>
           <a:lstStyle/>
@@ -23105,7 +23439,7 @@
           <a:noFill/>
         </p:spPr>
         <p:txBody>
-          <a:bodyPr wrap="square" lIns="0" rIns="0" tIns="0" bIns="0" anchor="t">
+          <a:bodyPr wrap="square" lIns="0" tIns="0" rIns="0" bIns="0" anchor="t">
             <a:spAutoFit/>
           </a:bodyPr>
           <a:lstStyle/>
@@ -23170,6 +23504,7 @@
           <a:lstStyle/>
           <a:p>
             <a:pPr algn="ctr"/>
+            <a:endParaRPr/>
           </a:p>
         </p:txBody>
       </p:sp>
@@ -23214,6 +23549,7 @@
           <a:lstStyle/>
           <a:p>
             <a:pPr algn="ctr"/>
+            <a:endParaRPr/>
           </a:p>
         </p:txBody>
       </p:sp>
@@ -23234,7 +23570,7 @@
           <a:noFill/>
         </p:spPr>
         <p:txBody>
-          <a:bodyPr wrap="square" lIns="0" rIns="0" tIns="0" bIns="0" anchor="t">
+          <a:bodyPr wrap="square" lIns="0" tIns="0" rIns="0" bIns="0" anchor="t">
             <a:spAutoFit/>
           </a:bodyPr>
           <a:lstStyle/>
@@ -23269,7 +23605,7 @@
           <a:noFill/>
         </p:spPr>
         <p:txBody>
-          <a:bodyPr wrap="square" lIns="0" rIns="0" tIns="0" bIns="0" anchor="t">
+          <a:bodyPr wrap="square" lIns="0" tIns="0" rIns="0" bIns="0" anchor="t">
             <a:spAutoFit/>
           </a:bodyPr>
           <a:lstStyle/>
@@ -23334,6 +23670,7 @@
           <a:lstStyle/>
           <a:p>
             <a:pPr algn="ctr"/>
+            <a:endParaRPr/>
           </a:p>
         </p:txBody>
       </p:sp>
@@ -23378,6 +23715,7 @@
           <a:lstStyle/>
           <a:p>
             <a:pPr algn="ctr"/>
+            <a:endParaRPr/>
           </a:p>
         </p:txBody>
       </p:sp>
@@ -23398,7 +23736,7 @@
           <a:noFill/>
         </p:spPr>
         <p:txBody>
-          <a:bodyPr wrap="square" lIns="0" rIns="0" tIns="0" bIns="0" anchor="t">
+          <a:bodyPr wrap="square" lIns="0" tIns="0" rIns="0" bIns="0" anchor="t">
             <a:spAutoFit/>
           </a:bodyPr>
           <a:lstStyle/>
@@ -23433,7 +23771,7 @@
           <a:noFill/>
         </p:spPr>
         <p:txBody>
-          <a:bodyPr wrap="square" lIns="0" rIns="0" tIns="0" bIns="0" anchor="t">
+          <a:bodyPr wrap="square" lIns="0" tIns="0" rIns="0" bIns="0" anchor="t">
             <a:spAutoFit/>
           </a:bodyPr>
           <a:lstStyle/>
@@ -23464,7 +23802,7 @@
 </file>
 
 <file path=ppt/slides/slide5.xml><?xml version="1.0" encoding="utf-8"?>
-<p:sld xmlns:a="http://schemas.openxmlformats.org/drawingml/2006/main" xmlns:p="http://schemas.openxmlformats.org/presentationml/2006/main" xmlns:r="http://schemas.openxmlformats.org/officeDocument/2006/relationships">
+<p:sld xmlns:a="http://schemas.openxmlformats.org/drawingml/2006/main" xmlns:r="http://schemas.openxmlformats.org/officeDocument/2006/relationships" xmlns:p="http://schemas.openxmlformats.org/presentationml/2006/main">
   <p:cSld>
     <p:spTree>
       <p:nvGrpSpPr>
@@ -23472,7 +23810,14 @@
         <p:cNvGrpSpPr/>
         <p:nvPr/>
       </p:nvGrpSpPr>
-      <p:grpSpPr/>
+      <p:grpSpPr>
+        <a:xfrm>
+          <a:off x="0" y="0"/>
+          <a:ext cx="0" cy="0"/>
+          <a:chOff x="0" y="0"/>
+          <a:chExt cx="0" cy="0"/>
+        </a:xfrm>
+      </p:grpSpPr>
       <p:sp>
         <p:nvSpPr>
           <p:cNvPr id="2" name="Rectangle 1"/>
@@ -23514,6 +23859,7 @@
           <a:lstStyle/>
           <a:p>
             <a:pPr algn="ctr"/>
+            <a:endParaRPr dirty="0"/>
           </a:p>
         </p:txBody>
       </p:sp>
@@ -23534,7 +23880,7 @@
           <a:noFill/>
         </p:spPr>
         <p:txBody>
-          <a:bodyPr wrap="square" lIns="0" rIns="0" tIns="0" bIns="0" anchor="t">
+          <a:bodyPr wrap="square" lIns="0" tIns="0" rIns="0" bIns="0" anchor="t">
             <a:spAutoFit/>
           </a:bodyPr>
           <a:lstStyle/>
@@ -23569,7 +23915,7 @@
           <a:noFill/>
         </p:spPr>
         <p:txBody>
-          <a:bodyPr wrap="square" lIns="0" rIns="0" tIns="0" bIns="0" anchor="t">
+          <a:bodyPr wrap="square" lIns="0" tIns="0" rIns="0" bIns="0" anchor="t">
             <a:spAutoFit/>
           </a:bodyPr>
           <a:lstStyle/>
@@ -23628,6 +23974,7 @@
           <a:lstStyle/>
           <a:p>
             <a:pPr algn="ctr"/>
+            <a:endParaRPr/>
           </a:p>
         </p:txBody>
       </p:sp>
@@ -23648,7 +23995,7 @@
           <a:noFill/>
         </p:spPr>
         <p:txBody>
-          <a:bodyPr wrap="square" lIns="0" rIns="0" tIns="0" bIns="0" anchor="t">
+          <a:bodyPr wrap="square" lIns="0" tIns="0" rIns="0" bIns="0" anchor="t">
             <a:spAutoFit/>
           </a:bodyPr>
           <a:lstStyle/>
@@ -23709,6 +24056,7 @@
           <a:lstStyle/>
           <a:p>
             <a:pPr algn="ctr"/>
+            <a:endParaRPr/>
           </a:p>
         </p:txBody>
       </p:sp>
@@ -23729,7 +24077,7 @@
           <a:noFill/>
         </p:spPr>
         <p:txBody>
-          <a:bodyPr wrap="square" lIns="0" rIns="0" tIns="0" bIns="0" anchor="t">
+          <a:bodyPr wrap="square" lIns="0" tIns="0" rIns="0" bIns="0" anchor="t">
             <a:spAutoFit/>
           </a:bodyPr>
           <a:lstStyle/>
@@ -23764,7 +24112,7 @@
           <a:noFill/>
         </p:spPr>
         <p:txBody>
-          <a:bodyPr wrap="square" lIns="0" rIns="0" tIns="0" bIns="0" anchor="t">
+          <a:bodyPr wrap="square" lIns="0" tIns="0" rIns="0" bIns="0" anchor="t">
             <a:spAutoFit/>
           </a:bodyPr>
           <a:lstStyle/>
@@ -23829,6 +24177,7 @@
           <a:lstStyle/>
           <a:p>
             <a:pPr algn="ctr"/>
+            <a:endParaRPr/>
           </a:p>
         </p:txBody>
       </p:sp>
@@ -23849,7 +24198,7 @@
           <a:noFill/>
         </p:spPr>
         <p:txBody>
-          <a:bodyPr wrap="square" lIns="0" rIns="0" tIns="0" bIns="0" anchor="t">
+          <a:bodyPr wrap="square" lIns="0" tIns="0" rIns="0" bIns="0" anchor="t">
             <a:spAutoFit/>
           </a:bodyPr>
           <a:lstStyle/>
@@ -23876,15 +24225,15 @@
         <p:spPr>
           <a:xfrm>
             <a:off x="6537960" y="1691640"/>
-            <a:ext cx="5029200" cy="1645920"/>
-          </a:xfrm>
-          <a:prstGeom prst="rect">
-            <a:avLst/>
-          </a:prstGeom>
-          <a:noFill/>
-        </p:spPr>
-        <p:txBody>
-          <a:bodyPr wrap="square" lIns="0" rIns="0" tIns="0" bIns="0" anchor="t">
+            <a:ext cx="5029200" cy="871649"/>
+          </a:xfrm>
+          <a:prstGeom prst="rect">
+            <a:avLst/>
+          </a:prstGeom>
+          <a:noFill/>
+        </p:spPr>
+        <p:txBody>
+          <a:bodyPr wrap="square" lIns="0" tIns="0" rIns="0" bIns="0" anchor="t">
             <a:spAutoFit/>
           </a:bodyPr>
           <a:lstStyle/>
@@ -23895,13 +24244,436 @@
               </a:lnSpc>
             </a:pPr>
             <a:r>
-              <a:rPr sz="1200" b="0">
+              <a:rPr sz="1200" b="0" dirty="0" err="1">
                 <a:solidFill>
                   <a:srgbClr val="475569"/>
                 </a:solidFill>
                 <a:latin typeface="Calibri"/>
               </a:rPr>
-              <a:t>Sede Central en Alajuela, con presencia regional en siete sedes y centros del país. Es una institución de financiamiento público; su aporte económico se da por la vía de la formación técnica y de la vinculación con el sector productivo de cada región.</a:t>
+              <a:t>Sede</a:t>
+            </a:r>
+            <a:r>
+              <a:rPr sz="1200" b="0" dirty="0">
+                <a:solidFill>
+                  <a:srgbClr val="475569"/>
+                </a:solidFill>
+                <a:latin typeface="Calibri"/>
+              </a:rPr>
+              <a:t> Central </a:t>
+            </a:r>
+            <a:r>
+              <a:rPr sz="1200" b="0" dirty="0" err="1">
+                <a:solidFill>
+                  <a:srgbClr val="475569"/>
+                </a:solidFill>
+                <a:latin typeface="Calibri"/>
+              </a:rPr>
+              <a:t>en</a:t>
+            </a:r>
+            <a:r>
+              <a:rPr sz="1200" b="0" dirty="0">
+                <a:solidFill>
+                  <a:srgbClr val="475569"/>
+                </a:solidFill>
+                <a:latin typeface="Calibri"/>
+              </a:rPr>
+              <a:t> Alajuela, con </a:t>
+            </a:r>
+            <a:r>
+              <a:rPr sz="1200" b="0" dirty="0" err="1">
+                <a:solidFill>
+                  <a:srgbClr val="475569"/>
+                </a:solidFill>
+                <a:latin typeface="Calibri"/>
+              </a:rPr>
+              <a:t>presencia</a:t>
+            </a:r>
+            <a:r>
+              <a:rPr sz="1200" b="0" dirty="0">
+                <a:solidFill>
+                  <a:srgbClr val="475569"/>
+                </a:solidFill>
+                <a:latin typeface="Calibri"/>
+              </a:rPr>
+              <a:t> regional </a:t>
+            </a:r>
+            <a:r>
+              <a:rPr sz="1200" b="0" dirty="0" err="1">
+                <a:solidFill>
+                  <a:srgbClr val="475569"/>
+                </a:solidFill>
+                <a:latin typeface="Calibri"/>
+              </a:rPr>
+              <a:t>en</a:t>
+            </a:r>
+            <a:r>
+              <a:rPr sz="1200" b="0" dirty="0">
+                <a:solidFill>
+                  <a:srgbClr val="475569"/>
+                </a:solidFill>
+                <a:latin typeface="Calibri"/>
+              </a:rPr>
+              <a:t> </a:t>
+            </a:r>
+            <a:r>
+              <a:rPr lang="en-US" sz="1200" b="0" dirty="0">
+                <a:solidFill>
+                  <a:srgbClr val="475569"/>
+                </a:solidFill>
+                <a:latin typeface="Calibri"/>
+              </a:rPr>
+              <a:t>5</a:t>
+            </a:r>
+            <a:r>
+              <a:rPr sz="1200" b="0" dirty="0">
+                <a:solidFill>
+                  <a:srgbClr val="475569"/>
+                </a:solidFill>
+                <a:latin typeface="Calibri"/>
+              </a:rPr>
+              <a:t> </a:t>
+            </a:r>
+            <a:r>
+              <a:rPr sz="1200" b="0" dirty="0" err="1">
+                <a:solidFill>
+                  <a:srgbClr val="475569"/>
+                </a:solidFill>
+                <a:latin typeface="Calibri"/>
+              </a:rPr>
+              <a:t>sedes</a:t>
+            </a:r>
+            <a:r>
+              <a:rPr lang="en-US" sz="1200" b="0" dirty="0">
+                <a:solidFill>
+                  <a:srgbClr val="475569"/>
+                </a:solidFill>
+                <a:latin typeface="Calibri"/>
+              </a:rPr>
+              <a:t> </a:t>
+            </a:r>
+            <a:r>
+              <a:rPr lang="en-US" sz="1200" b="0" dirty="0" err="1">
+                <a:solidFill>
+                  <a:srgbClr val="475569"/>
+                </a:solidFill>
+                <a:latin typeface="Calibri"/>
+              </a:rPr>
+              <a:t>regionales</a:t>
+            </a:r>
+            <a:r>
+              <a:rPr sz="1200" b="0" dirty="0">
+                <a:solidFill>
+                  <a:srgbClr val="475569"/>
+                </a:solidFill>
+                <a:latin typeface="Calibri"/>
+              </a:rPr>
+              <a:t> y </a:t>
+            </a:r>
+            <a:r>
+              <a:rPr sz="1200" b="0" dirty="0" err="1">
+                <a:solidFill>
+                  <a:srgbClr val="475569"/>
+                </a:solidFill>
+                <a:latin typeface="Calibri"/>
+              </a:rPr>
+              <a:t>centros</a:t>
+            </a:r>
+            <a:r>
+              <a:rPr sz="1200" b="0" dirty="0">
+                <a:solidFill>
+                  <a:srgbClr val="475569"/>
+                </a:solidFill>
+                <a:latin typeface="Calibri"/>
+              </a:rPr>
+              <a:t> del </a:t>
+            </a:r>
+            <a:r>
+              <a:rPr sz="1200" b="0" dirty="0" err="1">
+                <a:solidFill>
+                  <a:srgbClr val="475569"/>
+                </a:solidFill>
+                <a:latin typeface="Calibri"/>
+              </a:rPr>
+              <a:t>país</a:t>
+            </a:r>
+            <a:r>
+              <a:rPr sz="1200" b="0" dirty="0">
+                <a:solidFill>
+                  <a:srgbClr val="475569"/>
+                </a:solidFill>
+                <a:latin typeface="Calibri"/>
+              </a:rPr>
+              <a:t>. Es </a:t>
+            </a:r>
+            <a:r>
+              <a:rPr sz="1200" b="0" dirty="0" err="1">
+                <a:solidFill>
+                  <a:srgbClr val="475569"/>
+                </a:solidFill>
+                <a:latin typeface="Calibri"/>
+              </a:rPr>
+              <a:t>una</a:t>
+            </a:r>
+            <a:r>
+              <a:rPr sz="1200" b="0" dirty="0">
+                <a:solidFill>
+                  <a:srgbClr val="475569"/>
+                </a:solidFill>
+                <a:latin typeface="Calibri"/>
+              </a:rPr>
+              <a:t> </a:t>
+            </a:r>
+            <a:r>
+              <a:rPr sz="1200" b="0" dirty="0" err="1">
+                <a:solidFill>
+                  <a:srgbClr val="475569"/>
+                </a:solidFill>
+                <a:latin typeface="Calibri"/>
+              </a:rPr>
+              <a:t>institución</a:t>
+            </a:r>
+            <a:r>
+              <a:rPr sz="1200" b="0" dirty="0">
+                <a:solidFill>
+                  <a:srgbClr val="475569"/>
+                </a:solidFill>
+                <a:latin typeface="Calibri"/>
+              </a:rPr>
+              <a:t> de </a:t>
+            </a:r>
+            <a:r>
+              <a:rPr sz="1200" b="0" dirty="0" err="1">
+                <a:solidFill>
+                  <a:srgbClr val="475569"/>
+                </a:solidFill>
+                <a:latin typeface="Calibri"/>
+              </a:rPr>
+              <a:t>financiamiento</a:t>
+            </a:r>
+            <a:r>
+              <a:rPr sz="1200" b="0" dirty="0">
+                <a:solidFill>
+                  <a:srgbClr val="475569"/>
+                </a:solidFill>
+                <a:latin typeface="Calibri"/>
+              </a:rPr>
+              <a:t> </a:t>
+            </a:r>
+            <a:r>
+              <a:rPr sz="1200" b="0" dirty="0" err="1">
+                <a:solidFill>
+                  <a:srgbClr val="475569"/>
+                </a:solidFill>
+                <a:latin typeface="Calibri"/>
+              </a:rPr>
+              <a:t>público</a:t>
+            </a:r>
+            <a:r>
+              <a:rPr sz="1200" b="0" dirty="0">
+                <a:solidFill>
+                  <a:srgbClr val="475569"/>
+                </a:solidFill>
+                <a:latin typeface="Calibri"/>
+              </a:rPr>
+              <a:t>; </a:t>
+            </a:r>
+            <a:r>
+              <a:rPr sz="1200" b="0" dirty="0" err="1">
+                <a:solidFill>
+                  <a:srgbClr val="475569"/>
+                </a:solidFill>
+                <a:latin typeface="Calibri"/>
+              </a:rPr>
+              <a:t>su</a:t>
+            </a:r>
+            <a:r>
+              <a:rPr sz="1200" b="0" dirty="0">
+                <a:solidFill>
+                  <a:srgbClr val="475569"/>
+                </a:solidFill>
+                <a:latin typeface="Calibri"/>
+              </a:rPr>
+              <a:t> </a:t>
+            </a:r>
+            <a:r>
+              <a:rPr sz="1200" b="0" dirty="0" err="1">
+                <a:solidFill>
+                  <a:srgbClr val="475569"/>
+                </a:solidFill>
+                <a:latin typeface="Calibri"/>
+              </a:rPr>
+              <a:t>aporte</a:t>
+            </a:r>
+            <a:r>
+              <a:rPr sz="1200" b="0" dirty="0">
+                <a:solidFill>
+                  <a:srgbClr val="475569"/>
+                </a:solidFill>
+                <a:latin typeface="Calibri"/>
+              </a:rPr>
+              <a:t> </a:t>
+            </a:r>
+            <a:r>
+              <a:rPr sz="1200" b="0" dirty="0" err="1">
+                <a:solidFill>
+                  <a:srgbClr val="475569"/>
+                </a:solidFill>
+                <a:latin typeface="Calibri"/>
+              </a:rPr>
+              <a:t>económico</a:t>
+            </a:r>
+            <a:r>
+              <a:rPr sz="1200" b="0" dirty="0">
+                <a:solidFill>
+                  <a:srgbClr val="475569"/>
+                </a:solidFill>
+                <a:latin typeface="Calibri"/>
+              </a:rPr>
+              <a:t> se da </a:t>
+            </a:r>
+            <a:r>
+              <a:rPr sz="1200" b="0" dirty="0" err="1">
+                <a:solidFill>
+                  <a:srgbClr val="475569"/>
+                </a:solidFill>
+                <a:latin typeface="Calibri"/>
+              </a:rPr>
+              <a:t>por</a:t>
+            </a:r>
+            <a:r>
+              <a:rPr sz="1200" b="0" dirty="0">
+                <a:solidFill>
+                  <a:srgbClr val="475569"/>
+                </a:solidFill>
+                <a:latin typeface="Calibri"/>
+              </a:rPr>
+              <a:t> la </a:t>
+            </a:r>
+            <a:r>
+              <a:rPr sz="1200" b="0" dirty="0" err="1">
+                <a:solidFill>
+                  <a:srgbClr val="475569"/>
+                </a:solidFill>
+                <a:latin typeface="Calibri"/>
+              </a:rPr>
+              <a:t>vía</a:t>
+            </a:r>
+            <a:r>
+              <a:rPr sz="1200" b="0" dirty="0">
+                <a:solidFill>
+                  <a:srgbClr val="475569"/>
+                </a:solidFill>
+                <a:latin typeface="Calibri"/>
+              </a:rPr>
+              <a:t> de la </a:t>
+            </a:r>
+            <a:r>
+              <a:rPr sz="1200" b="0" dirty="0" err="1">
+                <a:solidFill>
+                  <a:srgbClr val="475569"/>
+                </a:solidFill>
+                <a:latin typeface="Calibri"/>
+              </a:rPr>
+              <a:t>formación</a:t>
+            </a:r>
+            <a:r>
+              <a:rPr sz="1200" b="0" dirty="0">
+                <a:solidFill>
+                  <a:srgbClr val="475569"/>
+                </a:solidFill>
+                <a:latin typeface="Calibri"/>
+              </a:rPr>
+              <a:t> </a:t>
+            </a:r>
+            <a:r>
+              <a:rPr sz="1200" b="0" dirty="0" err="1">
+                <a:solidFill>
+                  <a:srgbClr val="475569"/>
+                </a:solidFill>
+                <a:latin typeface="Calibri"/>
+              </a:rPr>
+              <a:t>técnica</a:t>
+            </a:r>
+            <a:r>
+              <a:rPr sz="1200" b="0" dirty="0">
+                <a:solidFill>
+                  <a:srgbClr val="475569"/>
+                </a:solidFill>
+                <a:latin typeface="Calibri"/>
+              </a:rPr>
+              <a:t> y de la </a:t>
+            </a:r>
+            <a:r>
+              <a:rPr sz="1200" b="0" dirty="0" err="1">
+                <a:solidFill>
+                  <a:srgbClr val="475569"/>
+                </a:solidFill>
+                <a:latin typeface="Calibri"/>
+              </a:rPr>
+              <a:t>vinculación</a:t>
+            </a:r>
+            <a:r>
+              <a:rPr sz="1200" b="0" dirty="0">
+                <a:solidFill>
+                  <a:srgbClr val="475569"/>
+                </a:solidFill>
+                <a:latin typeface="Calibri"/>
+              </a:rPr>
+              <a:t> con el sector </a:t>
+            </a:r>
+            <a:r>
+              <a:rPr sz="1200" b="0" dirty="0" err="1">
+                <a:solidFill>
+                  <a:srgbClr val="475569"/>
+                </a:solidFill>
+                <a:latin typeface="Calibri"/>
+              </a:rPr>
+              <a:t>productivo</a:t>
+            </a:r>
+            <a:r>
+              <a:rPr sz="1200" b="0" dirty="0">
+                <a:solidFill>
+                  <a:srgbClr val="475569"/>
+                </a:solidFill>
+                <a:latin typeface="Calibri"/>
+              </a:rPr>
+              <a:t> de </a:t>
+            </a:r>
+            <a:r>
+              <a:rPr sz="1200" b="0" dirty="0" err="1">
+                <a:solidFill>
+                  <a:srgbClr val="475569"/>
+                </a:solidFill>
+                <a:latin typeface="Calibri"/>
+              </a:rPr>
+              <a:t>cada</a:t>
+            </a:r>
+            <a:r>
+              <a:rPr sz="1200" b="0" dirty="0">
+                <a:solidFill>
+                  <a:srgbClr val="475569"/>
+                </a:solidFill>
+                <a:latin typeface="Calibri"/>
+              </a:rPr>
+              <a:t> </a:t>
+            </a:r>
+            <a:r>
+              <a:rPr sz="1200" b="0" dirty="0" err="1">
+                <a:solidFill>
+                  <a:srgbClr val="475569"/>
+                </a:solidFill>
+                <a:latin typeface="Calibri"/>
+              </a:rPr>
+              <a:t>región</a:t>
+            </a:r>
+            <a:r>
+              <a:rPr sz="1200" b="0" dirty="0">
+                <a:solidFill>
+                  <a:srgbClr val="475569"/>
+                </a:solidFill>
+                <a:latin typeface="Calibri"/>
+              </a:rPr>
+              <a:t>.</a:t>
             </a:r>
           </a:p>
         </p:txBody>
@@ -23914,29 +24686,47 @@
         </p:nvSpPr>
         <p:spPr>
           <a:xfrm>
-            <a:off x="365760" y="3703320"/>
-            <a:ext cx="7315200" cy="228600"/>
-          </a:xfrm>
-          <a:prstGeom prst="rect">
-            <a:avLst/>
-          </a:prstGeom>
-          <a:noFill/>
-        </p:spPr>
-        <p:txBody>
-          <a:bodyPr wrap="square" lIns="0" rIns="0" tIns="0" bIns="0" anchor="t">
+            <a:off x="3200400" y="3685032"/>
+            <a:ext cx="7315200" cy="169277"/>
+          </a:xfrm>
+          <a:prstGeom prst="rect">
+            <a:avLst/>
+          </a:prstGeom>
+          <a:noFill/>
+        </p:spPr>
+        <p:txBody>
+          <a:bodyPr wrap="square" lIns="0" tIns="0" rIns="0" bIns="0" anchor="t">
             <a:spAutoFit/>
           </a:bodyPr>
           <a:lstStyle/>
           <a:p>
             <a:pPr algn="l"/>
             <a:r>
-              <a:rPr sz="1100" b="1">
+              <a:rPr sz="1100" b="1" dirty="0">
                 <a:solidFill>
                   <a:srgbClr val="1C7293"/>
                 </a:solidFill>
                 <a:latin typeface="Calibri"/>
               </a:rPr>
-              <a:t>LAS 7 SEDES Y CENTROS QUE EL SISTEMA MODELA</a:t>
+              <a:t>LAS </a:t>
+            </a:r>
+            <a:r>
+              <a:rPr lang="en-US" sz="1100" b="1" dirty="0">
+                <a:solidFill>
+                  <a:srgbClr val="1C7293"/>
+                </a:solidFill>
+                <a:latin typeface="Calibri"/>
+              </a:rPr>
+              <a:t>5</a:t>
+            </a:r>
+            <a:r>
+              <a:rPr sz="1100" b="1" dirty="0">
+                <a:solidFill>
+                  <a:srgbClr val="1C7293"/>
+                </a:solidFill>
+                <a:latin typeface="Calibri"/>
+              </a:rPr>
+              <a:t> SEDES Y CENTROS QUE EL SISTEMA MODELA</a:t>
             </a:r>
           </a:p>
         </p:txBody>
@@ -23984,6 +24774,7 @@
           <a:lstStyle/>
           <a:p>
             <a:pPr algn="ctr"/>
+            <a:endParaRPr/>
           </a:p>
         </p:txBody>
       </p:sp>
@@ -24030,6 +24821,7 @@
           <a:lstStyle/>
           <a:p>
             <a:pPr algn="ctr"/>
+            <a:endParaRPr/>
           </a:p>
         </p:txBody>
       </p:sp>
@@ -24050,7 +24842,7 @@
           <a:noFill/>
         </p:spPr>
         <p:txBody>
-          <a:bodyPr wrap="square" lIns="0" rIns="0" tIns="0" bIns="0" anchor="t">
+          <a:bodyPr wrap="square" lIns="0" tIns="0" rIns="0" bIns="0" anchor="t">
             <a:spAutoFit/>
           </a:bodyPr>
           <a:lstStyle/>
@@ -24131,6 +24923,7 @@
           <a:lstStyle/>
           <a:p>
             <a:pPr algn="ctr"/>
+            <a:endParaRPr/>
           </a:p>
         </p:txBody>
       </p:sp>
@@ -24177,6 +24970,7 @@
           <a:lstStyle/>
           <a:p>
             <a:pPr algn="ctr"/>
+            <a:endParaRPr/>
           </a:p>
         </p:txBody>
       </p:sp>
@@ -24189,33 +24983,34 @@
         <p:spPr>
           <a:xfrm>
             <a:off x="2103120" y="4315968"/>
-            <a:ext cx="1298448" cy="685800"/>
-          </a:xfrm>
-          <a:prstGeom prst="rect">
-            <a:avLst/>
-          </a:prstGeom>
-          <a:noFill/>
-        </p:spPr>
-        <p:txBody>
-          <a:bodyPr wrap="square" lIns="0" rIns="0" tIns="0" bIns="0" anchor="t">
+            <a:ext cx="1298448" cy="369332"/>
+          </a:xfrm>
+          <a:prstGeom prst="rect">
+            <a:avLst/>
+          </a:prstGeom>
+          <a:noFill/>
+        </p:spPr>
+        <p:txBody>
+          <a:bodyPr wrap="square" lIns="0" tIns="0" rIns="0" bIns="0" anchor="t">
             <a:spAutoFit/>
           </a:bodyPr>
           <a:lstStyle/>
           <a:p>
             <a:pPr algn="ctr">
               <a:lnSpc>
-                <a:spcPct val="110000"/>
+                <a:spcPct val="100000"/>
               </a:lnSpc>
             </a:pPr>
             <a:r>
-              <a:rPr sz="1150" b="1">
-                <a:solidFill>
-                  <a:srgbClr val="0F172A"/>
-                </a:solidFill>
-                <a:latin typeface="Calibri"/>
-              </a:rPr>
-              <a:t>Atenas</a:t>
-            </a:r>
+              <a:rPr lang="es-CR" sz="1200" b="1" dirty="0"/>
+              <a:t>Sede Regional de Atenas</a:t>
+            </a:r>
+            <a:endParaRPr sz="1150" b="1" dirty="0">
+              <a:solidFill>
+                <a:srgbClr val="0F172A"/>
+              </a:solidFill>
+              <a:latin typeface="Calibri"/>
+            </a:endParaRPr>
           </a:p>
         </p:txBody>
       </p:sp>
@@ -24262,6 +25057,7 @@
           <a:lstStyle/>
           <a:p>
             <a:pPr algn="ctr"/>
+            <a:endParaRPr/>
           </a:p>
         </p:txBody>
       </p:sp>
@@ -24308,6 +25104,7 @@
           <a:lstStyle/>
           <a:p>
             <a:pPr algn="ctr"/>
+            <a:endParaRPr/>
           </a:p>
         </p:txBody>
       </p:sp>
@@ -24320,15 +25117,15 @@
         <p:spPr>
           <a:xfrm>
             <a:off x="3749039" y="4315968"/>
-            <a:ext cx="1298448" cy="685800"/>
-          </a:xfrm>
-          <a:prstGeom prst="rect">
-            <a:avLst/>
-          </a:prstGeom>
-          <a:noFill/>
-        </p:spPr>
-        <p:txBody>
-          <a:bodyPr wrap="square" lIns="0" rIns="0" tIns="0" bIns="0" anchor="t">
+            <a:ext cx="1298448" cy="396134"/>
+          </a:xfrm>
+          <a:prstGeom prst="rect">
+            <a:avLst/>
+          </a:prstGeom>
+          <a:noFill/>
+        </p:spPr>
+        <p:txBody>
+          <a:bodyPr wrap="square" lIns="0" tIns="0" rIns="0" bIns="0" anchor="t">
             <a:spAutoFit/>
           </a:bodyPr>
           <a:lstStyle/>
@@ -24339,30 +25136,15 @@
               </a:lnSpc>
             </a:pPr>
             <a:r>
-              <a:rPr sz="1150" b="1">
-                <a:solidFill>
-                  <a:srgbClr val="0F172A"/>
-                </a:solidFill>
-                <a:latin typeface="Calibri"/>
-              </a:rPr>
-              <a:t>Guanacaste</a:t>
-            </a:r>
-          </a:p>
-          <a:p>
-            <a:pPr algn="ctr">
-              <a:lnSpc>
-                <a:spcPct val="110000"/>
-              </a:lnSpc>
-            </a:pPr>
-            <a:r>
-              <a:rPr sz="1150" b="1">
-                <a:solidFill>
-                  <a:srgbClr val="0F172A"/>
-                </a:solidFill>
-                <a:latin typeface="Calibri"/>
-              </a:rPr>
-              <a:t>Chorotega</a:t>
-            </a:r>
+              <a:rPr lang="es-CR" sz="1200" b="1" dirty="0"/>
+              <a:t>Sede Regional de Guanacaste</a:t>
+            </a:r>
+            <a:endParaRPr sz="1150" b="1" dirty="0">
+              <a:solidFill>
+                <a:srgbClr val="0F172A"/>
+              </a:solidFill>
+              <a:latin typeface="Calibri"/>
+            </a:endParaRPr>
           </a:p>
         </p:txBody>
       </p:sp>
@@ -24409,6 +25191,7 @@
           <a:lstStyle/>
           <a:p>
             <a:pPr algn="ctr"/>
+            <a:endParaRPr/>
           </a:p>
         </p:txBody>
       </p:sp>
@@ -24455,6 +25238,7 @@
           <a:lstStyle/>
           <a:p>
             <a:pPr algn="ctr"/>
+            <a:endParaRPr/>
           </a:p>
         </p:txBody>
       </p:sp>
@@ -24467,15 +25251,15 @@
         <p:spPr>
           <a:xfrm>
             <a:off x="5394960" y="4315968"/>
-            <a:ext cx="1298448" cy="685800"/>
-          </a:xfrm>
-          <a:prstGeom prst="rect">
-            <a:avLst/>
-          </a:prstGeom>
-          <a:noFill/>
-        </p:spPr>
-        <p:txBody>
-          <a:bodyPr wrap="square" lIns="0" rIns="0" tIns="0" bIns="0" anchor="t">
+            <a:ext cx="1298448" cy="564001"/>
+          </a:xfrm>
+          <a:prstGeom prst="rect">
+            <a:avLst/>
+          </a:prstGeom>
+          <a:noFill/>
+        </p:spPr>
+        <p:txBody>
+          <a:bodyPr wrap="square" lIns="0" tIns="0" rIns="0" bIns="0" anchor="t">
             <a:spAutoFit/>
           </a:bodyPr>
           <a:lstStyle/>
@@ -24486,7 +25270,7 @@
               </a:lnSpc>
             </a:pPr>
             <a:r>
-              <a:rPr sz="1150" b="1">
+              <a:rPr sz="1150" b="1" dirty="0">
                 <a:solidFill>
                   <a:srgbClr val="0F172A"/>
                 </a:solidFill>
@@ -24498,18 +25282,19 @@
           <a:p>
             <a:pPr algn="ctr">
               <a:lnSpc>
-                <a:spcPct val="110000"/>
+                <a:spcPct val="100000"/>
               </a:lnSpc>
             </a:pPr>
             <a:r>
-              <a:rPr sz="1150" b="1">
-                <a:solidFill>
-                  <a:srgbClr val="0F172A"/>
-                </a:solidFill>
-                <a:latin typeface="Calibri"/>
-              </a:rPr>
-              <a:t>Pacífico</a:t>
-            </a:r>
+              <a:rPr lang="es-CR" sz="1150" b="1" dirty="0"/>
+              <a:t>Sede Regional del Pacífico</a:t>
+            </a:r>
+            <a:endParaRPr sz="1150" b="1" dirty="0">
+              <a:solidFill>
+                <a:srgbClr val="0F172A"/>
+              </a:solidFill>
+              <a:latin typeface="Calibri"/>
+            </a:endParaRPr>
           </a:p>
         </p:txBody>
       </p:sp>
@@ -24556,6 +25341,7 @@
           <a:lstStyle/>
           <a:p>
             <a:pPr algn="ctr"/>
+            <a:endParaRPr/>
           </a:p>
         </p:txBody>
       </p:sp>
@@ -24602,6 +25388,7 @@
           <a:lstStyle/>
           <a:p>
             <a:pPr algn="ctr"/>
+            <a:endParaRPr/>
           </a:p>
         </p:txBody>
       </p:sp>
@@ -24614,61 +25401,46 @@
         <p:spPr>
           <a:xfrm>
             <a:off x="7040880" y="4315968"/>
-            <a:ext cx="1298448" cy="685800"/>
-          </a:xfrm>
-          <a:prstGeom prst="rect">
-            <a:avLst/>
-          </a:prstGeom>
-          <a:noFill/>
-        </p:spPr>
-        <p:txBody>
-          <a:bodyPr wrap="square" lIns="0" rIns="0" tIns="0" bIns="0" anchor="t">
+            <a:ext cx="1298448" cy="353943"/>
+          </a:xfrm>
+          <a:prstGeom prst="rect">
+            <a:avLst/>
+          </a:prstGeom>
+          <a:noFill/>
+        </p:spPr>
+        <p:txBody>
+          <a:bodyPr wrap="square" lIns="0" tIns="0" rIns="0" bIns="0" anchor="t">
             <a:spAutoFit/>
           </a:bodyPr>
           <a:lstStyle/>
           <a:p>
             <a:pPr algn="ctr">
               <a:lnSpc>
-                <a:spcPct val="110000"/>
+                <a:spcPct val="100000"/>
               </a:lnSpc>
             </a:pPr>
             <a:r>
-              <a:rPr sz="1150" b="1">
-                <a:solidFill>
-                  <a:srgbClr val="0F172A"/>
-                </a:solidFill>
-                <a:latin typeface="Calibri"/>
-              </a:rPr>
-              <a:t>San Carlos</a:t>
-            </a:r>
-          </a:p>
-          <a:p>
-            <a:pPr algn="ctr">
-              <a:lnSpc>
-                <a:spcPct val="110000"/>
-              </a:lnSpc>
-            </a:pPr>
-            <a:r>
-              <a:rPr sz="1150" b="1">
-                <a:solidFill>
-                  <a:srgbClr val="0F172A"/>
-                </a:solidFill>
-                <a:latin typeface="Calibri"/>
-              </a:rPr>
-              <a:t>Huetar Norte</a:t>
-            </a:r>
-          </a:p>
-        </p:txBody>
-      </p:sp>
-      <p:sp>
-        <p:nvSpPr>
-          <p:cNvPr id="29" name="Rounded Rectangle 28"/>
+              <a:rPr lang="es-CR" sz="1150" b="1" dirty="0"/>
+              <a:t>Sede Regional de San Carlos</a:t>
+            </a:r>
+            <a:endParaRPr lang="es-CR" sz="1150" b="1" dirty="0">
+              <a:solidFill>
+                <a:srgbClr val="0F172A"/>
+              </a:solidFill>
+              <a:latin typeface="Calibri"/>
+            </a:endParaRPr>
+          </a:p>
+        </p:txBody>
+      </p:sp>
+      <p:sp>
+        <p:nvSpPr>
+          <p:cNvPr id="32" name="Rounded Rectangle 31"/>
           <p:cNvSpPr/>
           <p:nvPr/>
         </p:nvSpPr>
         <p:spPr>
           <a:xfrm>
-            <a:off x="8595360" y="4041648"/>
+            <a:off x="10241280" y="4041648"/>
             <a:ext cx="1481328" cy="1051560"/>
           </a:xfrm>
           <a:prstGeom prst="roundRect">
@@ -24703,222 +25475,7 @@
           <a:lstStyle/>
           <a:p>
             <a:pPr algn="ctr"/>
-          </a:p>
-        </p:txBody>
-      </p:sp>
-      <p:sp>
-        <p:nvSpPr>
-          <p:cNvPr id="30" name="Rounded Rectangle 29"/>
-          <p:cNvSpPr/>
-          <p:nvPr/>
-        </p:nvSpPr>
-        <p:spPr>
-          <a:xfrm>
-            <a:off x="8595360" y="4041648"/>
-            <a:ext cx="1481328" cy="73152"/>
-          </a:xfrm>
-          <a:prstGeom prst="roundRect">
-            <a:avLst>
-              <a:gd name="adj" fmla="val 50000"/>
-            </a:avLst>
-          </a:prstGeom>
-          <a:solidFill>
-            <a:srgbClr val="1C7293"/>
-          </a:solidFill>
-          <a:ln>
-            <a:noFill/>
-          </a:ln>
-          <a:effectLst/>
-        </p:spPr>
-        <p:style>
-          <a:lnRef idx="1">
-            <a:schemeClr val="accent1"/>
-          </a:lnRef>
-          <a:fillRef idx="3">
-            <a:schemeClr val="accent1"/>
-          </a:fillRef>
-          <a:effectRef idx="2">
-            <a:schemeClr val="accent1"/>
-          </a:effectRef>
-          <a:fontRef idx="minor">
-            <a:schemeClr val="lt1"/>
-          </a:fontRef>
-        </p:style>
-        <p:txBody>
-          <a:bodyPr rtlCol="0" anchor="ctr"/>
-          <a:lstStyle/>
-          <a:p>
-            <a:pPr algn="ctr"/>
-          </a:p>
-        </p:txBody>
-      </p:sp>
-      <p:sp>
-        <p:nvSpPr>
-          <p:cNvPr id="31" name="TextBox 30"/>
-          <p:cNvSpPr txBox="1"/>
-          <p:nvPr/>
-        </p:nvSpPr>
-        <p:spPr>
-          <a:xfrm>
-            <a:off x="8686800" y="4315968"/>
-            <a:ext cx="1298448" cy="685800"/>
-          </a:xfrm>
-          <a:prstGeom prst="rect">
-            <a:avLst/>
-          </a:prstGeom>
-          <a:noFill/>
-        </p:spPr>
-        <p:txBody>
-          <a:bodyPr wrap="square" lIns="0" rIns="0" tIns="0" bIns="0" anchor="t">
-            <a:spAutoFit/>
-          </a:bodyPr>
-          <a:lstStyle/>
-          <a:p>
-            <a:pPr algn="ctr">
-              <a:lnSpc>
-                <a:spcPct val="110000"/>
-              </a:lnSpc>
-            </a:pPr>
-            <a:r>
-              <a:rPr sz="1150" b="1">
-                <a:solidFill>
-                  <a:srgbClr val="0F172A"/>
-                </a:solidFill>
-                <a:latin typeface="Calibri"/>
-              </a:rPr>
-              <a:t>CFPTE</a:t>
-            </a:r>
-          </a:p>
-        </p:txBody>
-      </p:sp>
-      <p:sp>
-        <p:nvSpPr>
-          <p:cNvPr id="32" name="Rounded Rectangle 31"/>
-          <p:cNvSpPr/>
-          <p:nvPr/>
-        </p:nvSpPr>
-        <p:spPr>
-          <a:xfrm>
-            <a:off x="10241280" y="4041648"/>
-            <a:ext cx="1481328" cy="1051560"/>
-          </a:xfrm>
-          <a:prstGeom prst="roundRect">
-            <a:avLst>
-              <a:gd name="adj" fmla="val 10000"/>
-            </a:avLst>
-          </a:prstGeom>
-          <a:solidFill>
-            <a:srgbClr val="FFFFFF"/>
-          </a:solidFill>
-          <a:ln>
-            <a:noFill/>
-          </a:ln>
-          <a:effectLst/>
-        </p:spPr>
-        <p:style>
-          <a:lnRef idx="1">
-            <a:schemeClr val="accent1"/>
-          </a:lnRef>
-          <a:fillRef idx="3">
-            <a:schemeClr val="accent1"/>
-          </a:fillRef>
-          <a:effectRef idx="2">
-            <a:schemeClr val="accent1"/>
-          </a:effectRef>
-          <a:fontRef idx="minor">
-            <a:schemeClr val="lt1"/>
-          </a:fontRef>
-        </p:style>
-        <p:txBody>
-          <a:bodyPr rtlCol="0" anchor="ctr"/>
-          <a:lstStyle/>
-          <a:p>
-            <a:pPr algn="ctr"/>
-          </a:p>
-        </p:txBody>
-      </p:sp>
-      <p:sp>
-        <p:nvSpPr>
-          <p:cNvPr id="33" name="Rounded Rectangle 32"/>
-          <p:cNvSpPr/>
-          <p:nvPr/>
-        </p:nvSpPr>
-        <p:spPr>
-          <a:xfrm>
-            <a:off x="10241280" y="4041648"/>
-            <a:ext cx="1481328" cy="73152"/>
-          </a:xfrm>
-          <a:prstGeom prst="roundRect">
-            <a:avLst>
-              <a:gd name="adj" fmla="val 50000"/>
-            </a:avLst>
-          </a:prstGeom>
-          <a:solidFill>
-            <a:srgbClr val="1C7293"/>
-          </a:solidFill>
-          <a:ln>
-            <a:noFill/>
-          </a:ln>
-          <a:effectLst/>
-        </p:spPr>
-        <p:style>
-          <a:lnRef idx="1">
-            <a:schemeClr val="accent1"/>
-          </a:lnRef>
-          <a:fillRef idx="3">
-            <a:schemeClr val="accent1"/>
-          </a:fillRef>
-          <a:effectRef idx="2">
-            <a:schemeClr val="accent1"/>
-          </a:effectRef>
-          <a:fontRef idx="minor">
-            <a:schemeClr val="lt1"/>
-          </a:fontRef>
-        </p:style>
-        <p:txBody>
-          <a:bodyPr rtlCol="0" anchor="ctr"/>
-          <a:lstStyle/>
-          <a:p>
-            <a:pPr algn="ctr"/>
-          </a:p>
-        </p:txBody>
-      </p:sp>
-      <p:sp>
-        <p:nvSpPr>
-          <p:cNvPr id="34" name="TextBox 33"/>
-          <p:cNvSpPr txBox="1"/>
-          <p:nvPr/>
-        </p:nvSpPr>
-        <p:spPr>
-          <a:xfrm>
-            <a:off x="10332720" y="4315968"/>
-            <a:ext cx="1298448" cy="685800"/>
-          </a:xfrm>
-          <a:prstGeom prst="rect">
-            <a:avLst/>
-          </a:prstGeom>
-          <a:noFill/>
-        </p:spPr>
-        <p:txBody>
-          <a:bodyPr wrap="square" lIns="0" rIns="0" tIns="0" bIns="0" anchor="t">
-            <a:spAutoFit/>
-          </a:bodyPr>
-          <a:lstStyle/>
-          <a:p>
-            <a:pPr algn="ctr">
-              <a:lnSpc>
-                <a:spcPct val="110000"/>
-              </a:lnSpc>
-            </a:pPr>
-            <a:r>
-              <a:rPr sz="1150" b="1">
-                <a:solidFill>
-                  <a:srgbClr val="0F172A"/>
-                </a:solidFill>
-                <a:latin typeface="Calibri"/>
-              </a:rPr>
-              <a:t>Limón</a:t>
-            </a:r>
+            <a:endParaRPr/>
           </a:p>
         </p:txBody>
       </p:sp>
@@ -24965,6 +25522,7 @@
           <a:lstStyle/>
           <a:p>
             <a:pPr algn="ctr"/>
+            <a:endParaRPr/>
           </a:p>
         </p:txBody>
       </p:sp>
@@ -24985,7 +25543,7 @@
           <a:noFill/>
         </p:spPr>
         <p:txBody>
-          <a:bodyPr wrap="square" lIns="0" rIns="0" tIns="0" bIns="0" anchor="t">
+          <a:bodyPr wrap="square" lIns="0" tIns="0" rIns="0" bIns="0" anchor="t">
             <a:spAutoFit/>
           </a:bodyPr>
           <a:lstStyle/>
@@ -25016,7 +25574,7 @@
 </file>
 
 <file path=ppt/slides/slide6.xml><?xml version="1.0" encoding="utf-8"?>
-<p:sld xmlns:a="http://schemas.openxmlformats.org/drawingml/2006/main" xmlns:p="http://schemas.openxmlformats.org/presentationml/2006/main" xmlns:r="http://schemas.openxmlformats.org/officeDocument/2006/relationships">
+<p:sld xmlns:a="http://schemas.openxmlformats.org/drawingml/2006/main" xmlns:r="http://schemas.openxmlformats.org/officeDocument/2006/relationships" xmlns:p="http://schemas.openxmlformats.org/presentationml/2006/main">
   <p:cSld>
     <p:spTree>
       <p:nvGrpSpPr>
@@ -25024,7 +25582,14 @@
         <p:cNvGrpSpPr/>
         <p:nvPr/>
       </p:nvGrpSpPr>
-      <p:grpSpPr/>
+      <p:grpSpPr>
+        <a:xfrm>
+          <a:off x="0" y="0"/>
+          <a:ext cx="0" cy="0"/>
+          <a:chOff x="0" y="0"/>
+          <a:chExt cx="0" cy="0"/>
+        </a:xfrm>
+      </p:grpSpPr>
       <p:sp>
         <p:nvSpPr>
           <p:cNvPr id="2" name="Rectangle 1"/>
@@ -25066,6 +25631,7 @@
           <a:lstStyle/>
           <a:p>
             <a:pPr algn="ctr"/>
+            <a:endParaRPr/>
           </a:p>
         </p:txBody>
       </p:sp>
@@ -25086,7 +25652,7 @@
           <a:noFill/>
         </p:spPr>
         <p:txBody>
-          <a:bodyPr wrap="square" lIns="0" rIns="0" tIns="0" bIns="0" anchor="t">
+          <a:bodyPr wrap="square" lIns="0" tIns="0" rIns="0" bIns="0" anchor="t">
             <a:spAutoFit/>
           </a:bodyPr>
           <a:lstStyle/>
@@ -25121,7 +25687,7 @@
           <a:noFill/>
         </p:spPr>
         <p:txBody>
-          <a:bodyPr wrap="square" lIns="0" rIns="0" tIns="0" bIns="0" anchor="t">
+          <a:bodyPr wrap="square" lIns="0" tIns="0" rIns="0" bIns="0" anchor="t">
             <a:spAutoFit/>
           </a:bodyPr>
           <a:lstStyle/>
@@ -25180,6 +25746,7 @@
           <a:lstStyle/>
           <a:p>
             <a:pPr algn="ctr"/>
+            <a:endParaRPr/>
           </a:p>
         </p:txBody>
       </p:sp>
@@ -25200,7 +25767,7 @@
           <a:noFill/>
         </p:spPr>
         <p:txBody>
-          <a:bodyPr wrap="square" lIns="0" rIns="0" tIns="0" bIns="0" anchor="t">
+          <a:bodyPr wrap="square" lIns="0" tIns="0" rIns="0" bIns="0" anchor="t">
             <a:spAutoFit/>
           </a:bodyPr>
           <a:lstStyle/>
@@ -25261,6 +25828,7 @@
           <a:lstStyle/>
           <a:p>
             <a:pPr algn="ctr"/>
+            <a:endParaRPr/>
           </a:p>
         </p:txBody>
       </p:sp>
@@ -25281,7 +25849,7 @@
           <a:noFill/>
         </p:spPr>
         <p:txBody>
-          <a:bodyPr wrap="square" lIns="0" rIns="0" tIns="0" bIns="0" anchor="t">
+          <a:bodyPr wrap="square" lIns="0" tIns="0" rIns="0" bIns="0" anchor="t">
             <a:spAutoFit/>
           </a:bodyPr>
           <a:lstStyle/>
@@ -25308,15 +25876,15 @@
         <p:spPr>
           <a:xfrm>
             <a:off x="640080" y="1719072"/>
-            <a:ext cx="5120640" cy="1874519"/>
-          </a:xfrm>
-          <a:prstGeom prst="rect">
-            <a:avLst/>
-          </a:prstGeom>
-          <a:noFill/>
-        </p:spPr>
-        <p:txBody>
-          <a:bodyPr wrap="square" lIns="0" rIns="0" tIns="0" bIns="0" anchor="t">
+            <a:ext cx="5120640" cy="1314847"/>
+          </a:xfrm>
+          <a:prstGeom prst="rect">
+            <a:avLst/>
+          </a:prstGeom>
+          <a:noFill/>
+        </p:spPr>
+        <p:txBody>
+          <a:bodyPr wrap="square" lIns="0" tIns="0" rIns="0" bIns="0" anchor="t">
             <a:spAutoFit/>
           </a:bodyPr>
           <a:lstStyle/>
@@ -25327,13 +25895,265 @@
               </a:lnSpc>
             </a:pPr>
             <a:r>
-              <a:rPr sz="1200" b="0">
+              <a:rPr sz="1200" b="0" dirty="0">
                 <a:solidFill>
                   <a:srgbClr val="475569"/>
                 </a:solidFill>
                 <a:latin typeface="Calibri"/>
               </a:rPr>
-              <a:t>Campus universitarios en las siete sedes y centros del país, con edificios académicos y administrativos, laboratorios de cómputo, talleres y fincas didácticas.</a:t>
+              <a:t>Campus </a:t>
+            </a:r>
+            <a:r>
+              <a:rPr sz="1200" b="0" dirty="0" err="1">
+                <a:solidFill>
+                  <a:srgbClr val="475569"/>
+                </a:solidFill>
+                <a:latin typeface="Calibri"/>
+              </a:rPr>
+              <a:t>universitarios</a:t>
+            </a:r>
+            <a:r>
+              <a:rPr sz="1200" b="0" dirty="0">
+                <a:solidFill>
+                  <a:srgbClr val="475569"/>
+                </a:solidFill>
+                <a:latin typeface="Calibri"/>
+              </a:rPr>
+              <a:t> </a:t>
+            </a:r>
+            <a:r>
+              <a:rPr sz="1200" b="0" dirty="0" err="1">
+                <a:solidFill>
+                  <a:srgbClr val="475569"/>
+                </a:solidFill>
+                <a:latin typeface="Calibri"/>
+              </a:rPr>
+              <a:t>en</a:t>
+            </a:r>
+            <a:r>
+              <a:rPr sz="1200" b="0" dirty="0">
+                <a:solidFill>
+                  <a:srgbClr val="475569"/>
+                </a:solidFill>
+                <a:latin typeface="Calibri"/>
+              </a:rPr>
+              <a:t> las </a:t>
+            </a:r>
+            <a:r>
+              <a:rPr lang="en-US" sz="1200" b="0" dirty="0">
+                <a:solidFill>
+                  <a:srgbClr val="475569"/>
+                </a:solidFill>
+                <a:latin typeface="Calibri"/>
+              </a:rPr>
+              <a:t>5</a:t>
+            </a:r>
+            <a:r>
+              <a:rPr sz="1200" b="0" dirty="0">
+                <a:solidFill>
+                  <a:srgbClr val="475569"/>
+                </a:solidFill>
+                <a:latin typeface="Calibri"/>
+              </a:rPr>
+              <a:t> </a:t>
+            </a:r>
+            <a:r>
+              <a:rPr sz="1200" b="0" dirty="0" err="1">
+                <a:solidFill>
+                  <a:srgbClr val="475569"/>
+                </a:solidFill>
+                <a:latin typeface="Calibri"/>
+              </a:rPr>
+              <a:t>sedes</a:t>
+            </a:r>
+            <a:r>
+              <a:rPr lang="en-US" sz="1200" b="0" dirty="0">
+                <a:solidFill>
+                  <a:srgbClr val="475569"/>
+                </a:solidFill>
+                <a:latin typeface="Calibri"/>
+              </a:rPr>
+              <a:t> </a:t>
+            </a:r>
+            <a:r>
+              <a:rPr lang="en-US" sz="1200" b="0" dirty="0" err="1">
+                <a:solidFill>
+                  <a:srgbClr val="475569"/>
+                </a:solidFill>
+                <a:latin typeface="Calibri"/>
+              </a:rPr>
+              <a:t>regionales</a:t>
+            </a:r>
+            <a:r>
+              <a:rPr sz="1200" b="0" dirty="0">
+                <a:solidFill>
+                  <a:srgbClr val="475569"/>
+                </a:solidFill>
+                <a:latin typeface="Calibri"/>
+              </a:rPr>
+              <a:t> y </a:t>
+            </a:r>
+            <a:r>
+              <a:rPr sz="1200" b="0" dirty="0" err="1">
+                <a:solidFill>
+                  <a:srgbClr val="475569"/>
+                </a:solidFill>
+                <a:latin typeface="Calibri"/>
+              </a:rPr>
+              <a:t>centros</a:t>
+            </a:r>
+            <a:r>
+              <a:rPr sz="1200" b="0" dirty="0">
+                <a:solidFill>
+                  <a:srgbClr val="475569"/>
+                </a:solidFill>
+                <a:latin typeface="Calibri"/>
+              </a:rPr>
+              <a:t> del </a:t>
+            </a:r>
+            <a:r>
+              <a:rPr sz="1200" b="0" dirty="0" err="1">
+                <a:solidFill>
+                  <a:srgbClr val="475569"/>
+                </a:solidFill>
+                <a:latin typeface="Calibri"/>
+              </a:rPr>
+              <a:t>país</a:t>
+            </a:r>
+            <a:r>
+              <a:rPr sz="1200" b="0" dirty="0">
+                <a:solidFill>
+                  <a:srgbClr val="475569"/>
+                </a:solidFill>
+                <a:latin typeface="Calibri"/>
+              </a:rPr>
+              <a:t>, con </a:t>
+            </a:r>
+            <a:r>
+              <a:rPr sz="1200" b="0" dirty="0" err="1">
+                <a:solidFill>
+                  <a:srgbClr val="475569"/>
+                </a:solidFill>
+                <a:latin typeface="Calibri"/>
+              </a:rPr>
+              <a:t>edificios</a:t>
+            </a:r>
+            <a:r>
+              <a:rPr sz="1200" b="0" dirty="0">
+                <a:solidFill>
+                  <a:srgbClr val="475569"/>
+                </a:solidFill>
+                <a:latin typeface="Calibri"/>
+              </a:rPr>
+              <a:t> </a:t>
+            </a:r>
+            <a:r>
+              <a:rPr sz="1200" b="0" dirty="0" err="1">
+                <a:solidFill>
+                  <a:srgbClr val="475569"/>
+                </a:solidFill>
+                <a:latin typeface="Calibri"/>
+              </a:rPr>
+              <a:t>académicos</a:t>
+            </a:r>
+            <a:r>
+              <a:rPr sz="1200" b="0" dirty="0">
+                <a:solidFill>
+                  <a:srgbClr val="475569"/>
+                </a:solidFill>
+                <a:latin typeface="Calibri"/>
+              </a:rPr>
+              <a:t> y </a:t>
+            </a:r>
+            <a:r>
+              <a:rPr sz="1200" b="0" dirty="0" err="1">
+                <a:solidFill>
+                  <a:srgbClr val="475569"/>
+                </a:solidFill>
+                <a:latin typeface="Calibri"/>
+              </a:rPr>
+              <a:t>administrativos</a:t>
+            </a:r>
+            <a:r>
+              <a:rPr sz="1200" b="0" dirty="0">
+                <a:solidFill>
+                  <a:srgbClr val="475569"/>
+                </a:solidFill>
+                <a:latin typeface="Calibri"/>
+              </a:rPr>
+              <a:t>, </a:t>
+            </a:r>
+            <a:r>
+              <a:rPr sz="1200" b="0" dirty="0" err="1">
+                <a:solidFill>
+                  <a:srgbClr val="475569"/>
+                </a:solidFill>
+                <a:latin typeface="Calibri"/>
+              </a:rPr>
+              <a:t>laboratorios</a:t>
+            </a:r>
+            <a:r>
+              <a:rPr sz="1200" b="0" dirty="0">
+                <a:solidFill>
+                  <a:srgbClr val="475569"/>
+                </a:solidFill>
+                <a:latin typeface="Calibri"/>
+              </a:rPr>
+              <a:t> de </a:t>
+            </a:r>
+            <a:r>
+              <a:rPr sz="1200" b="0" dirty="0" err="1">
+                <a:solidFill>
+                  <a:srgbClr val="475569"/>
+                </a:solidFill>
+                <a:latin typeface="Calibri"/>
+              </a:rPr>
+              <a:t>cómputo</a:t>
+            </a:r>
+            <a:r>
+              <a:rPr sz="1200" b="0" dirty="0">
+                <a:solidFill>
+                  <a:srgbClr val="475569"/>
+                </a:solidFill>
+                <a:latin typeface="Calibri"/>
+              </a:rPr>
+              <a:t>, </a:t>
+            </a:r>
+            <a:r>
+              <a:rPr sz="1200" b="0" dirty="0" err="1">
+                <a:solidFill>
+                  <a:srgbClr val="475569"/>
+                </a:solidFill>
+                <a:latin typeface="Calibri"/>
+              </a:rPr>
+              <a:t>talleres</a:t>
+            </a:r>
+            <a:r>
+              <a:rPr sz="1200" b="0" dirty="0">
+                <a:solidFill>
+                  <a:srgbClr val="475569"/>
+                </a:solidFill>
+                <a:latin typeface="Calibri"/>
+              </a:rPr>
+              <a:t> y fincas </a:t>
+            </a:r>
+            <a:r>
+              <a:rPr sz="1200" b="0" dirty="0" err="1">
+                <a:solidFill>
+                  <a:srgbClr val="475569"/>
+                </a:solidFill>
+                <a:latin typeface="Calibri"/>
+              </a:rPr>
+              <a:t>didácticas</a:t>
+            </a:r>
+            <a:r>
+              <a:rPr sz="1200" b="0" dirty="0">
+                <a:solidFill>
+                  <a:srgbClr val="475569"/>
+                </a:solidFill>
+                <a:latin typeface="Calibri"/>
+              </a:rPr>
+              <a:t>.</a:t>
             </a:r>
           </a:p>
           <a:p>
@@ -25342,15 +26162,12 @@
                 <a:spcPct val="120000"/>
               </a:lnSpc>
             </a:pPr>
-            <a:r>
-              <a:rPr sz="1200" b="0">
-                <a:solidFill>
-                  <a:srgbClr val="475569"/>
-                </a:solidFill>
-                <a:latin typeface="Calibri"/>
-              </a:rPr>
-              <a:t/>
-            </a:r>
+            <a:endParaRPr sz="1200" b="0" dirty="0">
+              <a:solidFill>
+                <a:srgbClr val="475569"/>
+              </a:solidFill>
+              <a:latin typeface="Calibri"/>
+            </a:endParaRPr>
           </a:p>
           <a:p>
             <a:pPr algn="l">
@@ -25359,13 +26176,211 @@
               </a:lnSpc>
             </a:pPr>
             <a:r>
-              <a:rPr sz="1200" b="0">
+              <a:rPr sz="1200" b="0" dirty="0">
                 <a:solidFill>
                   <a:srgbClr val="475569"/>
                 </a:solidFill>
                 <a:latin typeface="Calibri"/>
               </a:rPr>
-              <a:t>La Dirección de Planificación opera desde la Sede Central en Alajuela, en instalaciones administrativas con equipo de cómputo institucional.</a:t>
+              <a:t>La </a:t>
+            </a:r>
+            <a:r>
+              <a:rPr sz="1200" b="0" dirty="0" err="1">
+                <a:solidFill>
+                  <a:srgbClr val="475569"/>
+                </a:solidFill>
+                <a:latin typeface="Calibri"/>
+              </a:rPr>
+              <a:t>Dirección</a:t>
+            </a:r>
+            <a:r>
+              <a:rPr sz="1200" b="0" dirty="0">
+                <a:solidFill>
+                  <a:srgbClr val="475569"/>
+                </a:solidFill>
+                <a:latin typeface="Calibri"/>
+              </a:rPr>
+              <a:t> de </a:t>
+            </a:r>
+            <a:r>
+              <a:rPr sz="1200" b="0" dirty="0" err="1">
+                <a:solidFill>
+                  <a:srgbClr val="475569"/>
+                </a:solidFill>
+                <a:latin typeface="Calibri"/>
+              </a:rPr>
+              <a:t>Planificación</a:t>
+            </a:r>
+            <a:r>
+              <a:rPr sz="1200" b="0" dirty="0">
+                <a:solidFill>
+                  <a:srgbClr val="475569"/>
+                </a:solidFill>
+                <a:latin typeface="Calibri"/>
+              </a:rPr>
+              <a:t> opera </a:t>
+            </a:r>
+            <a:r>
+              <a:rPr sz="1200" b="0" dirty="0" err="1">
+                <a:solidFill>
+                  <a:srgbClr val="475569"/>
+                </a:solidFill>
+                <a:latin typeface="Calibri"/>
+              </a:rPr>
+              <a:t>desde</a:t>
+            </a:r>
+            <a:r>
+              <a:rPr sz="1200" b="0" dirty="0">
+                <a:solidFill>
+                  <a:srgbClr val="475569"/>
+                </a:solidFill>
+                <a:latin typeface="Calibri"/>
+              </a:rPr>
+              <a:t> la </a:t>
+            </a:r>
+            <a:r>
+              <a:rPr sz="1200" b="0" dirty="0" err="1">
+                <a:solidFill>
+                  <a:srgbClr val="475569"/>
+                </a:solidFill>
+                <a:latin typeface="Calibri"/>
+              </a:rPr>
+              <a:t>Sede</a:t>
+            </a:r>
+            <a:r>
+              <a:rPr sz="1200" b="0" dirty="0">
+                <a:solidFill>
+                  <a:srgbClr val="475569"/>
+                </a:solidFill>
+                <a:latin typeface="Calibri"/>
+              </a:rPr>
+              <a:t> Central </a:t>
+            </a:r>
+            <a:r>
+              <a:rPr sz="1200" b="0" dirty="0" err="1">
+                <a:solidFill>
+                  <a:srgbClr val="475569"/>
+                </a:solidFill>
+                <a:latin typeface="Calibri"/>
+              </a:rPr>
+              <a:t>en</a:t>
+            </a:r>
+            <a:r>
+              <a:rPr sz="1200" b="0" dirty="0">
+                <a:solidFill>
+                  <a:srgbClr val="475569"/>
+                </a:solidFill>
+                <a:latin typeface="Calibri"/>
+              </a:rPr>
+              <a:t> Alajuela, </a:t>
+            </a:r>
+            <a:r>
+              <a:rPr sz="1200" b="0" dirty="0" err="1">
+                <a:solidFill>
+                  <a:srgbClr val="475569"/>
+                </a:solidFill>
+                <a:latin typeface="Calibri"/>
+              </a:rPr>
+              <a:t>en</a:t>
+            </a:r>
+            <a:r>
+              <a:rPr sz="1200" b="0" dirty="0">
+                <a:solidFill>
+                  <a:srgbClr val="475569"/>
+                </a:solidFill>
+                <a:latin typeface="Calibri"/>
+              </a:rPr>
+              <a:t> </a:t>
+            </a:r>
+            <a:r>
+              <a:rPr sz="1200" b="0" dirty="0" err="1">
+                <a:solidFill>
+                  <a:srgbClr val="475569"/>
+                </a:solidFill>
+                <a:latin typeface="Calibri"/>
+              </a:rPr>
+              <a:t>instalaciones</a:t>
+            </a:r>
+            <a:r>
+              <a:rPr sz="1200" b="0" dirty="0">
+                <a:solidFill>
+                  <a:srgbClr val="475569"/>
+                </a:solidFill>
+                <a:latin typeface="Calibri"/>
+              </a:rPr>
+              <a:t> </a:t>
+            </a:r>
+            <a:r>
+              <a:rPr sz="1200" b="0" dirty="0" err="1">
+                <a:solidFill>
+                  <a:srgbClr val="475569"/>
+                </a:solidFill>
+                <a:latin typeface="Calibri"/>
+              </a:rPr>
+              <a:t>administrativas</a:t>
+            </a:r>
+            <a:r>
+              <a:rPr sz="1200" b="0" dirty="0">
+                <a:solidFill>
+                  <a:srgbClr val="475569"/>
+                </a:solidFill>
+                <a:latin typeface="Calibri"/>
+              </a:rPr>
+              <a:t> con </a:t>
+            </a:r>
+            <a:r>
+              <a:rPr sz="1200" b="0" dirty="0" err="1">
+                <a:solidFill>
+                  <a:srgbClr val="475569"/>
+                </a:solidFill>
+                <a:latin typeface="Calibri"/>
+              </a:rPr>
+              <a:t>equipo</a:t>
+            </a:r>
+            <a:r>
+              <a:rPr sz="1200" b="0" dirty="0">
+                <a:solidFill>
+                  <a:srgbClr val="475569"/>
+                </a:solidFill>
+                <a:latin typeface="Calibri"/>
+              </a:rPr>
+              <a:t> de </a:t>
+            </a:r>
+            <a:r>
+              <a:rPr sz="1200" b="0" dirty="0" err="1">
+                <a:solidFill>
+                  <a:srgbClr val="475569"/>
+                </a:solidFill>
+                <a:latin typeface="Calibri"/>
+              </a:rPr>
+              <a:t>cómputo</a:t>
+            </a:r>
+            <a:r>
+              <a:rPr sz="1200" b="0" dirty="0">
+                <a:solidFill>
+                  <a:srgbClr val="475569"/>
+                </a:solidFill>
+                <a:latin typeface="Calibri"/>
+              </a:rPr>
+              <a:t> </a:t>
+            </a:r>
+            <a:r>
+              <a:rPr sz="1200" b="0" dirty="0" err="1">
+                <a:solidFill>
+                  <a:srgbClr val="475569"/>
+                </a:solidFill>
+                <a:latin typeface="Calibri"/>
+              </a:rPr>
+              <a:t>institucional</a:t>
+            </a:r>
+            <a:r>
+              <a:rPr sz="1200" b="0" dirty="0">
+                <a:solidFill>
+                  <a:srgbClr val="475569"/>
+                </a:solidFill>
+                <a:latin typeface="Calibri"/>
+              </a:rPr>
+              <a:t>.</a:t>
             </a:r>
           </a:p>
         </p:txBody>
@@ -25413,6 +26428,7 @@
           <a:lstStyle/>
           <a:p>
             <a:pPr algn="ctr"/>
+            <a:endParaRPr/>
           </a:p>
         </p:txBody>
       </p:sp>
@@ -25433,7 +26449,7 @@
           <a:noFill/>
         </p:spPr>
         <p:txBody>
-          <a:bodyPr wrap="square" lIns="0" rIns="0" tIns="0" bIns="0" anchor="t">
+          <a:bodyPr wrap="square" lIns="0" tIns="0" rIns="0" bIns="0" anchor="t">
             <a:spAutoFit/>
           </a:bodyPr>
           <a:lstStyle/>
@@ -25468,7 +26484,7 @@
           <a:noFill/>
         </p:spPr>
         <p:txBody>
-          <a:bodyPr wrap="square" lIns="0" rIns="0" tIns="0" bIns="0" anchor="t">
+          <a:bodyPr wrap="square" lIns="0" tIns="0" rIns="0" bIns="0" anchor="t">
             <a:spAutoFit/>
           </a:bodyPr>
           <a:lstStyle/>
@@ -25645,6 +26661,7 @@
           <a:lstStyle/>
           <a:p>
             <a:pPr algn="ctr"/>
+            <a:endParaRPr/>
           </a:p>
         </p:txBody>
       </p:sp>
@@ -25665,7 +26682,7 @@
           <a:noFill/>
         </p:spPr>
         <p:txBody>
-          <a:bodyPr wrap="square" lIns="0" rIns="0" tIns="0" bIns="0" anchor="t">
+          <a:bodyPr wrap="square" lIns="0" tIns="0" rIns="0" bIns="0" anchor="t">
             <a:spAutoFit/>
           </a:bodyPr>
           <a:lstStyle/>
@@ -25700,7 +26717,7 @@
           <a:noFill/>
         </p:spPr>
         <p:txBody>
-          <a:bodyPr wrap="square" lIns="0" rIns="0" tIns="0" bIns="0" anchor="t">
+          <a:bodyPr wrap="square" lIns="0" tIns="0" rIns="0" bIns="0" anchor="t">
             <a:spAutoFit/>
           </a:bodyPr>
           <a:lstStyle/>
@@ -25726,15 +26743,12 @@
                 <a:spcPct val="120000"/>
               </a:lnSpc>
             </a:pPr>
-            <a:r>
-              <a:rPr sz="1200" b="0">
-                <a:solidFill>
-                  <a:srgbClr val="475569"/>
-                </a:solidFill>
-                <a:latin typeface="Calibri"/>
-              </a:rPr>
-              <a:t/>
-            </a:r>
+            <a:endParaRPr sz="1200" b="0">
+              <a:solidFill>
+                <a:srgbClr val="475569"/>
+              </a:solidFill>
+              <a:latin typeface="Calibri"/>
+            </a:endParaRPr>
           </a:p>
           <a:p>
             <a:pPr algn="l">
@@ -25763,7 +26777,7 @@
 </file>
 
 <file path=ppt/slides/slide7.xml><?xml version="1.0" encoding="utf-8"?>
-<p:sld xmlns:a="http://schemas.openxmlformats.org/drawingml/2006/main" xmlns:p="http://schemas.openxmlformats.org/presentationml/2006/main" xmlns:r="http://schemas.openxmlformats.org/officeDocument/2006/relationships">
+<p:sld xmlns:a="http://schemas.openxmlformats.org/drawingml/2006/main" xmlns:r="http://schemas.openxmlformats.org/officeDocument/2006/relationships" xmlns:p="http://schemas.openxmlformats.org/presentationml/2006/main">
   <p:cSld>
     <p:spTree>
       <p:nvGrpSpPr>
@@ -25771,7 +26785,14 @@
         <p:cNvGrpSpPr/>
         <p:nvPr/>
       </p:nvGrpSpPr>
-      <p:grpSpPr/>
+      <p:grpSpPr>
+        <a:xfrm>
+          <a:off x="0" y="0"/>
+          <a:ext cx="0" cy="0"/>
+          <a:chOff x="0" y="0"/>
+          <a:chExt cx="0" cy="0"/>
+        </a:xfrm>
+      </p:grpSpPr>
       <p:sp>
         <p:nvSpPr>
           <p:cNvPr id="2" name="Rectangle 1"/>
@@ -25813,6 +26834,7 @@
           <a:lstStyle/>
           <a:p>
             <a:pPr algn="ctr"/>
+            <a:endParaRPr/>
           </a:p>
         </p:txBody>
       </p:sp>
@@ -25833,7 +26855,7 @@
           <a:noFill/>
         </p:spPr>
         <p:txBody>
-          <a:bodyPr wrap="square" lIns="0" rIns="0" tIns="0" bIns="0" anchor="t">
+          <a:bodyPr wrap="square" lIns="0" tIns="0" rIns="0" bIns="0" anchor="t">
             <a:spAutoFit/>
           </a:bodyPr>
           <a:lstStyle/>
@@ -25868,7 +26890,7 @@
           <a:noFill/>
         </p:spPr>
         <p:txBody>
-          <a:bodyPr wrap="square" lIns="0" rIns="0" tIns="0" bIns="0" anchor="t">
+          <a:bodyPr wrap="square" lIns="0" tIns="0" rIns="0" bIns="0" anchor="t">
             <a:spAutoFit/>
           </a:bodyPr>
           <a:lstStyle/>
@@ -25927,6 +26949,7 @@
           <a:lstStyle/>
           <a:p>
             <a:pPr algn="ctr"/>
+            <a:endParaRPr/>
           </a:p>
         </p:txBody>
       </p:sp>
@@ -25947,7 +26970,7 @@
           <a:noFill/>
         </p:spPr>
         <p:txBody>
-          <a:bodyPr wrap="square" lIns="0" rIns="0" tIns="0" bIns="0" anchor="t">
+          <a:bodyPr wrap="square" lIns="0" tIns="0" rIns="0" bIns="0" anchor="t">
             <a:spAutoFit/>
           </a:bodyPr>
           <a:lstStyle/>
@@ -26008,6 +27031,7 @@
           <a:lstStyle/>
           <a:p>
             <a:pPr algn="ctr"/>
+            <a:endParaRPr/>
           </a:p>
         </p:txBody>
       </p:sp>
@@ -26028,7 +27052,7 @@
           <a:noFill/>
         </p:spPr>
         <p:txBody>
-          <a:bodyPr wrap="square" lIns="0" rIns="0" tIns="0" bIns="0" anchor="t">
+          <a:bodyPr wrap="square" lIns="0" tIns="0" rIns="0" bIns="0" anchor="t">
             <a:spAutoFit/>
           </a:bodyPr>
           <a:lstStyle/>
@@ -26063,7 +27087,7 @@
           <a:noFill/>
         </p:spPr>
         <p:txBody>
-          <a:bodyPr wrap="square" lIns="0" rIns="0" tIns="0" bIns="0" anchor="t">
+          <a:bodyPr wrap="square" lIns="0" tIns="0" rIns="0" bIns="0" anchor="t">
             <a:spAutoFit/>
           </a:bodyPr>
           <a:lstStyle/>
@@ -26122,6 +27146,7 @@
           <a:lstStyle/>
           <a:p>
             <a:pPr algn="ctr"/>
+            <a:endParaRPr/>
           </a:p>
         </p:txBody>
       </p:sp>
@@ -26168,6 +27193,7 @@
           <a:lstStyle/>
           <a:p>
             <a:pPr algn="ctr"/>
+            <a:endParaRPr/>
           </a:p>
         </p:txBody>
       </p:sp>
@@ -26188,7 +27214,7 @@
           <a:noFill/>
         </p:spPr>
         <p:txBody>
-          <a:bodyPr wrap="square" lIns="0" rIns="0" tIns="0" bIns="0" anchor="t">
+          <a:bodyPr wrap="square" lIns="0" tIns="0" rIns="0" bIns="0" anchor="t">
             <a:spAutoFit/>
           </a:bodyPr>
           <a:lstStyle/>
@@ -26223,7 +27249,7 @@
           <a:noFill/>
         </p:spPr>
         <p:txBody>
-          <a:bodyPr wrap="square" lIns="0" rIns="0" tIns="0" bIns="0" anchor="t">
+          <a:bodyPr wrap="square" lIns="0" tIns="0" rIns="0" bIns="0" anchor="t">
             <a:spAutoFit/>
           </a:bodyPr>
           <a:lstStyle/>
@@ -26282,6 +27308,7 @@
           <a:lstStyle/>
           <a:p>
             <a:pPr algn="ctr"/>
+            <a:endParaRPr/>
           </a:p>
         </p:txBody>
       </p:sp>
@@ -26328,6 +27355,7 @@
           <a:lstStyle/>
           <a:p>
             <a:pPr algn="ctr"/>
+            <a:endParaRPr/>
           </a:p>
         </p:txBody>
       </p:sp>
@@ -26348,7 +27376,7 @@
           <a:noFill/>
         </p:spPr>
         <p:txBody>
-          <a:bodyPr wrap="square" lIns="0" rIns="0" tIns="0" bIns="0" anchor="t">
+          <a:bodyPr wrap="square" lIns="0" tIns="0" rIns="0" bIns="0" anchor="t">
             <a:spAutoFit/>
           </a:bodyPr>
           <a:lstStyle/>
@@ -26383,7 +27411,7 @@
           <a:noFill/>
         </p:spPr>
         <p:txBody>
-          <a:bodyPr wrap="square" lIns="0" rIns="0" tIns="0" bIns="0" anchor="t">
+          <a:bodyPr wrap="square" lIns="0" tIns="0" rIns="0" bIns="0" anchor="t">
             <a:spAutoFit/>
           </a:bodyPr>
           <a:lstStyle/>
@@ -26442,6 +27470,7 @@
           <a:lstStyle/>
           <a:p>
             <a:pPr algn="ctr"/>
+            <a:endParaRPr/>
           </a:p>
         </p:txBody>
       </p:sp>
@@ -26488,6 +27517,7 @@
           <a:lstStyle/>
           <a:p>
             <a:pPr algn="ctr"/>
+            <a:endParaRPr/>
           </a:p>
         </p:txBody>
       </p:sp>
@@ -26508,7 +27538,7 @@
           <a:noFill/>
         </p:spPr>
         <p:txBody>
-          <a:bodyPr wrap="square" lIns="0" rIns="0" tIns="0" bIns="0" anchor="t">
+          <a:bodyPr wrap="square" lIns="0" tIns="0" rIns="0" bIns="0" anchor="t">
             <a:spAutoFit/>
           </a:bodyPr>
           <a:lstStyle/>
@@ -26543,7 +27573,7 @@
           <a:noFill/>
         </p:spPr>
         <p:txBody>
-          <a:bodyPr wrap="square" lIns="0" rIns="0" tIns="0" bIns="0" anchor="t">
+          <a:bodyPr wrap="square" lIns="0" tIns="0" rIns="0" bIns="0" anchor="t">
             <a:spAutoFit/>
           </a:bodyPr>
           <a:lstStyle/>
@@ -26604,6 +27634,7 @@
           <a:lstStyle/>
           <a:p>
             <a:pPr algn="ctr"/>
+            <a:endParaRPr/>
           </a:p>
         </p:txBody>
       </p:sp>
@@ -26624,7 +27655,7 @@
           <a:noFill/>
         </p:spPr>
         <p:txBody>
-          <a:bodyPr wrap="square" lIns="0" rIns="0" tIns="0" bIns="0" anchor="t">
+          <a:bodyPr wrap="square" lIns="0" tIns="0" rIns="0" bIns="0" anchor="t">
             <a:spAutoFit/>
           </a:bodyPr>
           <a:lstStyle/>
@@ -26651,7 +27682,7 @@
 </file>
 
 <file path=ppt/slides/slide8.xml><?xml version="1.0" encoding="utf-8"?>
-<p:sld xmlns:a="http://schemas.openxmlformats.org/drawingml/2006/main" xmlns:p="http://schemas.openxmlformats.org/presentationml/2006/main" xmlns:r="http://schemas.openxmlformats.org/officeDocument/2006/relationships">
+<p:sld xmlns:a="http://schemas.openxmlformats.org/drawingml/2006/main" xmlns:r="http://schemas.openxmlformats.org/officeDocument/2006/relationships" xmlns:p="http://schemas.openxmlformats.org/presentationml/2006/main">
   <p:cSld>
     <p:spTree>
       <p:nvGrpSpPr>
@@ -26659,7 +27690,14 @@
         <p:cNvGrpSpPr/>
         <p:nvPr/>
       </p:nvGrpSpPr>
-      <p:grpSpPr/>
+      <p:grpSpPr>
+        <a:xfrm>
+          <a:off x="0" y="0"/>
+          <a:ext cx="0" cy="0"/>
+          <a:chOff x="0" y="0"/>
+          <a:chExt cx="0" cy="0"/>
+        </a:xfrm>
+      </p:grpSpPr>
       <p:sp>
         <p:nvSpPr>
           <p:cNvPr id="2" name="Rectangle 1"/>
@@ -26701,6 +27739,7 @@
           <a:lstStyle/>
           <a:p>
             <a:pPr algn="ctr"/>
+            <a:endParaRPr/>
           </a:p>
         </p:txBody>
       </p:sp>
@@ -26721,7 +27760,7 @@
           <a:noFill/>
         </p:spPr>
         <p:txBody>
-          <a:bodyPr wrap="square" lIns="0" rIns="0" tIns="0" bIns="0" anchor="t">
+          <a:bodyPr wrap="square" lIns="0" tIns="0" rIns="0" bIns="0" anchor="t">
             <a:spAutoFit/>
           </a:bodyPr>
           <a:lstStyle/>
@@ -26756,7 +27795,7 @@
           <a:noFill/>
         </p:spPr>
         <p:txBody>
-          <a:bodyPr wrap="square" lIns="0" rIns="0" tIns="0" bIns="0" anchor="t">
+          <a:bodyPr wrap="square" lIns="0" tIns="0" rIns="0" bIns="0" anchor="t">
             <a:spAutoFit/>
           </a:bodyPr>
           <a:lstStyle/>
@@ -26815,6 +27854,7 @@
           <a:lstStyle/>
           <a:p>
             <a:pPr algn="ctr"/>
+            <a:endParaRPr/>
           </a:p>
         </p:txBody>
       </p:sp>
@@ -26835,7 +27875,7 @@
           <a:noFill/>
         </p:spPr>
         <p:txBody>
-          <a:bodyPr wrap="square" lIns="0" rIns="0" tIns="0" bIns="0" anchor="t">
+          <a:bodyPr wrap="square" lIns="0" tIns="0" rIns="0" bIns="0" anchor="t">
             <a:spAutoFit/>
           </a:bodyPr>
           <a:lstStyle/>
@@ -26896,6 +27936,7 @@
           <a:lstStyle/>
           <a:p>
             <a:pPr algn="ctr"/>
+            <a:endParaRPr/>
           </a:p>
         </p:txBody>
       </p:sp>
@@ -26916,7 +27957,7 @@
           <a:noFill/>
         </p:spPr>
         <p:txBody>
-          <a:bodyPr wrap="square" lIns="0" rIns="0" tIns="0" bIns="0" anchor="t">
+          <a:bodyPr wrap="square" lIns="0" tIns="0" rIns="0" bIns="0" anchor="t">
             <a:spAutoFit/>
           </a:bodyPr>
           <a:lstStyle/>
@@ -26951,7 +27992,7 @@
           <a:noFill/>
         </p:spPr>
         <p:txBody>
-          <a:bodyPr wrap="square" lIns="0" rIns="0" tIns="0" bIns="0" anchor="t">
+          <a:bodyPr wrap="square" lIns="0" tIns="0" rIns="0" bIns="0" anchor="t">
             <a:spAutoFit/>
           </a:bodyPr>
           <a:lstStyle/>
@@ -27016,6 +28057,7 @@
           <a:lstStyle/>
           <a:p>
             <a:pPr algn="ctr"/>
+            <a:endParaRPr/>
           </a:p>
         </p:txBody>
       </p:sp>
@@ -27036,7 +28078,7 @@
           <a:noFill/>
         </p:spPr>
         <p:txBody>
-          <a:bodyPr wrap="square" lIns="0" rIns="0" tIns="0" bIns="0" anchor="t">
+          <a:bodyPr wrap="square" lIns="0" tIns="0" rIns="0" bIns="0" anchor="t">
             <a:spAutoFit/>
           </a:bodyPr>
           <a:lstStyle/>
@@ -27071,7 +28113,7 @@
           <a:noFill/>
         </p:spPr>
         <p:txBody>
-          <a:bodyPr wrap="square" lIns="0" rIns="0" tIns="0" bIns="0" anchor="t">
+          <a:bodyPr wrap="square" lIns="0" tIns="0" rIns="0" bIns="0" anchor="t">
             <a:spAutoFit/>
           </a:bodyPr>
           <a:lstStyle/>
@@ -27136,6 +28178,7 @@
           <a:lstStyle/>
           <a:p>
             <a:pPr algn="ctr"/>
+            <a:endParaRPr/>
           </a:p>
         </p:txBody>
       </p:sp>
@@ -27156,7 +28199,7 @@
           <a:noFill/>
         </p:spPr>
         <p:txBody>
-          <a:bodyPr wrap="square" lIns="0" rIns="0" tIns="0" bIns="0" anchor="t">
+          <a:bodyPr wrap="square" lIns="0" tIns="0" rIns="0" bIns="0" anchor="t">
             <a:spAutoFit/>
           </a:bodyPr>
           <a:lstStyle/>
@@ -27191,7 +28234,7 @@
           <a:noFill/>
         </p:spPr>
         <p:txBody>
-          <a:bodyPr wrap="square" lIns="0" rIns="0" tIns="0" bIns="0" anchor="t">
+          <a:bodyPr wrap="square" lIns="0" tIns="0" rIns="0" bIns="0" anchor="t">
             <a:spAutoFit/>
           </a:bodyPr>
           <a:lstStyle/>
@@ -27256,6 +28299,7 @@
           <a:lstStyle/>
           <a:p>
             <a:pPr algn="ctr"/>
+            <a:endParaRPr/>
           </a:p>
         </p:txBody>
       </p:sp>
@@ -27276,7 +28320,7 @@
           <a:noFill/>
         </p:spPr>
         <p:txBody>
-          <a:bodyPr wrap="square" lIns="0" rIns="0" tIns="0" bIns="0" anchor="t">
+          <a:bodyPr wrap="square" lIns="0" tIns="0" rIns="0" bIns="0" anchor="t">
             <a:spAutoFit/>
           </a:bodyPr>
           <a:lstStyle/>
@@ -27311,7 +28355,7 @@
           <a:noFill/>
         </p:spPr>
         <p:txBody>
-          <a:bodyPr wrap="square" lIns="0" rIns="0" tIns="0" bIns="0" anchor="t">
+          <a:bodyPr wrap="square" lIns="0" tIns="0" rIns="0" bIns="0" anchor="t">
             <a:spAutoFit/>
           </a:bodyPr>
           <a:lstStyle/>
@@ -27342,7 +28386,7 @@
 </file>
 
 <file path=ppt/slides/slide9.xml><?xml version="1.0" encoding="utf-8"?>
-<p:sld xmlns:a="http://schemas.openxmlformats.org/drawingml/2006/main" xmlns:p="http://schemas.openxmlformats.org/presentationml/2006/main" xmlns:r="http://schemas.openxmlformats.org/officeDocument/2006/relationships">
+<p:sld xmlns:a="http://schemas.openxmlformats.org/drawingml/2006/main" xmlns:r="http://schemas.openxmlformats.org/officeDocument/2006/relationships" xmlns:p="http://schemas.openxmlformats.org/presentationml/2006/main">
   <p:cSld>
     <p:spTree>
       <p:nvGrpSpPr>
@@ -27350,7 +28394,14 @@
         <p:cNvGrpSpPr/>
         <p:nvPr/>
       </p:nvGrpSpPr>
-      <p:grpSpPr/>
+      <p:grpSpPr>
+        <a:xfrm>
+          <a:off x="0" y="0"/>
+          <a:ext cx="0" cy="0"/>
+          <a:chOff x="0" y="0"/>
+          <a:chExt cx="0" cy="0"/>
+        </a:xfrm>
+      </p:grpSpPr>
       <p:sp>
         <p:nvSpPr>
           <p:cNvPr id="2" name="Rectangle 1"/>
@@ -27392,6 +28443,7 @@
           <a:lstStyle/>
           <a:p>
             <a:pPr algn="ctr"/>
+            <a:endParaRPr/>
           </a:p>
         </p:txBody>
       </p:sp>
@@ -27412,7 +28464,7 @@
           <a:noFill/>
         </p:spPr>
         <p:txBody>
-          <a:bodyPr wrap="square" lIns="0" rIns="0" tIns="0" bIns="0" anchor="t">
+          <a:bodyPr wrap="square" lIns="0" tIns="0" rIns="0" bIns="0" anchor="t">
             <a:spAutoFit/>
           </a:bodyPr>
           <a:lstStyle/>
@@ -27447,7 +28499,7 @@
           <a:noFill/>
         </p:spPr>
         <p:txBody>
-          <a:bodyPr wrap="square" lIns="0" rIns="0" tIns="0" bIns="0" anchor="t">
+          <a:bodyPr wrap="square" lIns="0" tIns="0" rIns="0" bIns="0" anchor="t">
             <a:spAutoFit/>
           </a:bodyPr>
           <a:lstStyle/>
@@ -27506,6 +28558,7 @@
           <a:lstStyle/>
           <a:p>
             <a:pPr algn="ctr"/>
+            <a:endParaRPr/>
           </a:p>
         </p:txBody>
       </p:sp>
@@ -27526,7 +28579,7 @@
           <a:noFill/>
         </p:spPr>
         <p:txBody>
-          <a:bodyPr wrap="square" lIns="0" rIns="0" tIns="0" bIns="0" anchor="t">
+          <a:bodyPr wrap="square" lIns="0" tIns="0" rIns="0" bIns="0" anchor="t">
             <a:spAutoFit/>
           </a:bodyPr>
           <a:lstStyle/>
@@ -27587,6 +28640,7 @@
           <a:lstStyle/>
           <a:p>
             <a:pPr algn="ctr"/>
+            <a:endParaRPr/>
           </a:p>
         </p:txBody>
       </p:sp>
@@ -27607,7 +28661,7 @@
           <a:noFill/>
         </p:spPr>
         <p:txBody>
-          <a:bodyPr wrap="square" lIns="0" rIns="0" tIns="0" bIns="0" anchor="t">
+          <a:bodyPr wrap="square" lIns="0" tIns="0" rIns="0" bIns="0" anchor="t">
             <a:spAutoFit/>
           </a:bodyPr>
           <a:lstStyle/>
@@ -27642,7 +28696,7 @@
           <a:noFill/>
         </p:spPr>
         <p:txBody>
-          <a:bodyPr wrap="square" lIns="0" rIns="0" tIns="0" bIns="0" anchor="t">
+          <a:bodyPr wrap="square" lIns="0" tIns="0" rIns="0" bIns="0" anchor="t">
             <a:spAutoFit/>
           </a:bodyPr>
           <a:lstStyle/>
@@ -27707,6 +28761,7 @@
           <a:lstStyle/>
           <a:p>
             <a:pPr algn="ctr"/>
+            <a:endParaRPr/>
           </a:p>
         </p:txBody>
       </p:sp>
@@ -27753,6 +28808,7 @@
           <a:lstStyle/>
           <a:p>
             <a:pPr algn="ctr"/>
+            <a:endParaRPr/>
           </a:p>
         </p:txBody>
       </p:sp>
@@ -27773,7 +28829,7 @@
           <a:noFill/>
         </p:spPr>
         <p:txBody>
-          <a:bodyPr wrap="square" lIns="0" rIns="0" tIns="0" bIns="0" anchor="t">
+          <a:bodyPr wrap="square" lIns="0" tIns="0" rIns="0" bIns="0" anchor="t">
             <a:spAutoFit/>
           </a:bodyPr>
           <a:lstStyle/>
@@ -27808,7 +28864,7 @@
           <a:noFill/>
         </p:spPr>
         <p:txBody>
-          <a:bodyPr wrap="square" lIns="0" rIns="0" tIns="0" bIns="0" anchor="t">
+          <a:bodyPr wrap="square" lIns="0" tIns="0" rIns="0" bIns="0" anchor="t">
             <a:spAutoFit/>
           </a:bodyPr>
           <a:lstStyle/>
@@ -27847,7 +28903,7 @@
           <a:noFill/>
         </p:spPr>
         <p:txBody>
-          <a:bodyPr wrap="square" lIns="0" rIns="0" tIns="0" bIns="0" anchor="t">
+          <a:bodyPr wrap="square" lIns="0" tIns="0" rIns="0" bIns="0" anchor="t">
             <a:spAutoFit/>
           </a:bodyPr>
           <a:lstStyle/>
@@ -27912,6 +28968,7 @@
           <a:lstStyle/>
           <a:p>
             <a:pPr algn="ctr"/>
+            <a:endParaRPr/>
           </a:p>
         </p:txBody>
       </p:sp>
@@ -27958,6 +29015,7 @@
           <a:lstStyle/>
           <a:p>
             <a:pPr algn="ctr"/>
+            <a:endParaRPr/>
           </a:p>
         </p:txBody>
       </p:sp>
@@ -27978,7 +29036,7 @@
           <a:noFill/>
         </p:spPr>
         <p:txBody>
-          <a:bodyPr wrap="square" lIns="0" rIns="0" tIns="0" bIns="0" anchor="t">
+          <a:bodyPr wrap="square" lIns="0" tIns="0" rIns="0" bIns="0" anchor="t">
             <a:spAutoFit/>
           </a:bodyPr>
           <a:lstStyle/>
@@ -28013,7 +29071,7 @@
           <a:noFill/>
         </p:spPr>
         <p:txBody>
-          <a:bodyPr wrap="square" lIns="0" rIns="0" tIns="0" bIns="0" anchor="t">
+          <a:bodyPr wrap="square" lIns="0" tIns="0" rIns="0" bIns="0" anchor="t">
             <a:spAutoFit/>
           </a:bodyPr>
           <a:lstStyle/>
@@ -28052,7 +29110,7 @@
           <a:noFill/>
         </p:spPr>
         <p:txBody>
-          <a:bodyPr wrap="square" lIns="0" rIns="0" tIns="0" bIns="0" anchor="t">
+          <a:bodyPr wrap="square" lIns="0" tIns="0" rIns="0" bIns="0" anchor="t">
             <a:spAutoFit/>
           </a:bodyPr>
           <a:lstStyle/>
@@ -28117,6 +29175,7 @@
           <a:lstStyle/>
           <a:p>
             <a:pPr algn="ctr"/>
+            <a:endParaRPr/>
           </a:p>
         </p:txBody>
       </p:sp>
@@ -28163,6 +29222,7 @@
           <a:lstStyle/>
           <a:p>
             <a:pPr algn="ctr"/>
+            <a:endParaRPr/>
           </a:p>
         </p:txBody>
       </p:sp>
@@ -28183,7 +29243,7 @@
           <a:noFill/>
         </p:spPr>
         <p:txBody>
-          <a:bodyPr wrap="square" lIns="0" rIns="0" tIns="0" bIns="0" anchor="t">
+          <a:bodyPr wrap="square" lIns="0" tIns="0" rIns="0" bIns="0" anchor="t">
             <a:spAutoFit/>
           </a:bodyPr>
           <a:lstStyle/>
@@ -28218,7 +29278,7 @@
           <a:noFill/>
         </p:spPr>
         <p:txBody>
-          <a:bodyPr wrap="square" lIns="0" rIns="0" tIns="0" bIns="0" anchor="t">
+          <a:bodyPr wrap="square" lIns="0" tIns="0" rIns="0" bIns="0" anchor="t">
             <a:spAutoFit/>
           </a:bodyPr>
           <a:lstStyle/>
@@ -28257,7 +29317,7 @@
           <a:noFill/>
         </p:spPr>
         <p:txBody>
-          <a:bodyPr wrap="square" lIns="0" rIns="0" tIns="0" bIns="0" anchor="t">
+          <a:bodyPr wrap="square" lIns="0" tIns="0" rIns="0" bIns="0" anchor="t">
             <a:spAutoFit/>
           </a:bodyPr>
           <a:lstStyle/>
@@ -28322,6 +29382,7 @@
           <a:lstStyle/>
           <a:p>
             <a:pPr algn="ctr"/>
+            <a:endParaRPr/>
           </a:p>
         </p:txBody>
       </p:sp>
@@ -28342,7 +29403,7 @@
           <a:noFill/>
         </p:spPr>
         <p:txBody>
-          <a:bodyPr wrap="square" lIns="0" rIns="0" tIns="0" bIns="0" anchor="t">
+          <a:bodyPr wrap="square" lIns="0" tIns="0" rIns="0" bIns="0" anchor="t">
             <a:spAutoFit/>
           </a:bodyPr>
           <a:lstStyle/>

--- a/BitacorasFirmadasPractica/ExposicionFinal/Resultado/PracticaProfesional_PresentacionFinal_KevinCampos.pptx
+++ b/BitacorasFirmadasPractica/ExposicionFinal/Resultado/PracticaProfesional_PresentacionFinal_KevinCampos.pptx
@@ -4485,13 +4485,139 @@
               </a:lnSpc>
             </a:pPr>
             <a:r>
-              <a:rPr sz="1200" b="0">
+              <a:rPr sz="1200" b="0" dirty="0">
                 <a:solidFill>
                   <a:srgbClr val="CADCFC"/>
                 </a:solidFill>
                 <a:latin typeface="Calibri"/>
               </a:rPr>
-              <a:t>Es la instancia responsable del seguimiento y la evaluación de los proyectos estratégicos de la Universidad.</a:t>
+              <a:t>Es la </a:t>
+            </a:r>
+            <a:r>
+              <a:rPr sz="1200" b="0" dirty="0" err="1">
+                <a:solidFill>
+                  <a:srgbClr val="CADCFC"/>
+                </a:solidFill>
+                <a:latin typeface="Calibri"/>
+              </a:rPr>
+              <a:t>instancia</a:t>
+            </a:r>
+            <a:r>
+              <a:rPr sz="1200" b="0" dirty="0">
+                <a:solidFill>
+                  <a:srgbClr val="CADCFC"/>
+                </a:solidFill>
+                <a:latin typeface="Calibri"/>
+              </a:rPr>
+              <a:t> </a:t>
+            </a:r>
+            <a:r>
+              <a:rPr sz="1200" b="0" dirty="0" err="1">
+                <a:solidFill>
+                  <a:srgbClr val="CADCFC"/>
+                </a:solidFill>
+                <a:latin typeface="Calibri"/>
+              </a:rPr>
+              <a:t>responsable</a:t>
+            </a:r>
+            <a:r>
+              <a:rPr sz="1200" b="0" dirty="0">
+                <a:solidFill>
+                  <a:srgbClr val="CADCFC"/>
+                </a:solidFill>
+                <a:latin typeface="Calibri"/>
+              </a:rPr>
+              <a:t> del </a:t>
+            </a:r>
+            <a:r>
+              <a:rPr sz="1200" b="0" dirty="0" err="1">
+                <a:solidFill>
+                  <a:srgbClr val="CADCFC"/>
+                </a:solidFill>
+                <a:latin typeface="Calibri"/>
+              </a:rPr>
+              <a:t>seguimiento</a:t>
+            </a:r>
+            <a:r>
+              <a:rPr sz="1200" b="0" dirty="0">
+                <a:solidFill>
+                  <a:srgbClr val="CADCFC"/>
+                </a:solidFill>
+                <a:latin typeface="Calibri"/>
+              </a:rPr>
+              <a:t> y la </a:t>
+            </a:r>
+            <a:r>
+              <a:rPr sz="1200" b="0" dirty="0" err="1">
+                <a:solidFill>
+                  <a:srgbClr val="CADCFC"/>
+                </a:solidFill>
+                <a:latin typeface="Calibri"/>
+              </a:rPr>
+              <a:t>evaluación</a:t>
+            </a:r>
+            <a:r>
+              <a:rPr sz="1200" b="0" dirty="0">
+                <a:solidFill>
+                  <a:srgbClr val="CADCFC"/>
+                </a:solidFill>
+                <a:latin typeface="Calibri"/>
+              </a:rPr>
+              <a:t> de </a:t>
+            </a:r>
+            <a:r>
+              <a:rPr sz="1200" b="0" dirty="0" err="1">
+                <a:solidFill>
+                  <a:srgbClr val="CADCFC"/>
+                </a:solidFill>
+                <a:latin typeface="Calibri"/>
+              </a:rPr>
+              <a:t>los</a:t>
+            </a:r>
+            <a:r>
+              <a:rPr sz="1200" b="0" dirty="0">
+                <a:solidFill>
+                  <a:srgbClr val="CADCFC"/>
+                </a:solidFill>
+                <a:latin typeface="Calibri"/>
+              </a:rPr>
+              <a:t> </a:t>
+            </a:r>
+            <a:r>
+              <a:rPr sz="1200" b="0" dirty="0" err="1">
+                <a:solidFill>
+                  <a:srgbClr val="CADCFC"/>
+                </a:solidFill>
+                <a:latin typeface="Calibri"/>
+              </a:rPr>
+              <a:t>proyectos</a:t>
+            </a:r>
+            <a:r>
+              <a:rPr sz="1200" b="0" dirty="0">
+                <a:solidFill>
+                  <a:srgbClr val="CADCFC"/>
+                </a:solidFill>
+                <a:latin typeface="Calibri"/>
+              </a:rPr>
+              <a:t> </a:t>
+            </a:r>
+            <a:r>
+              <a:rPr sz="1200" b="0" dirty="0" err="1">
+                <a:solidFill>
+                  <a:srgbClr val="CADCFC"/>
+                </a:solidFill>
+                <a:latin typeface="Calibri"/>
+              </a:rPr>
+              <a:t>estratégicos</a:t>
+            </a:r>
+            <a:r>
+              <a:rPr sz="1200" b="0" dirty="0">
+                <a:solidFill>
+                  <a:srgbClr val="CADCFC"/>
+                </a:solidFill>
+                <a:latin typeface="Calibri"/>
+              </a:rPr>
+              <a:t> de la Universidad.</a:t>
             </a:r>
           </a:p>
           <a:p>
@@ -4500,7 +4626,7 @@
                 <a:spcPct val="122000"/>
               </a:lnSpc>
             </a:pPr>
-            <a:endParaRPr sz="1200" b="0">
+            <a:endParaRPr sz="1200" b="0" dirty="0">
               <a:solidFill>
                 <a:srgbClr val="CADCFC"/>
               </a:solidFill>
@@ -4514,13 +4640,31 @@
               </a:lnSpc>
             </a:pPr>
             <a:r>
-              <a:rPr sz="1200" b="0">
+              <a:rPr sz="1200" b="0" dirty="0">
                 <a:solidFill>
                   <a:srgbClr val="CADCFC"/>
                 </a:solidFill>
                 <a:latin typeface="Calibri"/>
               </a:rPr>
-              <a:t>Supervisor de la práctica:</a:t>
+              <a:t>Supervisor de la </a:t>
+            </a:r>
+            <a:r>
+              <a:rPr sz="1200" b="0" dirty="0" err="1">
+                <a:solidFill>
+                  <a:srgbClr val="CADCFC"/>
+                </a:solidFill>
+                <a:latin typeface="Calibri"/>
+              </a:rPr>
+              <a:t>práctica</a:t>
+            </a:r>
+            <a:r>
+              <a:rPr sz="1200" b="0" dirty="0">
+                <a:solidFill>
+                  <a:srgbClr val="CADCFC"/>
+                </a:solidFill>
+                <a:latin typeface="Calibri"/>
+              </a:rPr>
+              <a:t>:</a:t>
             </a:r>
           </a:p>
           <a:p>
@@ -4530,7 +4674,7 @@
               </a:lnSpc>
             </a:pPr>
             <a:r>
-              <a:rPr sz="1200" b="0">
+              <a:rPr sz="1200" b="0" dirty="0">
                 <a:solidFill>
                   <a:srgbClr val="CADCFC"/>
                 </a:solidFill>
@@ -4546,13 +4690,58 @@
               </a:lnSpc>
             </a:pPr>
             <a:r>
-              <a:rPr sz="1200" b="0">
+              <a:rPr sz="1200" b="0" dirty="0" err="1">
                 <a:solidFill>
                   <a:srgbClr val="CADCFC"/>
                 </a:solidFill>
                 <a:latin typeface="Calibri"/>
               </a:rPr>
-              <a:t>Coordinador del Programa en TICS.</a:t>
+              <a:t>Coordinador</a:t>
+            </a:r>
+            <a:r>
+              <a:rPr sz="1200" b="0" dirty="0">
+                <a:solidFill>
+                  <a:srgbClr val="CADCFC"/>
+                </a:solidFill>
+                <a:latin typeface="Calibri"/>
+              </a:rPr>
+              <a:t> del </a:t>
+            </a:r>
+            <a:r>
+              <a:rPr sz="1200" b="0" dirty="0" err="1">
+                <a:solidFill>
+                  <a:srgbClr val="CADCFC"/>
+                </a:solidFill>
+                <a:latin typeface="Calibri"/>
+              </a:rPr>
+              <a:t>Programa</a:t>
+            </a:r>
+            <a:r>
+              <a:rPr sz="1200" b="0" dirty="0">
+                <a:solidFill>
+                  <a:srgbClr val="CADCFC"/>
+                </a:solidFill>
+                <a:latin typeface="Calibri"/>
+              </a:rPr>
+              <a:t> </a:t>
+            </a:r>
+            <a:r>
+              <a:rPr sz="1200" b="0" dirty="0" err="1">
+                <a:solidFill>
+                  <a:srgbClr val="CADCFC"/>
+                </a:solidFill>
+                <a:latin typeface="Calibri"/>
+              </a:rPr>
+              <a:t>en</a:t>
+            </a:r>
+            <a:r>
+              <a:rPr sz="1200" b="0" dirty="0">
+                <a:solidFill>
+                  <a:srgbClr val="CADCFC"/>
+                </a:solidFill>
+                <a:latin typeface="Calibri"/>
+              </a:rPr>
+              <a:t> TICS.</a:t>
             </a:r>
           </a:p>
         </p:txBody>
@@ -11864,13 +12053,445 @@
               </a:lnSpc>
             </a:pPr>
             <a:r>
-              <a:rPr sz="1200" b="0">
+              <a:rPr sz="1200" b="0" dirty="0">
                 <a:solidFill>
                   <a:srgbClr val="475569"/>
                 </a:solidFill>
                 <a:latin typeface="Calibri"/>
               </a:rPr>
-              <a:t>La matriz de acciones se llenaba a mano en un archivo de Excel. La información se pedía por correo a cada sede, se copiaba y se pegaba, y cada persona podía escribir el nombre de un objetivo, una meta o un beneficiario de forma distinta. Es un proceso lento y difícil de verificar.</a:t>
+              <a:t>La </a:t>
+            </a:r>
+            <a:r>
+              <a:rPr sz="1200" b="0" dirty="0" err="1">
+                <a:solidFill>
+                  <a:srgbClr val="475569"/>
+                </a:solidFill>
+                <a:latin typeface="Calibri"/>
+              </a:rPr>
+              <a:t>matriz</a:t>
+            </a:r>
+            <a:r>
+              <a:rPr sz="1200" b="0" dirty="0">
+                <a:solidFill>
+                  <a:srgbClr val="475569"/>
+                </a:solidFill>
+                <a:latin typeface="Calibri"/>
+              </a:rPr>
+              <a:t> de </a:t>
+            </a:r>
+            <a:r>
+              <a:rPr sz="1200" b="0" dirty="0" err="1">
+                <a:solidFill>
+                  <a:srgbClr val="475569"/>
+                </a:solidFill>
+                <a:latin typeface="Calibri"/>
+              </a:rPr>
+              <a:t>acciones</a:t>
+            </a:r>
+            <a:r>
+              <a:rPr sz="1200" b="0" dirty="0">
+                <a:solidFill>
+                  <a:srgbClr val="475569"/>
+                </a:solidFill>
+                <a:latin typeface="Calibri"/>
+              </a:rPr>
+              <a:t> se </a:t>
+            </a:r>
+            <a:r>
+              <a:rPr sz="1200" b="0" dirty="0" err="1">
+                <a:solidFill>
+                  <a:srgbClr val="475569"/>
+                </a:solidFill>
+                <a:latin typeface="Calibri"/>
+              </a:rPr>
+              <a:t>llenaba</a:t>
+            </a:r>
+            <a:r>
+              <a:rPr sz="1200" b="0" dirty="0">
+                <a:solidFill>
+                  <a:srgbClr val="475569"/>
+                </a:solidFill>
+                <a:latin typeface="Calibri"/>
+              </a:rPr>
+              <a:t> a mano </a:t>
+            </a:r>
+            <a:r>
+              <a:rPr sz="1200" b="0" dirty="0" err="1">
+                <a:solidFill>
+                  <a:srgbClr val="475569"/>
+                </a:solidFill>
+                <a:latin typeface="Calibri"/>
+              </a:rPr>
+              <a:t>en</a:t>
+            </a:r>
+            <a:r>
+              <a:rPr sz="1200" b="0" dirty="0">
+                <a:solidFill>
+                  <a:srgbClr val="475569"/>
+                </a:solidFill>
+                <a:latin typeface="Calibri"/>
+              </a:rPr>
+              <a:t> un </a:t>
+            </a:r>
+            <a:r>
+              <a:rPr sz="1200" b="0" dirty="0" err="1">
+                <a:solidFill>
+                  <a:srgbClr val="475569"/>
+                </a:solidFill>
+                <a:latin typeface="Calibri"/>
+              </a:rPr>
+              <a:t>archivo</a:t>
+            </a:r>
+            <a:r>
+              <a:rPr sz="1200" b="0" dirty="0">
+                <a:solidFill>
+                  <a:srgbClr val="475569"/>
+                </a:solidFill>
+                <a:latin typeface="Calibri"/>
+              </a:rPr>
+              <a:t> de Excel. La </a:t>
+            </a:r>
+            <a:r>
+              <a:rPr sz="1200" b="0" dirty="0" err="1">
+                <a:solidFill>
+                  <a:srgbClr val="475569"/>
+                </a:solidFill>
+                <a:latin typeface="Calibri"/>
+              </a:rPr>
+              <a:t>información</a:t>
+            </a:r>
+            <a:r>
+              <a:rPr sz="1200" b="0" dirty="0">
+                <a:solidFill>
+                  <a:srgbClr val="475569"/>
+                </a:solidFill>
+                <a:latin typeface="Calibri"/>
+              </a:rPr>
+              <a:t> se </a:t>
+            </a:r>
+            <a:r>
+              <a:rPr sz="1200" b="0" dirty="0" err="1">
+                <a:solidFill>
+                  <a:srgbClr val="475569"/>
+                </a:solidFill>
+                <a:latin typeface="Calibri"/>
+              </a:rPr>
+              <a:t>pedía</a:t>
+            </a:r>
+            <a:r>
+              <a:rPr sz="1200" b="0" dirty="0">
+                <a:solidFill>
+                  <a:srgbClr val="475569"/>
+                </a:solidFill>
+                <a:latin typeface="Calibri"/>
+              </a:rPr>
+              <a:t> </a:t>
+            </a:r>
+            <a:r>
+              <a:rPr sz="1200" b="0" dirty="0" err="1">
+                <a:solidFill>
+                  <a:srgbClr val="475569"/>
+                </a:solidFill>
+                <a:latin typeface="Calibri"/>
+              </a:rPr>
+              <a:t>por</a:t>
+            </a:r>
+            <a:r>
+              <a:rPr sz="1200" b="0" dirty="0">
+                <a:solidFill>
+                  <a:srgbClr val="475569"/>
+                </a:solidFill>
+                <a:latin typeface="Calibri"/>
+              </a:rPr>
+              <a:t> </a:t>
+            </a:r>
+            <a:r>
+              <a:rPr sz="1200" b="0" dirty="0" err="1">
+                <a:solidFill>
+                  <a:srgbClr val="475569"/>
+                </a:solidFill>
+                <a:latin typeface="Calibri"/>
+              </a:rPr>
+              <a:t>correo</a:t>
+            </a:r>
+            <a:r>
+              <a:rPr sz="1200" b="0" dirty="0">
+                <a:solidFill>
+                  <a:srgbClr val="475569"/>
+                </a:solidFill>
+                <a:latin typeface="Calibri"/>
+              </a:rPr>
+              <a:t> a </a:t>
+            </a:r>
+            <a:r>
+              <a:rPr sz="1200" b="0" dirty="0" err="1">
+                <a:solidFill>
+                  <a:srgbClr val="475569"/>
+                </a:solidFill>
+                <a:latin typeface="Calibri"/>
+              </a:rPr>
+              <a:t>cada</a:t>
+            </a:r>
+            <a:r>
+              <a:rPr sz="1200" b="0" dirty="0">
+                <a:solidFill>
+                  <a:srgbClr val="475569"/>
+                </a:solidFill>
+                <a:latin typeface="Calibri"/>
+              </a:rPr>
+              <a:t> </a:t>
+            </a:r>
+            <a:r>
+              <a:rPr sz="1200" b="0" dirty="0" err="1">
+                <a:solidFill>
+                  <a:srgbClr val="475569"/>
+                </a:solidFill>
+                <a:latin typeface="Calibri"/>
+              </a:rPr>
+              <a:t>sede</a:t>
+            </a:r>
+            <a:r>
+              <a:rPr sz="1200" b="0" dirty="0">
+                <a:solidFill>
+                  <a:srgbClr val="475569"/>
+                </a:solidFill>
+                <a:latin typeface="Calibri"/>
+              </a:rPr>
+              <a:t>, se </a:t>
+            </a:r>
+            <a:r>
+              <a:rPr sz="1200" b="0" dirty="0" err="1">
+                <a:solidFill>
+                  <a:srgbClr val="475569"/>
+                </a:solidFill>
+                <a:latin typeface="Calibri"/>
+              </a:rPr>
+              <a:t>copiaba</a:t>
+            </a:r>
+            <a:r>
+              <a:rPr sz="1200" b="0" dirty="0">
+                <a:solidFill>
+                  <a:srgbClr val="475569"/>
+                </a:solidFill>
+                <a:latin typeface="Calibri"/>
+              </a:rPr>
+              <a:t> y se </a:t>
+            </a:r>
+            <a:r>
+              <a:rPr sz="1200" b="0" dirty="0" err="1">
+                <a:solidFill>
+                  <a:srgbClr val="475569"/>
+                </a:solidFill>
+                <a:latin typeface="Calibri"/>
+              </a:rPr>
+              <a:t>pegaba</a:t>
+            </a:r>
+            <a:r>
+              <a:rPr sz="1200" b="0" dirty="0">
+                <a:solidFill>
+                  <a:srgbClr val="475569"/>
+                </a:solidFill>
+                <a:latin typeface="Calibri"/>
+              </a:rPr>
+              <a:t>, y </a:t>
+            </a:r>
+            <a:r>
+              <a:rPr sz="1200" b="0" dirty="0" err="1">
+                <a:solidFill>
+                  <a:srgbClr val="475569"/>
+                </a:solidFill>
+                <a:latin typeface="Calibri"/>
+              </a:rPr>
+              <a:t>cada</a:t>
+            </a:r>
+            <a:r>
+              <a:rPr sz="1200" b="0" dirty="0">
+                <a:solidFill>
+                  <a:srgbClr val="475569"/>
+                </a:solidFill>
+                <a:latin typeface="Calibri"/>
+              </a:rPr>
+              <a:t> persona </a:t>
+            </a:r>
+            <a:r>
+              <a:rPr sz="1200" b="0" dirty="0" err="1">
+                <a:solidFill>
+                  <a:srgbClr val="475569"/>
+                </a:solidFill>
+                <a:latin typeface="Calibri"/>
+              </a:rPr>
+              <a:t>podía</a:t>
+            </a:r>
+            <a:r>
+              <a:rPr sz="1200" b="0" dirty="0">
+                <a:solidFill>
+                  <a:srgbClr val="475569"/>
+                </a:solidFill>
+                <a:latin typeface="Calibri"/>
+              </a:rPr>
+              <a:t> </a:t>
+            </a:r>
+            <a:r>
+              <a:rPr sz="1200" b="0" dirty="0" err="1">
+                <a:solidFill>
+                  <a:srgbClr val="475569"/>
+                </a:solidFill>
+                <a:latin typeface="Calibri"/>
+              </a:rPr>
+              <a:t>escribir</a:t>
+            </a:r>
+            <a:r>
+              <a:rPr sz="1200" b="0" dirty="0">
+                <a:solidFill>
+                  <a:srgbClr val="475569"/>
+                </a:solidFill>
+                <a:latin typeface="Calibri"/>
+              </a:rPr>
+              <a:t> el </a:t>
+            </a:r>
+            <a:r>
+              <a:rPr sz="1200" b="0" dirty="0" err="1">
+                <a:solidFill>
+                  <a:srgbClr val="475569"/>
+                </a:solidFill>
+                <a:latin typeface="Calibri"/>
+              </a:rPr>
+              <a:t>nombre</a:t>
+            </a:r>
+            <a:r>
+              <a:rPr sz="1200" b="0" dirty="0">
+                <a:solidFill>
+                  <a:srgbClr val="475569"/>
+                </a:solidFill>
+                <a:latin typeface="Calibri"/>
+              </a:rPr>
+              <a:t> de un </a:t>
+            </a:r>
+            <a:r>
+              <a:rPr sz="1200" b="0" dirty="0" err="1">
+                <a:solidFill>
+                  <a:srgbClr val="475569"/>
+                </a:solidFill>
+                <a:latin typeface="Calibri"/>
+              </a:rPr>
+              <a:t>objetivo</a:t>
+            </a:r>
+            <a:r>
+              <a:rPr sz="1200" b="0" dirty="0">
+                <a:solidFill>
+                  <a:srgbClr val="475569"/>
+                </a:solidFill>
+                <a:latin typeface="Calibri"/>
+              </a:rPr>
+              <a:t>, </a:t>
+            </a:r>
+            <a:r>
+              <a:rPr sz="1200" b="0" dirty="0" err="1">
+                <a:solidFill>
+                  <a:srgbClr val="475569"/>
+                </a:solidFill>
+                <a:latin typeface="Calibri"/>
+              </a:rPr>
+              <a:t>una</a:t>
+            </a:r>
+            <a:r>
+              <a:rPr sz="1200" b="0" dirty="0">
+                <a:solidFill>
+                  <a:srgbClr val="475569"/>
+                </a:solidFill>
+                <a:latin typeface="Calibri"/>
+              </a:rPr>
+              <a:t> meta o un </a:t>
+            </a:r>
+            <a:r>
+              <a:rPr sz="1200" b="0" dirty="0" err="1">
+                <a:solidFill>
+                  <a:srgbClr val="475569"/>
+                </a:solidFill>
+                <a:latin typeface="Calibri"/>
+              </a:rPr>
+              <a:t>beneficiario</a:t>
+            </a:r>
+            <a:r>
+              <a:rPr sz="1200" b="0" dirty="0">
+                <a:solidFill>
+                  <a:srgbClr val="475569"/>
+                </a:solidFill>
+                <a:latin typeface="Calibri"/>
+              </a:rPr>
+              <a:t> de forma </a:t>
+            </a:r>
+            <a:r>
+              <a:rPr sz="1200" b="0" dirty="0" err="1">
+                <a:solidFill>
+                  <a:srgbClr val="475569"/>
+                </a:solidFill>
+                <a:latin typeface="Calibri"/>
+              </a:rPr>
+              <a:t>distinta</a:t>
+            </a:r>
+            <a:r>
+              <a:rPr sz="1200" b="0" dirty="0">
+                <a:solidFill>
+                  <a:srgbClr val="475569"/>
+                </a:solidFill>
+                <a:latin typeface="Calibri"/>
+              </a:rPr>
+              <a:t>. Es un </a:t>
+            </a:r>
+            <a:r>
+              <a:rPr sz="1200" b="0" dirty="0" err="1">
+                <a:solidFill>
+                  <a:srgbClr val="475569"/>
+                </a:solidFill>
+                <a:latin typeface="Calibri"/>
+              </a:rPr>
+              <a:t>proceso</a:t>
+            </a:r>
+            <a:r>
+              <a:rPr sz="1200" b="0" dirty="0">
+                <a:solidFill>
+                  <a:srgbClr val="475569"/>
+                </a:solidFill>
+                <a:latin typeface="Calibri"/>
+              </a:rPr>
+              <a:t> lento y </a:t>
+            </a:r>
+            <a:r>
+              <a:rPr sz="1200" b="0" dirty="0" err="1">
+                <a:solidFill>
+                  <a:srgbClr val="475569"/>
+                </a:solidFill>
+                <a:latin typeface="Calibri"/>
+              </a:rPr>
+              <a:t>difícil</a:t>
+            </a:r>
+            <a:r>
+              <a:rPr sz="1200" b="0" dirty="0">
+                <a:solidFill>
+                  <a:srgbClr val="475569"/>
+                </a:solidFill>
+                <a:latin typeface="Calibri"/>
+              </a:rPr>
+              <a:t> de </a:t>
+            </a:r>
+            <a:r>
+              <a:rPr sz="1200" b="0" dirty="0" err="1">
+                <a:solidFill>
+                  <a:srgbClr val="475569"/>
+                </a:solidFill>
+                <a:latin typeface="Calibri"/>
+              </a:rPr>
+              <a:t>verificar</a:t>
+            </a:r>
+            <a:r>
+              <a:rPr sz="1200" b="0" dirty="0">
+                <a:solidFill>
+                  <a:srgbClr val="475569"/>
+                </a:solidFill>
+                <a:latin typeface="Calibri"/>
+              </a:rPr>
+              <a:t>.</a:t>
             </a:r>
           </a:p>
         </p:txBody>
@@ -22116,7 +22737,7 @@
           <a:lstStyle/>
           <a:p>
             <a:pPr algn="ctr"/>
-            <a:endParaRPr/>
+            <a:endParaRPr dirty="0"/>
           </a:p>
         </p:txBody>
       </p:sp>
@@ -22211,7 +22832,7 @@
         <p:spPr>
           <a:xfrm>
             <a:off x="3511296" y="4462272"/>
-            <a:ext cx="2331720" cy="1325880"/>
+            <a:ext cx="2331720" cy="613245"/>
           </a:xfrm>
           <a:prstGeom prst="rect">
             <a:avLst/>
@@ -22230,13 +22851,175 @@
               </a:lnSpc>
             </a:pPr>
             <a:r>
-              <a:rPr sz="1150" b="0">
+              <a:rPr sz="1150" b="0" dirty="0">
                 <a:solidFill>
                   <a:srgbClr val="64748B"/>
                 </a:solidFill>
                 <a:latin typeface="Calibri"/>
               </a:rPr>
-              <a:t>Los 239 indicadores oficiales de Naciones Unidas como catálogo único de referencia.</a:t>
+              <a:t>L</a:t>
+            </a:r>
+            <a:r>
+              <a:rPr lang="en-US" sz="1150" b="0" dirty="0">
+                <a:solidFill>
+                  <a:srgbClr val="64748B"/>
+                </a:solidFill>
+                <a:latin typeface="Calibri"/>
+              </a:rPr>
+              <a:t>as </a:t>
+            </a:r>
+            <a:r>
+              <a:rPr lang="en-US" sz="1150" b="0" dirty="0" err="1">
+                <a:solidFill>
+                  <a:srgbClr val="64748B"/>
+                </a:solidFill>
+                <a:latin typeface="Calibri"/>
+              </a:rPr>
+              <a:t>metas</a:t>
+            </a:r>
+            <a:r>
+              <a:rPr lang="en-US" sz="1150" b="0" dirty="0">
+                <a:solidFill>
+                  <a:srgbClr val="64748B"/>
+                </a:solidFill>
+                <a:latin typeface="Calibri"/>
+              </a:rPr>
+              <a:t> y sus</a:t>
+            </a:r>
+            <a:r>
+              <a:rPr sz="1150" b="0" dirty="0">
+                <a:solidFill>
+                  <a:srgbClr val="64748B"/>
+                </a:solidFill>
+                <a:latin typeface="Calibri"/>
+              </a:rPr>
+              <a:t> 239 </a:t>
+            </a:r>
+            <a:r>
+              <a:rPr sz="1150" b="0" dirty="0" err="1">
+                <a:solidFill>
+                  <a:srgbClr val="64748B"/>
+                </a:solidFill>
+                <a:latin typeface="Calibri"/>
+              </a:rPr>
+              <a:t>indicadores</a:t>
+            </a:r>
+            <a:r>
+              <a:rPr sz="1150" b="0" dirty="0">
+                <a:solidFill>
+                  <a:srgbClr val="64748B"/>
+                </a:solidFill>
+                <a:latin typeface="Calibri"/>
+              </a:rPr>
+              <a:t> </a:t>
+            </a:r>
+            <a:r>
+              <a:rPr sz="1150" b="0" dirty="0" err="1">
+                <a:solidFill>
+                  <a:srgbClr val="64748B"/>
+                </a:solidFill>
+                <a:latin typeface="Calibri"/>
+              </a:rPr>
+              <a:t>oficiales</a:t>
+            </a:r>
+            <a:r>
+              <a:rPr sz="1150" b="0" dirty="0">
+                <a:solidFill>
+                  <a:srgbClr val="64748B"/>
+                </a:solidFill>
+                <a:latin typeface="Calibri"/>
+              </a:rPr>
+              <a:t> de </a:t>
+            </a:r>
+            <a:r>
+              <a:rPr sz="1150" b="0" dirty="0" err="1">
+                <a:solidFill>
+                  <a:srgbClr val="64748B"/>
+                </a:solidFill>
+                <a:latin typeface="Calibri"/>
+              </a:rPr>
+              <a:t>Naciones</a:t>
+            </a:r>
+            <a:r>
+              <a:rPr sz="1150" b="0" dirty="0">
+                <a:solidFill>
+                  <a:srgbClr val="64748B"/>
+                </a:solidFill>
+                <a:latin typeface="Calibri"/>
+              </a:rPr>
+              <a:t> Unidas </a:t>
+            </a:r>
+            <a:r>
+              <a:rPr sz="1150" b="0" dirty="0" err="1">
+                <a:solidFill>
+                  <a:srgbClr val="64748B"/>
+                </a:solidFill>
+                <a:latin typeface="Calibri"/>
+              </a:rPr>
+              <a:t>como</a:t>
+            </a:r>
+            <a:r>
+              <a:rPr sz="1150" b="0" dirty="0">
+                <a:solidFill>
+                  <a:srgbClr val="64748B"/>
+                </a:solidFill>
+                <a:latin typeface="Calibri"/>
+              </a:rPr>
+              <a:t> </a:t>
+            </a:r>
+            <a:r>
+              <a:rPr sz="1150" b="0" dirty="0" err="1">
+                <a:solidFill>
+                  <a:srgbClr val="64748B"/>
+                </a:solidFill>
+                <a:latin typeface="Calibri"/>
+              </a:rPr>
+              <a:t>catálogo</a:t>
+            </a:r>
+            <a:r>
+              <a:rPr sz="1150" b="0" dirty="0">
+                <a:solidFill>
+                  <a:srgbClr val="64748B"/>
+                </a:solidFill>
+                <a:latin typeface="Calibri"/>
+              </a:rPr>
+              <a:t> </a:t>
+            </a:r>
+            <a:r>
+              <a:rPr sz="1150" b="0" dirty="0" err="1">
+                <a:solidFill>
+                  <a:srgbClr val="64748B"/>
+                </a:solidFill>
+                <a:latin typeface="Calibri"/>
+              </a:rPr>
+              <a:t>único</a:t>
+            </a:r>
+            <a:r>
+              <a:rPr sz="1150" b="0" dirty="0">
+                <a:solidFill>
+                  <a:srgbClr val="64748B"/>
+                </a:solidFill>
+                <a:latin typeface="Calibri"/>
+              </a:rPr>
+              <a:t> de </a:t>
+            </a:r>
+            <a:r>
+              <a:rPr sz="1150" b="0" dirty="0" err="1">
+                <a:solidFill>
+                  <a:srgbClr val="64748B"/>
+                </a:solidFill>
+                <a:latin typeface="Calibri"/>
+              </a:rPr>
+              <a:t>referencia</a:t>
+            </a:r>
+            <a:r>
+              <a:rPr sz="1150" b="0" dirty="0">
+                <a:solidFill>
+                  <a:srgbClr val="64748B"/>
+                </a:solidFill>
+                <a:latin typeface="Calibri"/>
+              </a:rPr>
+              <a:t>.</a:t>
             </a:r>
           </a:p>
         </p:txBody>
